--- a/catalogues/TerraAssets_Catalogue.pptx
+++ b/catalogues/TerraAssets_Catalogue.pptx
@@ -6,11 +6,12 @@
   </p:sldMasterIdLst>
   <p:sldIdLst>
     <p:sldId id="256" r:id="rId7"/>
-    <p:sldId id="257" r:id="rId8"/>
-    <p:sldId id="258" r:id="rId9"/>
-    <p:sldId id="259" r:id="rId10"/>
-    <p:sldId id="260" r:id="rId11"/>
-    <p:sldId id="261" r:id="rId12"/>
+    <p:sldId id="257" r:id="rId9"/>
+    <p:sldId id="258" r:id="rId10"/>
+    <p:sldId id="259" r:id="rId11"/>
+    <p:sldId id="260" r:id="rId12"/>
+    <p:sldId id="261" r:id="rId13"/>
+    <p:sldId id="262" r:id="rId14"/>
   </p:sldIdLst>
   <p:sldSz cx="12191695" cy="6858000" type="screen4x3"/>
   <p:notesSz cx="6858000" cy="9144000"/>
@@ -110,6 +111,1177 @@
     </a:lvl9pPr>
   </p:defaultTextStyle>
 </p:presentation>
+</file>
+
+<file path=ppt/notesMasters/notesMaster1.xml><?xml version="1.0" encoding="utf-8"?>
+<p:notesMaster xmlns:a="http://schemas.openxmlformats.org/drawingml/2006/main" xmlns:p="http://schemas.openxmlformats.org/presentationml/2006/main" xmlns:r="http://schemas.openxmlformats.org/officeDocument/2006/relationships">
+  <p:cSld>
+    <p:bg>
+      <p:bgRef idx="1001">
+        <a:schemeClr val="bg1"/>
+      </p:bgRef>
+    </p:bg>
+    <p:spTree>
+      <p:nvGrpSpPr>
+        <p:cNvPr id="1" name=""/>
+        <p:cNvGrpSpPr/>
+        <p:nvPr/>
+      </p:nvGrpSpPr>
+      <p:grpSpPr>
+        <a:xfrm>
+          <a:off x="0" y="0"/>
+          <a:ext cx="0" cy="0"/>
+          <a:chOff x="0" y="0"/>
+          <a:chExt cx="0" cy="0"/>
+        </a:xfrm>
+      </p:grpSpPr>
+      <p:sp>
+        <p:nvSpPr>
+          <p:cNvPr id="2" name="Header Placeholder 1"/>
+          <p:cNvSpPr>
+            <a:spLocks noGrp="1"/>
+          </p:cNvSpPr>
+          <p:nvPr>
+            <p:ph type="hdr" sz="quarter"/>
+          </p:nvPr>
+        </p:nvSpPr>
+        <p:spPr>
+          <a:xfrm>
+            <a:off x="0" y="0"/>
+            <a:ext cx="2971800" cy="457200"/>
+          </a:xfrm>
+          <a:prstGeom prst="rect">
+            <a:avLst/>
+          </a:prstGeom>
+        </p:spPr>
+        <p:txBody>
+          <a:bodyPr vert="horz" lIns="91440" tIns="45720" rIns="91440" bIns="45720" rtlCol="0"/>
+          <a:lstStyle>
+            <a:lvl1pPr algn="l">
+              <a:defRPr sz="1200"/>
+            </a:lvl1pPr>
+          </a:lstStyle>
+          <a:p>
+            <a:endParaRPr lang="en-US"/>
+          </a:p>
+        </p:txBody>
+      </p:sp>
+      <p:sp>
+        <p:nvSpPr>
+          <p:cNvPr id="3" name="Date Placeholder 2"/>
+          <p:cNvSpPr>
+            <a:spLocks noGrp="1"/>
+          </p:cNvSpPr>
+          <p:nvPr>
+            <p:ph type="dt" idx="1"/>
+          </p:nvPr>
+        </p:nvSpPr>
+        <p:spPr>
+          <a:xfrm>
+            <a:off x="3884613" y="0"/>
+            <a:ext cx="2971800" cy="457200"/>
+          </a:xfrm>
+          <a:prstGeom prst="rect">
+            <a:avLst/>
+          </a:prstGeom>
+        </p:spPr>
+        <p:txBody>
+          <a:bodyPr vert="horz" lIns="91440" tIns="45720" rIns="91440" bIns="45720" rtlCol="0"/>
+          <a:lstStyle>
+            <a:lvl1pPr algn="r">
+              <a:defRPr sz="1200"/>
+            </a:lvl1pPr>
+          </a:lstStyle>
+          <a:p>
+            <a:fld id="{0F89C1C7-3DCD-1040-A9CF-14679D8B5DDD}" type="datetimeFigureOut">
+              <a:rPr lang="en-US" smtClean="0"/>
+              <a:t>10/17/16</a:t>
+            </a:fld>
+            <a:endParaRPr lang="en-US"/>
+          </a:p>
+        </p:txBody>
+      </p:sp>
+      <p:sp>
+        <p:nvSpPr>
+          <p:cNvPr id="4" name="Slide Image Placeholder 3"/>
+          <p:cNvSpPr>
+            <a:spLocks noGrp="1" noRot="1" noChangeAspect="1"/>
+          </p:cNvSpPr>
+          <p:nvPr>
+            <p:ph type="sldImg" idx="2"/>
+          </p:nvPr>
+        </p:nvSpPr>
+        <p:spPr>
+          <a:xfrm>
+            <a:off x="1143000" y="685800"/>
+            <a:ext cx="4572000" cy="3429000"/>
+          </a:xfrm>
+          <a:prstGeom prst="rect">
+            <a:avLst/>
+          </a:prstGeom>
+          <a:noFill/>
+          <a:ln w="12700">
+            <a:solidFill>
+              <a:prstClr val="black"/>
+            </a:solidFill>
+          </a:ln>
+        </p:spPr>
+        <p:txBody>
+          <a:bodyPr vert="horz" lIns="91440" tIns="45720" rIns="91440" bIns="45720" rtlCol="0" anchor="ctr"/>
+          <a:lstStyle/>
+          <a:p>
+            <a:endParaRPr lang="en-US"/>
+          </a:p>
+        </p:txBody>
+      </p:sp>
+      <p:sp>
+        <p:nvSpPr>
+          <p:cNvPr id="5" name="Notes Placeholder 4"/>
+          <p:cNvSpPr>
+            <a:spLocks noGrp="1"/>
+          </p:cNvSpPr>
+          <p:nvPr>
+            <p:ph type="body" sz="quarter" idx="3"/>
+          </p:nvPr>
+        </p:nvSpPr>
+        <p:spPr>
+          <a:xfrm>
+            <a:off x="685800" y="4343400"/>
+            <a:ext cx="5486400" cy="4114800"/>
+          </a:xfrm>
+          <a:prstGeom prst="rect">
+            <a:avLst/>
+          </a:prstGeom>
+        </p:spPr>
+        <p:txBody>
+          <a:bodyPr vert="horz" lIns="91440" tIns="45720" rIns="91440" bIns="45720" rtlCol="0"/>
+          <a:lstStyle/>
+          <a:p>
+            <a:pPr lvl="0"/>
+            <a:r>
+              <a:rPr lang="en-US" smtClean="0"/>
+              <a:t>Click to edit Master text styles</a:t>
+            </a:r>
+          </a:p>
+          <a:p>
+            <a:pPr lvl="1"/>
+            <a:r>
+              <a:rPr lang="en-US" smtClean="0"/>
+              <a:t>Second level</a:t>
+            </a:r>
+          </a:p>
+          <a:p>
+            <a:pPr lvl="2"/>
+            <a:r>
+              <a:rPr lang="en-US" smtClean="0"/>
+              <a:t>Third level</a:t>
+            </a:r>
+          </a:p>
+          <a:p>
+            <a:pPr lvl="3"/>
+            <a:r>
+              <a:rPr lang="en-US" smtClean="0"/>
+              <a:t>Fourth level</a:t>
+            </a:r>
+          </a:p>
+          <a:p>
+            <a:pPr lvl="4"/>
+            <a:r>
+              <a:rPr lang="en-US" smtClean="0"/>
+              <a:t>Fifth level</a:t>
+            </a:r>
+            <a:endParaRPr lang="en-US"/>
+          </a:p>
+        </p:txBody>
+      </p:sp>
+      <p:sp>
+        <p:nvSpPr>
+          <p:cNvPr id="6" name="Footer Placeholder 5"/>
+          <p:cNvSpPr>
+            <a:spLocks noGrp="1"/>
+          </p:cNvSpPr>
+          <p:nvPr>
+            <p:ph type="ftr" sz="quarter" idx="4"/>
+          </p:nvPr>
+        </p:nvSpPr>
+        <p:spPr>
+          <a:xfrm>
+            <a:off x="0" y="8685213"/>
+            <a:ext cx="2971800" cy="457200"/>
+          </a:xfrm>
+          <a:prstGeom prst="rect">
+            <a:avLst/>
+          </a:prstGeom>
+        </p:spPr>
+        <p:txBody>
+          <a:bodyPr vert="horz" lIns="91440" tIns="45720" rIns="91440" bIns="45720" rtlCol="0" anchor="b"/>
+          <a:lstStyle>
+            <a:lvl1pPr algn="l">
+              <a:defRPr sz="1200"/>
+            </a:lvl1pPr>
+          </a:lstStyle>
+          <a:p>
+            <a:endParaRPr lang="en-US"/>
+          </a:p>
+        </p:txBody>
+      </p:sp>
+      <p:sp>
+        <p:nvSpPr>
+          <p:cNvPr id="7" name="Slide Number Placeholder 6"/>
+          <p:cNvSpPr>
+            <a:spLocks noGrp="1"/>
+          </p:cNvSpPr>
+          <p:nvPr>
+            <p:ph type="sldNum" sz="quarter" idx="5"/>
+          </p:nvPr>
+        </p:nvSpPr>
+        <p:spPr>
+          <a:xfrm>
+            <a:off x="3884613" y="8685213"/>
+            <a:ext cx="2971800" cy="457200"/>
+          </a:xfrm>
+          <a:prstGeom prst="rect">
+            <a:avLst/>
+          </a:prstGeom>
+        </p:spPr>
+        <p:txBody>
+          <a:bodyPr vert="horz" lIns="91440" tIns="45720" rIns="91440" bIns="45720" rtlCol="0" anchor="b"/>
+          <a:lstStyle>
+            <a:lvl1pPr algn="r">
+              <a:defRPr sz="1200"/>
+            </a:lvl1pPr>
+          </a:lstStyle>
+          <a:p>
+            <a:fld id="{BB5E49A5-4136-284D-997B-48E1D791AD67}" type="slidenum">
+              <a:rPr lang="en-US" smtClean="0"/>
+              <a:t>‹#›</a:t>
+            </a:fld>
+            <a:endParaRPr lang="en-US"/>
+          </a:p>
+        </p:txBody>
+      </p:sp>
+    </p:spTree>
+    <p:extLst>
+      <p:ext uri="{BB962C8B-B14F-4D97-AF65-F5344CB8AC3E}">
+        <p14:creationId xmlns:p14="http://schemas.microsoft.com/office/powerpoint/2010/main" val="2623252185"/>
+      </p:ext>
+    </p:extLst>
+  </p:cSld>
+  <p:clrMap bg1="lt1" tx1="dk1" bg2="lt2" tx2="dk2" accent1="accent1" accent2="accent2" accent3="accent3" accent4="accent4" accent5="accent5" accent6="accent6" hlink="hlink" folHlink="folHlink"/>
+  <p:notesStyle>
+    <a:lvl1pPr marL="0" algn="l" defTabSz="457200" rtl="0" eaLnBrk="1" latinLnBrk="0" hangingPunct="1">
+      <a:defRPr sz="1200" kern="1200">
+        <a:solidFill>
+          <a:schemeClr val="tx1"/>
+        </a:solidFill>
+        <a:latin typeface="+mn-lt"/>
+        <a:ea typeface="+mn-ea"/>
+        <a:cs typeface="+mn-cs"/>
+      </a:defRPr>
+    </a:lvl1pPr>
+    <a:lvl2pPr marL="457200" algn="l" defTabSz="457200" rtl="0" eaLnBrk="1" latinLnBrk="0" hangingPunct="1">
+      <a:defRPr sz="1200" kern="1200">
+        <a:solidFill>
+          <a:schemeClr val="tx1"/>
+        </a:solidFill>
+        <a:latin typeface="+mn-lt"/>
+        <a:ea typeface="+mn-ea"/>
+        <a:cs typeface="+mn-cs"/>
+      </a:defRPr>
+    </a:lvl2pPr>
+    <a:lvl3pPr marL="914400" algn="l" defTabSz="457200" rtl="0" eaLnBrk="1" latinLnBrk="0" hangingPunct="1">
+      <a:defRPr sz="1200" kern="1200">
+        <a:solidFill>
+          <a:schemeClr val="tx1"/>
+        </a:solidFill>
+        <a:latin typeface="+mn-lt"/>
+        <a:ea typeface="+mn-ea"/>
+        <a:cs typeface="+mn-cs"/>
+      </a:defRPr>
+    </a:lvl3pPr>
+    <a:lvl4pPr marL="1371600" algn="l" defTabSz="457200" rtl="0" eaLnBrk="1" latinLnBrk="0" hangingPunct="1">
+      <a:defRPr sz="1200" kern="1200">
+        <a:solidFill>
+          <a:schemeClr val="tx1"/>
+        </a:solidFill>
+        <a:latin typeface="+mn-lt"/>
+        <a:ea typeface="+mn-ea"/>
+        <a:cs typeface="+mn-cs"/>
+      </a:defRPr>
+    </a:lvl4pPr>
+    <a:lvl5pPr marL="1828800" algn="l" defTabSz="457200" rtl="0" eaLnBrk="1" latinLnBrk="0" hangingPunct="1">
+      <a:defRPr sz="1200" kern="1200">
+        <a:solidFill>
+          <a:schemeClr val="tx1"/>
+        </a:solidFill>
+        <a:latin typeface="+mn-lt"/>
+        <a:ea typeface="+mn-ea"/>
+        <a:cs typeface="+mn-cs"/>
+      </a:defRPr>
+    </a:lvl5pPr>
+    <a:lvl6pPr marL="2286000" algn="l" defTabSz="457200" rtl="0" eaLnBrk="1" latinLnBrk="0" hangingPunct="1">
+      <a:defRPr sz="1200" kern="1200">
+        <a:solidFill>
+          <a:schemeClr val="tx1"/>
+        </a:solidFill>
+        <a:latin typeface="+mn-lt"/>
+        <a:ea typeface="+mn-ea"/>
+        <a:cs typeface="+mn-cs"/>
+      </a:defRPr>
+    </a:lvl6pPr>
+    <a:lvl7pPr marL="2743200" algn="l" defTabSz="457200" rtl="0" eaLnBrk="1" latinLnBrk="0" hangingPunct="1">
+      <a:defRPr sz="1200" kern="1200">
+        <a:solidFill>
+          <a:schemeClr val="tx1"/>
+        </a:solidFill>
+        <a:latin typeface="+mn-lt"/>
+        <a:ea typeface="+mn-ea"/>
+        <a:cs typeface="+mn-cs"/>
+      </a:defRPr>
+    </a:lvl7pPr>
+    <a:lvl8pPr marL="3200400" algn="l" defTabSz="457200" rtl="0" eaLnBrk="1" latinLnBrk="0" hangingPunct="1">
+      <a:defRPr sz="1200" kern="1200">
+        <a:solidFill>
+          <a:schemeClr val="tx1"/>
+        </a:solidFill>
+        <a:latin typeface="+mn-lt"/>
+        <a:ea typeface="+mn-ea"/>
+        <a:cs typeface="+mn-cs"/>
+      </a:defRPr>
+    </a:lvl8pPr>
+    <a:lvl9pPr marL="3657600" algn="l" defTabSz="457200" rtl="0" eaLnBrk="1" latinLnBrk="0" hangingPunct="1">
+      <a:defRPr sz="1200" kern="1200">
+        <a:solidFill>
+          <a:schemeClr val="tx1"/>
+        </a:solidFill>
+        <a:latin typeface="+mn-lt"/>
+        <a:ea typeface="+mn-ea"/>
+        <a:cs typeface="+mn-cs"/>
+      </a:defRPr>
+    </a:lvl9pPr>
+  </p:notesStyle>
+</p:notesMaster>
+</file>
+
+<file path=ppt/notesSlides/notesSlide1.xml><?xml version="1.0" encoding="utf-8"?>
+<p:notes xmlns:a="http://schemas.openxmlformats.org/drawingml/2006/main" xmlns:p="http://schemas.openxmlformats.org/presentationml/2006/main" xmlns:r="http://schemas.openxmlformats.org/officeDocument/2006/relationships">
+  <p:cSld>
+    <p:spTree>
+      <p:nvGrpSpPr>
+        <p:cNvPr id="1" name=""/>
+        <p:cNvGrpSpPr/>
+        <p:nvPr/>
+      </p:nvGrpSpPr>
+      <p:grpSpPr>
+        <a:xfrm>
+          <a:off x="0" y="0"/>
+          <a:ext cx="0" cy="0"/>
+          <a:chOff x="0" y="0"/>
+          <a:chExt cx="0" cy="0"/>
+        </a:xfrm>
+      </p:grpSpPr>
+      <p:sp>
+        <p:nvSpPr>
+          <p:cNvPr id="2" name="Slide Image Placeholder 1"/>
+          <p:cNvSpPr>
+            <a:spLocks noGrp="1"/>
+          </p:cNvSpPr>
+          <p:nvPr>
+            <p:ph type="sldImg" idx="2"/>
+          </p:nvPr>
+        </p:nvSpPr>
+        <p:spPr/>
+      </p:sp>
+      <p:sp>
+        <p:nvSpPr>
+          <p:cNvPr id="3" name="Notes Placeholder 2"/>
+          <p:cNvSpPr>
+            <a:spLocks noGrp="1"/>
+          </p:cNvSpPr>
+          <p:nvPr>
+            <p:ph type="body" idx="3" sz="quarter"/>
+          </p:nvPr>
+        </p:nvSpPr>
+        <p:spPr/>
+        <p:txBody>
+          <a:bodyPr/>
+          <a:lstStyle/>
+          <a:p>
+            <a:r>
+              <a:t>TerraAssets - Enterprise Product Specification</a:t>
+            </a:r>
+          </a:p>
+          <a:p>
+            <a:r>
+              <a:t>Tagline: AI-Driven Predictive Health Indexing &amp; Prescriptive Asset Lifecycle Management</a:t>
+            </a:r>
+          </a:p>
+          <a:p/>
+          <a:p>
+            <a:r>
+              <a:t>Outcome Quote:</a:t>
+            </a:r>
+          </a:p>
+          <a:p>
+            <a:r>
+              <a:t>“Comprehensive asset management: preventive and predictive AI-led health indexing with proprietary multi-physics degradation models.” (— THE OUTCOME-BASED REVOLUTION)</a:t>
+            </a:r>
+          </a:p>
+          <a:p/>
+          <a:p>
+            <a:r>
+              <a:t>Executive Overview:</a:t>
+            </a:r>
+          </a:p>
+          <a:p>
+            <a:r>
+              <a:t>Heavy batch and continuous processes expose substations and mechanical components to massive strains. TerraAssets deploys predictive maintenance AI engines that continually scan telemetry from critical chillers, compressors, relays, breaker panels, and transformers to uncover micro-anomalies and trigger prioritized work orders under ISA 18.2 compliance.</a:t>
+            </a:r>
+          </a:p>
+          <a:p/>
+          <a:p>
+            <a:r>
+              <a:t>Key Telemetry Metrics:</a:t>
+            </a:r>
+          </a:p>
+          <a:p>
+            <a:r>
+              <a:t>- ISO CONFORMANCE:: ISO 55000 / 14224</a:t>
+            </a:r>
+          </a:p>
+          <a:p>
+            <a:r>
+              <a:t>- RUL PREDICTION:: Weibull / AI Hybrid</a:t>
+            </a:r>
+          </a:p>
+          <a:p>
+            <a:r>
+              <a:t>- ASSET DOSSIER:: 100% Tree Hierarchy</a:t>
+            </a:r>
+          </a:p>
+          <a:p>
+            <a:r>
+              <a:t>- MTBF GAIN:: +28% Measured</a:t>
+            </a:r>
+          </a:p>
+        </p:txBody>
+      </p:sp>
+      <p:sp>
+        <p:nvSpPr>
+          <p:cNvPr id="4" name="Slide Number Placeholder 3"/>
+          <p:cNvSpPr>
+            <a:spLocks noGrp="1"/>
+          </p:cNvSpPr>
+          <p:nvPr>
+            <p:ph type="sldNum" idx="5" sz="quarter"/>
+          </p:nvPr>
+        </p:nvSpPr>
+        <p:spPr/>
+      </p:sp>
+    </p:spTree>
+  </p:cSld>
+  <p:clrMapOvr>
+    <a:masterClrMapping/>
+  </p:clrMapOvr>
+</p:notes>
+</file>
+
+<file path=ppt/notesSlides/notesSlide2.xml><?xml version="1.0" encoding="utf-8"?>
+<p:notes xmlns:a="http://schemas.openxmlformats.org/drawingml/2006/main" xmlns:p="http://schemas.openxmlformats.org/presentationml/2006/main" xmlns:r="http://schemas.openxmlformats.org/officeDocument/2006/relationships">
+  <p:cSld>
+    <p:spTree>
+      <p:nvGrpSpPr>
+        <p:cNvPr id="1" name=""/>
+        <p:cNvGrpSpPr/>
+        <p:nvPr/>
+      </p:nvGrpSpPr>
+      <p:grpSpPr>
+        <a:xfrm>
+          <a:off x="0" y="0"/>
+          <a:ext cx="0" cy="0"/>
+          <a:chOff x="0" y="0"/>
+          <a:chExt cx="0" cy="0"/>
+        </a:xfrm>
+      </p:grpSpPr>
+      <p:sp>
+        <p:nvSpPr>
+          <p:cNvPr id="2" name="Slide Image Placeholder 1"/>
+          <p:cNvSpPr>
+            <a:spLocks noGrp="1"/>
+          </p:cNvSpPr>
+          <p:nvPr>
+            <p:ph type="sldImg" idx="2"/>
+          </p:nvPr>
+        </p:nvSpPr>
+        <p:spPr/>
+      </p:sp>
+      <p:sp>
+        <p:nvSpPr>
+          <p:cNvPr id="3" name="Notes Placeholder 2"/>
+          <p:cNvSpPr>
+            <a:spLocks noGrp="1"/>
+          </p:cNvSpPr>
+          <p:nvPr>
+            <p:ph type="body" idx="3" sz="quarter"/>
+          </p:nvPr>
+        </p:nvSpPr>
+        <p:spPr/>
+        <p:txBody>
+          <a:bodyPr/>
+          <a:lstStyle/>
+          <a:p>
+            <a:r>
+              <a:t>TerraAssets - ANSI/ISA-101 Verified Operational Interface</a:t>
+            </a:r>
+          </a:p>
+          <a:p>
+            <a:r>
+              <a:t>Representation: TerraAssets ANSI/ISA-101 Operational Interface &amp; Real-Time System Representation</a:t>
+            </a:r>
+          </a:p>
+          <a:p>
+            <a:r>
+              <a:t>Compliance: ANSI/ISA-101 Verified HMI</a:t>
+            </a:r>
+          </a:p>
+          <a:p>
+            <a:r>
+              <a:t>Asset File: terra_assets_showcase.jpg</a:t>
+            </a:r>
+          </a:p>
+        </p:txBody>
+      </p:sp>
+      <p:sp>
+        <p:nvSpPr>
+          <p:cNvPr id="4" name="Slide Number Placeholder 3"/>
+          <p:cNvSpPr>
+            <a:spLocks noGrp="1"/>
+          </p:cNvSpPr>
+          <p:nvPr>
+            <p:ph type="sldNum" idx="5" sz="quarter"/>
+          </p:nvPr>
+        </p:nvSpPr>
+        <p:spPr/>
+      </p:sp>
+    </p:spTree>
+  </p:cSld>
+  <p:clrMapOvr>
+    <a:masterClrMapping/>
+  </p:clrMapOvr>
+</p:notes>
+</file>
+
+<file path=ppt/notesSlides/notesSlide3.xml><?xml version="1.0" encoding="utf-8"?>
+<p:notes xmlns:a="http://schemas.openxmlformats.org/drawingml/2006/main" xmlns:p="http://schemas.openxmlformats.org/presentationml/2006/main" xmlns:r="http://schemas.openxmlformats.org/officeDocument/2006/relationships">
+  <p:cSld>
+    <p:spTree>
+      <p:nvGrpSpPr>
+        <p:cNvPr id="1" name=""/>
+        <p:cNvGrpSpPr/>
+        <p:nvPr/>
+      </p:nvGrpSpPr>
+      <p:grpSpPr>
+        <a:xfrm>
+          <a:off x="0" y="0"/>
+          <a:ext cx="0" cy="0"/>
+          <a:chOff x="0" y="0"/>
+          <a:chExt cx="0" cy="0"/>
+        </a:xfrm>
+      </p:grpSpPr>
+      <p:sp>
+        <p:nvSpPr>
+          <p:cNvPr id="2" name="Slide Image Placeholder 1"/>
+          <p:cNvSpPr>
+            <a:spLocks noGrp="1"/>
+          </p:cNvSpPr>
+          <p:nvPr>
+            <p:ph type="sldImg" idx="2"/>
+          </p:nvPr>
+        </p:nvSpPr>
+        <p:spPr/>
+      </p:sp>
+      <p:sp>
+        <p:nvSpPr>
+          <p:cNvPr id="3" name="Notes Placeholder 2"/>
+          <p:cNvSpPr>
+            <a:spLocks noGrp="1"/>
+          </p:cNvSpPr>
+          <p:nvPr>
+            <p:ph type="body" idx="3" sz="quarter"/>
+          </p:nvPr>
+        </p:nvSpPr>
+        <p:spPr/>
+        <p:txBody>
+          <a:bodyPr/>
+          <a:lstStyle/>
+          <a:p>
+            <a:r>
+              <a:t>What TerraAssets Will Do:</a:t>
+            </a:r>
+          </a:p>
+          <a:p>
+            <a:r>
+              <a:t>[1] Multi-Tier Topological Asset Hierarchy:</a:t>
+            </a:r>
+          </a:p>
+          <a:p>
+            <a:r>
+              <a:t>Organizes complex plant asset hierarchies, relationships, and electrical connections using an enterprise graph topology engine.</a:t>
+            </a:r>
+          </a:p>
+          <a:p/>
+          <a:p>
+            <a:r>
+              <a:t>[2] Continuous Transformer Health Analytics:</a:t>
+            </a:r>
+          </a:p>
+          <a:p>
+            <a:r>
+              <a:t>Monitors transformer thermal stresses, winding temperature, and oil degradation parameters continuously.</a:t>
+            </a:r>
+          </a:p>
+          <a:p/>
+          <a:p>
+            <a:r>
+              <a:t>[3] Vibration &amp; Rotating Machine Prognostics:</a:t>
+            </a:r>
+          </a:p>
+          <a:p>
+            <a:r>
+              <a:t>Tracks vibration signatures, harmonics, and run-hours across chillers, compressors, and high-pressure pumps.</a:t>
+            </a:r>
+          </a:p>
+          <a:p/>
+          <a:p>
+            <a:r>
+              <a:t>[4] Native SAP / CMMS Bidirectional Integration:</a:t>
+            </a:r>
+          </a:p>
+          <a:p>
+            <a:r>
+              <a:t>Automated creation of maintenance tickets and spare parts reservation in enterprise ERP.</a:t>
+            </a:r>
+          </a:p>
+        </p:txBody>
+      </p:sp>
+      <p:sp>
+        <p:nvSpPr>
+          <p:cNvPr id="4" name="Slide Number Placeholder 3"/>
+          <p:cNvSpPr>
+            <a:spLocks noGrp="1"/>
+          </p:cNvSpPr>
+          <p:nvPr>
+            <p:ph type="sldNum" idx="5" sz="quarter"/>
+          </p:nvPr>
+        </p:nvSpPr>
+        <p:spPr/>
+      </p:sp>
+    </p:spTree>
+  </p:cSld>
+  <p:clrMapOvr>
+    <a:masterClrMapping/>
+  </p:clrMapOvr>
+</p:notes>
+</file>
+
+<file path=ppt/notesSlides/notesSlide4.xml><?xml version="1.0" encoding="utf-8"?>
+<p:notes xmlns:a="http://schemas.openxmlformats.org/drawingml/2006/main" xmlns:p="http://schemas.openxmlformats.org/presentationml/2006/main" xmlns:r="http://schemas.openxmlformats.org/officeDocument/2006/relationships">
+  <p:cSld>
+    <p:spTree>
+      <p:nvGrpSpPr>
+        <p:cNvPr id="1" name=""/>
+        <p:cNvGrpSpPr/>
+        <p:nvPr/>
+      </p:nvGrpSpPr>
+      <p:grpSpPr>
+        <a:xfrm>
+          <a:off x="0" y="0"/>
+          <a:ext cx="0" cy="0"/>
+          <a:chOff x="0" y="0"/>
+          <a:chExt cx="0" cy="0"/>
+        </a:xfrm>
+      </p:grpSpPr>
+      <p:sp>
+        <p:nvSpPr>
+          <p:cNvPr id="2" name="Slide Image Placeholder 1"/>
+          <p:cNvSpPr>
+            <a:spLocks noGrp="1"/>
+          </p:cNvSpPr>
+          <p:nvPr>
+            <p:ph type="sldImg" idx="2"/>
+          </p:nvPr>
+        </p:nvSpPr>
+        <p:spPr/>
+      </p:sp>
+      <p:sp>
+        <p:nvSpPr>
+          <p:cNvPr id="3" name="Notes Placeholder 2"/>
+          <p:cNvSpPr>
+            <a:spLocks noGrp="1"/>
+          </p:cNvSpPr>
+          <p:nvPr>
+            <p:ph type="body" idx="3" sz="quarter"/>
+          </p:nvPr>
+        </p:nvSpPr>
+        <p:spPr/>
+        <p:txBody>
+          <a:bodyPr/>
+          <a:lstStyle/>
+          <a:p>
+            <a:r>
+              <a:t>TerraAssets - Operational Use Cases &amp; Field Impact:</a:t>
+            </a:r>
+          </a:p>
+          <a:p>
+            <a:r>
+              <a:t>[Productivity &amp; Downtime Mitigation] Productivity &amp; Downtime Mitigation:</a:t>
+            </a:r>
+          </a:p>
+          <a:p>
+            <a:r>
+              <a:t>Unplanned production downtime suppressed from legacy baseline of 490 hours/year down to just 180 hours in 2022, courtesy of immediate predictive maintenance alerts.</a:t>
+            </a:r>
+          </a:p>
+          <a:p/>
+          <a:p>
+            <a:r>
+              <a:t>[Asset Protection] Asset Protection (Substation Transformer Load Tracking):</a:t>
+            </a:r>
+          </a:p>
+          <a:p>
+            <a:r>
+              <a:t>Continually monitors transformer thermal stresses, phase imbalances, and harmonic distortion to prevent catastrophic insulation failure.</a:t>
+            </a:r>
+          </a:p>
+          <a:p/>
+          <a:p>
+            <a:r>
+              <a:t>[Reduced Manpower] Reduced Manpower (Automated SAP Work Order Dispatch):</a:t>
+            </a:r>
+          </a:p>
+          <a:p>
+            <a:r>
+              <a:t>Autonomously calculates run-hours and triggers maintenance tickets with required spare parts in SAP ERP, eliminating manual inspections.</a:t>
+            </a:r>
+          </a:p>
+          <a:p/>
+          <a:p>
+            <a:r>
+              <a:t>[QA &amp; Rotating Machine Longevity] QA &amp; Rotating Machine Longevity:</a:t>
+            </a:r>
+          </a:p>
+          <a:p>
+            <a:r>
+              <a:t>Detects early bearing flaking and unbalance on critical chillers and compressors months before vibration crosses destructive trip limits.</a:t>
+            </a:r>
+          </a:p>
+        </p:txBody>
+      </p:sp>
+      <p:sp>
+        <p:nvSpPr>
+          <p:cNvPr id="4" name="Slide Number Placeholder 3"/>
+          <p:cNvSpPr>
+            <a:spLocks noGrp="1"/>
+          </p:cNvSpPr>
+          <p:nvPr>
+            <p:ph type="sldNum" idx="5" sz="quarter"/>
+          </p:nvPr>
+        </p:nvSpPr>
+        <p:spPr/>
+      </p:sp>
+    </p:spTree>
+  </p:cSld>
+  <p:clrMapOvr>
+    <a:masterClrMapping/>
+  </p:clrMapOvr>
+</p:notes>
+</file>
+
+<file path=ppt/notesSlides/notesSlide5.xml><?xml version="1.0" encoding="utf-8"?>
+<p:notes xmlns:a="http://schemas.openxmlformats.org/drawingml/2006/main" xmlns:p="http://schemas.openxmlformats.org/presentationml/2006/main" xmlns:r="http://schemas.openxmlformats.org/officeDocument/2006/relationships">
+  <p:cSld>
+    <p:spTree>
+      <p:nvGrpSpPr>
+        <p:cNvPr id="1" name=""/>
+        <p:cNvGrpSpPr/>
+        <p:nvPr/>
+      </p:nvGrpSpPr>
+      <p:grpSpPr>
+        <a:xfrm>
+          <a:off x="0" y="0"/>
+          <a:ext cx="0" cy="0"/>
+          <a:chOff x="0" y="0"/>
+          <a:chExt cx="0" cy="0"/>
+        </a:xfrm>
+      </p:grpSpPr>
+      <p:sp>
+        <p:nvSpPr>
+          <p:cNvPr id="2" name="Slide Image Placeholder 1"/>
+          <p:cNvSpPr>
+            <a:spLocks noGrp="1"/>
+          </p:cNvSpPr>
+          <p:nvPr>
+            <p:ph type="sldImg" idx="2"/>
+          </p:nvPr>
+        </p:nvSpPr>
+        <p:spPr/>
+      </p:sp>
+      <p:sp>
+        <p:nvSpPr>
+          <p:cNvPr id="3" name="Notes Placeholder 2"/>
+          <p:cNvSpPr>
+            <a:spLocks noGrp="1"/>
+          </p:cNvSpPr>
+          <p:nvPr>
+            <p:ph type="body" idx="3" sz="quarter"/>
+          </p:nvPr>
+        </p:nvSpPr>
+        <p:spPr/>
+        <p:txBody>
+          <a:bodyPr/>
+          <a:lstStyle/>
+          <a:p>
+            <a:r>
+              <a:t>TerraAssets - Architectural Contrast (Legacy SCADA vs Terrestrial Platform):</a:t>
+            </a:r>
+          </a:p>
+          <a:p>
+            <a:r>
+              <a:t>LEGACY:</a:t>
+            </a:r>
+          </a:p>
+          <a:p>
+            <a:r>
+              <a:t>Routine maintenance done on fixed calendar dates, replacing healthy components or missing sudden breakdowns.</a:t>
+            </a:r>
+          </a:p>
+          <a:p/>
+          <a:p>
+            <a:r>
+              <a:t>TERRESTRIAL ADVANTAGE:</a:t>
+            </a:r>
+          </a:p>
+          <a:p>
+            <a:r>
+              <a:t>Condition-based maintenance driven by continuous multi-modal vibration, thermal, and electrical telemetry.</a:t>
+            </a:r>
+          </a:p>
+          <a:p/>
+          <a:p>
+            <a:r>
+              <a:t>LEGACY:</a:t>
+            </a:r>
+          </a:p>
+          <a:p>
+            <a:r>
+              <a:t>Generic threshold alarms that go off only when bearing raceways or windings have already been destroyed.</a:t>
+            </a:r>
+          </a:p>
+          <a:p/>
+          <a:p>
+            <a:r>
+              <a:t>TERRESTRIAL ADVANTAGE:</a:t>
+            </a:r>
+          </a:p>
+          <a:p>
+            <a:r>
+              <a:t>Prognostic multi-physics models that detect micro-degradations months before failure occurs.</a:t>
+            </a:r>
+          </a:p>
+          <a:p/>
+          <a:p>
+            <a:r>
+              <a:t>LEGACY:</a:t>
+            </a:r>
+          </a:p>
+          <a:p>
+            <a:r>
+              <a:t>Manual creation of work orders and paperwork slowing down critical maintenance responses.</a:t>
+            </a:r>
+          </a:p>
+          <a:p/>
+          <a:p>
+            <a:r>
+              <a:t>TERRESTRIAL ADVANTAGE:</a:t>
+            </a:r>
+          </a:p>
+          <a:p>
+            <a:r>
+              <a:t>Closed-loop automated creation of work orders in SAP/Maximo with recommended toolkits and spare parts.</a:t>
+            </a:r>
+          </a:p>
+        </p:txBody>
+      </p:sp>
+      <p:sp>
+        <p:nvSpPr>
+          <p:cNvPr id="4" name="Slide Number Placeholder 3"/>
+          <p:cNvSpPr>
+            <a:spLocks noGrp="1"/>
+          </p:cNvSpPr>
+          <p:nvPr>
+            <p:ph type="sldNum" idx="5" sz="quarter"/>
+          </p:nvPr>
+        </p:nvSpPr>
+        <p:spPr/>
+      </p:sp>
+    </p:spTree>
+  </p:cSld>
+  <p:clrMapOvr>
+    <a:masterClrMapping/>
+  </p:clrMapOvr>
+</p:notes>
+</file>
+
+<file path=ppt/notesSlides/notesSlide6.xml><?xml version="1.0" encoding="utf-8"?>
+<p:notes xmlns:a="http://schemas.openxmlformats.org/drawingml/2006/main" xmlns:p="http://schemas.openxmlformats.org/presentationml/2006/main" xmlns:r="http://schemas.openxmlformats.org/officeDocument/2006/relationships">
+  <p:cSld>
+    <p:spTree>
+      <p:nvGrpSpPr>
+        <p:cNvPr id="1" name=""/>
+        <p:cNvGrpSpPr/>
+        <p:nvPr/>
+      </p:nvGrpSpPr>
+      <p:grpSpPr>
+        <a:xfrm>
+          <a:off x="0" y="0"/>
+          <a:ext cx="0" cy="0"/>
+          <a:chOff x="0" y="0"/>
+          <a:chExt cx="0" cy="0"/>
+        </a:xfrm>
+      </p:grpSpPr>
+      <p:sp>
+        <p:nvSpPr>
+          <p:cNvPr id="2" name="Slide Image Placeholder 1"/>
+          <p:cNvSpPr>
+            <a:spLocks noGrp="1"/>
+          </p:cNvSpPr>
+          <p:nvPr>
+            <p:ph type="sldImg" idx="2"/>
+          </p:nvPr>
+        </p:nvSpPr>
+        <p:spPr/>
+      </p:sp>
+      <p:sp>
+        <p:nvSpPr>
+          <p:cNvPr id="3" name="Notes Placeholder 2"/>
+          <p:cNvSpPr>
+            <a:spLocks noGrp="1"/>
+          </p:cNvSpPr>
+          <p:nvPr>
+            <p:ph type="body" idx="3" sz="quarter"/>
+          </p:nvPr>
+        </p:nvSpPr>
+        <p:spPr/>
+        <p:txBody>
+          <a:bodyPr/>
+          <a:lstStyle/>
+          <a:p>
+            <a:r>
+              <a:t>TerraAssets - End-to-End System Diagram &amp; Data Pipeline:</a:t>
+            </a:r>
+          </a:p>
+          <a:p/>
+          <a:p>
+            <a:r>
+              <a:t>Layer 01: Vibration &amp; Condition Ingestion</a:t>
+            </a:r>
+          </a:p>
+          <a:p>
+            <a:r>
+              <a:t>High-frequency telemetry acquisition from triaxial accelerometers, eddy current proximity probes, oil condition sensors, and thermography.</a:t>
+            </a:r>
+          </a:p>
+          <a:p>
+            <a:r>
+              <a:t>Protocols: ISO 10816 Vibration, High-Frequency IEPE, OPC UA Part 100</a:t>
+            </a:r>
+          </a:p>
+          <a:p/>
+          <a:p>
+            <a:r>
+              <a:t>Layer 02: Spectral Waveform Buffering</a:t>
+            </a:r>
+          </a:p>
+          <a:p>
+            <a:r>
+              <a:t>Raw vibration waveform capture, edge FFT spectrum extraction, circular bearing telemetry buffering, and acoustic transient streaming.</a:t>
+            </a:r>
+          </a:p>
+          <a:p>
+            <a:r>
+              <a:t>Protocols: Vibration FFT Stream, Transient Waveform Bus, Edge Spectral Engine</a:t>
+            </a:r>
+          </a:p>
+          <a:p/>
+          <a:p>
+            <a:r>
+              <a:t>Layer 03: RUL Predictive Engine</a:t>
+            </a:r>
+          </a:p>
+          <a:p>
+            <a:r>
+              <a:t>Physics-based bearing degradation models, spectral peak trending (1x/2x/harmonics), rotor unbalance detection, and RUL time-to-failure forecasting.</a:t>
+            </a:r>
+          </a:p>
+          <a:p>
+            <a:r>
+              <a:t>Protocols: RUL Prognostics AI, Bearing Fault Models, Spectral Trend AI</a:t>
+            </a:r>
+          </a:p>
+          <a:p/>
+          <a:p>
+            <a:r>
+              <a:t>Layer 04: Reliability Dispatch Cockpit</a:t>
+            </a:r>
+          </a:p>
+          <a:p>
+            <a:r>
+              <a:t>Automated prescriptive work order generation in SAP PM / IBM Maximo, equipment health gauges, and ANSI/ISA-101 reliability dashboards.</a:t>
+            </a:r>
+          </a:p>
+          <a:p>
+            <a:r>
+              <a:t>Protocols: SAP PM / Maximo, Prescriptive Orders, ISA-101 APM Cockpit</a:t>
+            </a:r>
+          </a:p>
+          <a:p/>
+          <a:p>
+            <a:r>
+              <a:t>Pipeline Flow:</a:t>
+            </a:r>
+          </a:p>
+          <a:p>
+            <a:r>
+              <a:t>DATA PIPELINE FLOW: Triaxial Vibration &amp; Oil Telemetry ➔ Edge FFT Spectral Waveform Bus ➔ Physics-Based RUL Prognostics ➔ Automated Maintenance Dispatch</a:t>
+            </a:r>
+          </a:p>
+        </p:txBody>
+      </p:sp>
+      <p:sp>
+        <p:nvSpPr>
+          <p:cNvPr id="4" name="Slide Number Placeholder 3"/>
+          <p:cNvSpPr>
+            <a:spLocks noGrp="1"/>
+          </p:cNvSpPr>
+          <p:nvPr>
+            <p:ph type="sldNum" idx="5" sz="quarter"/>
+          </p:nvPr>
+        </p:nvSpPr>
+        <p:spPr/>
+      </p:sp>
+    </p:spTree>
+  </p:cSld>
+  <p:clrMapOvr>
+    <a:masterClrMapping/>
+  </p:clrMapOvr>
+</p:notes>
+</file>
+
+<file path=ppt/notesSlides/notesSlide7.xml><?xml version="1.0" encoding="utf-8"?>
+<p:notes xmlns:a="http://schemas.openxmlformats.org/drawingml/2006/main" xmlns:p="http://schemas.openxmlformats.org/presentationml/2006/main" xmlns:r="http://schemas.openxmlformats.org/officeDocument/2006/relationships">
+  <p:cSld>
+    <p:spTree>
+      <p:nvGrpSpPr>
+        <p:cNvPr id="1" name=""/>
+        <p:cNvGrpSpPr/>
+        <p:nvPr/>
+      </p:nvGrpSpPr>
+      <p:grpSpPr>
+        <a:xfrm>
+          <a:off x="0" y="0"/>
+          <a:ext cx="0" cy="0"/>
+          <a:chOff x="0" y="0"/>
+          <a:chExt cx="0" cy="0"/>
+        </a:xfrm>
+      </p:grpSpPr>
+      <p:sp>
+        <p:nvSpPr>
+          <p:cNvPr id="2" name="Slide Image Placeholder 1"/>
+          <p:cNvSpPr>
+            <a:spLocks noGrp="1"/>
+          </p:cNvSpPr>
+          <p:nvPr>
+            <p:ph type="sldImg" idx="2"/>
+          </p:nvPr>
+        </p:nvSpPr>
+        <p:spPr/>
+      </p:sp>
+      <p:sp>
+        <p:nvSpPr>
+          <p:cNvPr id="3" name="Notes Placeholder 2"/>
+          <p:cNvSpPr>
+            <a:spLocks noGrp="1"/>
+          </p:cNvSpPr>
+          <p:nvPr>
+            <p:ph type="body" idx="3" sz="quarter"/>
+          </p:nvPr>
+        </p:nvSpPr>
+        <p:spPr/>
+        <p:txBody>
+          <a:bodyPr/>
+          <a:lstStyle/>
+          <a:p>
+            <a:r>
+              <a:t>TerraAssets - System Integrator Deployment Framework &amp; Commercial Model:</a:t>
+            </a:r>
+          </a:p>
+          <a:p/>
+          <a:p>
+            <a:r>
+              <a:t>Phase 1: Connectivity &amp; Audit</a:t>
+            </a:r>
+          </a:p>
+          <a:p>
+            <a:r>
+              <a:t>Phase 2: Twin Calibration</a:t>
+            </a:r>
+          </a:p>
+          <a:p>
+            <a:r>
+              <a:t>Phase 3: Autonomous Go-Live</a:t>
+            </a:r>
+          </a:p>
+          <a:p/>
+          <a:p>
+            <a:r>
+              <a:t>Commercial Enablement:</a:t>
+            </a:r>
+          </a:p>
+          <a:p>
+            <a:r>
+              <a:t>- 25%-35% recurring SaaS margins</a:t>
+            </a:r>
+          </a:p>
+          <a:p>
+            <a:r>
+              <a:t>- 7-14 day rapid commissioning</a:t>
+            </a:r>
+          </a:p>
+          <a:p>
+            <a:r>
+              <a:t>- Co-selling and enterprise enablement support</a:t>
+            </a:r>
+          </a:p>
+        </p:txBody>
+      </p:sp>
+      <p:sp>
+        <p:nvSpPr>
+          <p:cNvPr id="4" name="Slide Number Placeholder 3"/>
+          <p:cNvSpPr>
+            <a:spLocks noGrp="1"/>
+          </p:cNvSpPr>
+          <p:nvPr>
+            <p:ph type="sldNum" idx="5" sz="quarter"/>
+          </p:nvPr>
+        </p:nvSpPr>
+        <p:spPr/>
+      </p:sp>
+    </p:spTree>
+  </p:cSld>
+  <p:clrMapOvr>
+    <a:masterClrMapping/>
+  </p:clrMapOvr>
+</p:notes>
 </file>
 
 <file path=ppt/slideLayouts/slideLayout1.xml><?xml version="1.0" encoding="utf-8"?>
@@ -3108,7 +4280,7 @@
             <a:avLst/>
           </a:prstGeom>
           <a:solidFill>
-            <a:srgbClr val="0A0E1A"/>
+            <a:srgbClr val="0B0F17"/>
           </a:solidFill>
           <a:ln>
             <a:noFill/>
@@ -3144,17 +4316,19 @@
         </p:nvSpPr>
         <p:spPr>
           <a:xfrm>
-            <a:off x="0" y="0"/>
-            <a:ext cx="12191695" cy="54864"/>
+            <a:off x="731520" y="365760"/>
+            <a:ext cx="10728655" cy="18288"/>
           </a:xfrm>
           <a:prstGeom prst="rect">
             <a:avLst/>
           </a:prstGeom>
           <a:solidFill>
-            <a:srgbClr val="00D4FF"/>
+            <a:srgbClr val="38BDF8"/>
           </a:solidFill>
           <a:ln>
-            <a:noFill/>
+            <a:solidFill>
+              <a:srgbClr val="38BDF8"/>
+            </a:solidFill>
           </a:ln>
         </p:spPr>
         <p:style>
@@ -3187,8 +4361,8 @@
         </p:nvSpPr>
         <p:spPr>
           <a:xfrm>
-            <a:off x="731520" y="6446520"/>
-            <a:ext cx="10698480" cy="320040"/>
+            <a:off x="731520" y="438912"/>
+            <a:ext cx="8229600" cy="274320"/>
           </a:xfrm>
           <a:prstGeom prst="rect">
             <a:avLst/>
@@ -3196,20 +4370,20 @@
           <a:noFill/>
         </p:spPr>
         <p:txBody>
-          <a:bodyPr wrap="none">
+          <a:bodyPr wrap="square" lIns="0" rIns="0" tIns="0" bIns="0">
             <a:spAutoFit/>
           </a:bodyPr>
           <a:lstStyle/>
           <a:p>
             <a:pPr>
-              <a:defRPr sz="1000">
-                <a:solidFill>
-                  <a:srgbClr val="94A3B8"/>
-                </a:solidFill>
-              </a:defRPr>
-            </a:pPr>
-            <a:r>
-              <a:t>TERRESTRIAL PLATFORM  |  TERRAASSETS CATALOGUE  |  CONFIDENTIAL - AUTHORISED SYSTEM INTEGRATORS ONLY</a:t>
+              <a:defRPr sz="950" b="1">
+                <a:solidFill>
+                  <a:srgbClr val="38BDF8"/>
+                </a:solidFill>
+              </a:defRPr>
+            </a:pPr>
+            <a:r>
+              <a:t>TERRESTRIAL PLATFORM  |  TERRAASSETS  |  ENTERPRISE SPECIFICATION</a:t>
             </a:r>
           </a:p>
         </p:txBody>
@@ -3222,8 +4396,8 @@
         </p:nvSpPr>
         <p:spPr>
           <a:xfrm>
-            <a:off x="731520" y="777240"/>
-            <a:ext cx="10698480" cy="3474720"/>
+            <a:off x="731520" y="731520"/>
+            <a:ext cx="9601200" cy="777240"/>
           </a:xfrm>
           <a:prstGeom prst="rect">
             <a:avLst/>
@@ -3231,104 +4405,83 @@
           <a:noFill/>
         </p:spPr>
         <p:txBody>
-          <a:bodyPr wrap="square">
+          <a:bodyPr wrap="square" lIns="0" rIns="0" tIns="0" bIns="0">
             <a:spAutoFit/>
           </a:bodyPr>
           <a:lstStyle/>
           <a:p>
             <a:pPr>
-              <a:spcAft>
-                <a:spcPts val="800"/>
-              </a:spcAft>
-              <a:defRPr sz="1250" b="1">
-                <a:solidFill>
-                  <a:srgbClr val="00D4FF"/>
-                </a:solidFill>
-              </a:defRPr>
-            </a:pPr>
-            <a:r>
-              <a:t>ENTERPRISE PRODUCT SPECIFICATION  |  PLANT ENGINEERING &amp; TWINS</a:t>
-            </a:r>
-          </a:p>
-          <a:p>
-            <a:pPr>
-              <a:spcAft>
-                <a:spcPts val="600"/>
-              </a:spcAft>
-              <a:defRPr sz="4600" b="1">
+              <a:defRPr sz="1900" b="1">
                 <a:solidFill>
                   <a:srgbClr val="FFFFFF"/>
                 </a:solidFill>
               </a:defRPr>
             </a:pPr>
             <a:r>
-              <a:t>TerraAssets</a:t>
-            </a:r>
-          </a:p>
-          <a:p>
-            <a:pPr>
-              <a:spcAft>
-                <a:spcPts val="1200"/>
-              </a:spcAft>
-              <a:defRPr sz="1900" b="1">
-                <a:solidFill>
-                  <a:srgbClr val="F5C842"/>
-                </a:solidFill>
-              </a:defRPr>
-            </a:pPr>
-            <a:r>
-              <a:t>AI-Driven Predictive Health Indexing &amp; Prescriptive Asset Lifecycle Management</a:t>
-            </a:r>
-          </a:p>
-          <a:p>
-            <a:pPr>
-              <a:spcAft>
-                <a:spcPts val="1200"/>
-              </a:spcAft>
-              <a:defRPr sz="1400">
-                <a:solidFill>
-                  <a:srgbClr val="C8D8F0"/>
-                </a:solidFill>
-              </a:defRPr>
-            </a:pPr>
-            <a:r>
-              <a:t>Industrial Protocol: ISO 10816 Vibration    |    Domain Architecture: Terrestrial Deterministic Edge Core</a:t>
-            </a:r>
-          </a:p>
-          <a:p>
-            <a:pPr>
-              <a:defRPr sz="1500">
+              <a:t>TerraAssets: AI-Driven Predictive Health Indexing &amp; Prescriptive Asset Lifecycle Management</a:t>
+            </a:r>
+          </a:p>
+          <a:p>
+            <a:pPr>
+              <a:spcBef>
+                <a:spcPts val="300"/>
+              </a:spcBef>
+              <a:defRPr sz="1050">
                 <a:solidFill>
                   <a:srgbClr val="94A3B8"/>
                 </a:solidFill>
               </a:defRPr>
             </a:pPr>
             <a:r>
-              <a:t>AI-Driven Predictive Health Indexing &amp; Prescriptive Asset Lifecycle Management</a:t>
-            </a:r>
-          </a:p>
-        </p:txBody>
-      </p:sp>
-      <p:sp>
-        <p:nvSpPr>
-          <p:cNvPr id="6" name="Rounded Rectangle 5"/>
+              <a:t>Autonomous Industrial Intelligence Suite · Tier-1 Plant Architecture</a:t>
+            </a:r>
+          </a:p>
+        </p:txBody>
+      </p:sp>
+      <p:pic>
+        <p:nvPicPr>
+          <p:cNvPr id="6" name="Picture 5" descr="tp_logo_white.png"/>
+          <p:cNvPicPr>
+            <a:picLocks noChangeAspect="1"/>
+          </p:cNvPicPr>
+          <p:nvPr/>
+        </p:nvPicPr>
+        <p:blipFill>
+          <a:blip r:embed="rId2"/>
+          <a:stretch>
+            <a:fillRect/>
+          </a:stretch>
+        </p:blipFill>
+        <p:spPr>
+          <a:xfrm>
+            <a:off x="10469880" y="411480"/>
+            <a:ext cx="987552" cy="384048"/>
+          </a:xfrm>
+          <a:prstGeom prst="rect">
+            <a:avLst/>
+          </a:prstGeom>
+        </p:spPr>
+      </p:pic>
+      <p:sp>
+        <p:nvSpPr>
+          <p:cNvPr id="7" name="Rounded Rectangle 6"/>
           <p:cNvSpPr/>
           <p:nvPr/>
         </p:nvSpPr>
         <p:spPr>
           <a:xfrm>
-            <a:off x="731520" y="4663440"/>
-            <a:ext cx="2523744" cy="1280160"/>
+            <a:off x="731520" y="1691640"/>
+            <a:ext cx="6217920" cy="4663440"/>
           </a:xfrm>
           <a:prstGeom prst="roundRect">
             <a:avLst/>
           </a:prstGeom>
           <a:solidFill>
-            <a:srgbClr val="0F172A"/>
+            <a:srgbClr val="131926"/>
           </a:solidFill>
-          <a:ln>
+          <a:ln w="12700">
             <a:solidFill>
-              <a:srgbClr val="1E293B"/>
+              <a:srgbClr val="28344B"/>
             </a:solidFill>
           </a:ln>
         </p:spPr>
@@ -3347,57 +4500,113 @@
           </a:fontRef>
         </p:style>
         <p:txBody>
-          <a:bodyPr rtlCol="0" anchor="ctr" wrap="square"/>
-          <a:lstStyle/>
-          <a:p>
-            <a:pPr algn="ctr">
+          <a:bodyPr rtlCol="0" anchor="ctr"/>
+          <a:lstStyle/>
+          <a:p>
+            <a:pPr algn="ctr"/>
+          </a:p>
+        </p:txBody>
+      </p:sp>
+      <p:sp>
+        <p:nvSpPr>
+          <p:cNvPr id="8" name="TextBox 7"/>
+          <p:cNvSpPr txBox="1"/>
+          <p:nvPr/>
+        </p:nvSpPr>
+        <p:spPr>
+          <a:xfrm>
+            <a:off x="960120" y="1874519"/>
+            <a:ext cx="5760720" cy="4297680"/>
+          </a:xfrm>
+          <a:prstGeom prst="rect">
+            <a:avLst/>
+          </a:prstGeom>
+          <a:noFill/>
+        </p:spPr>
+        <p:txBody>
+          <a:bodyPr wrap="square" lIns="0" rIns="0" tIns="0" bIns="0">
+            <a:spAutoFit/>
+          </a:bodyPr>
+          <a:lstStyle/>
+          <a:p>
+            <a:pPr>
+              <a:defRPr sz="1200" i="1" b="1">
+                <a:solidFill>
+                  <a:srgbClr val="38BDF8"/>
+                </a:solidFill>
+              </a:defRPr>
+            </a:pPr>
+            <a:r>
+              <a:t>““Comprehensive asset management: preventive and predictive AI-led health indexing with proprietary multi-physics degradation models.””</a:t>
+            </a:r>
+          </a:p>
+          <a:p>
+            <a:pPr>
+              <a:spcBef>
+                <a:spcPts val="400"/>
+              </a:spcBef>
+              <a:spcAft>
+                <a:spcPts val="1200"/>
+              </a:spcAft>
+              <a:defRPr sz="950" b="1">
+                <a:solidFill>
+                  <a:srgbClr val="94A3B8"/>
+                </a:solidFill>
+              </a:defRPr>
+            </a:pPr>
+            <a:r>
+              <a:t>— — THE OUTCOME-BASED REVOLUTION</a:t>
+            </a:r>
+          </a:p>
+          <a:p>
+            <a:pPr>
               <a:spcAft>
                 <a:spcPts val="600"/>
               </a:spcAft>
-              <a:defRPr sz="1100" b="1">
-                <a:solidFill>
-                  <a:srgbClr val="94A3B8"/>
-                </a:solidFill>
-              </a:defRPr>
-            </a:pPr>
-            <a:r>
-              <a:t>ISO CONFORMANCE</a:t>
-            </a:r>
-          </a:p>
-          <a:p>
-            <a:pPr algn="ctr">
-              <a:defRPr sz="1650" b="1">
-                <a:solidFill>
-                  <a:srgbClr val="00D4FF"/>
-                </a:solidFill>
-              </a:defRPr>
-            </a:pPr>
-            <a:r>
-              <a:t>ISO 55000 / 14224</a:t>
-            </a:r>
-          </a:p>
-        </p:txBody>
-      </p:sp>
-      <p:sp>
-        <p:nvSpPr>
-          <p:cNvPr id="7" name="Rounded Rectangle 6"/>
+              <a:defRPr sz="1050" b="1">
+                <a:solidFill>
+                  <a:srgbClr val="FFFFFF"/>
+                </a:solidFill>
+              </a:defRPr>
+            </a:pPr>
+            <a:r>
+              <a:t>EXECUTIVE OPERATIONAL SYNOPSIS</a:t>
+            </a:r>
+          </a:p>
+          <a:p>
+            <a:pPr>
+              <a:defRPr sz="1050">
+                <a:solidFill>
+                  <a:srgbClr val="F1F5F9"/>
+                </a:solidFill>
+              </a:defRPr>
+            </a:pPr>
+            <a:r>
+              <a:t>Heavy batch and continuous processes expose substations and mechanical components to massive strains. TerraAssets deploys predictive maintenance AI engines that continually scan telemetry from critical chillers, compressors, relays, breaker panels, and transformers to uncover micro-anomalies and trigger prioritized work orders under ISA 18.2 compliance.</a:t>
+            </a:r>
+          </a:p>
+        </p:txBody>
+      </p:sp>
+      <p:sp>
+        <p:nvSpPr>
+          <p:cNvPr id="9" name="Rounded Rectangle 8"/>
           <p:cNvSpPr/>
           <p:nvPr/>
         </p:nvSpPr>
         <p:spPr>
           <a:xfrm>
-            <a:off x="3456432" y="4663440"/>
-            <a:ext cx="2523744" cy="1280160"/>
+            <a:off x="7132320" y="1691640"/>
+            <a:ext cx="2084831" cy="1188720"/>
           </a:xfrm>
           <a:prstGeom prst="roundRect">
             <a:avLst/>
           </a:prstGeom>
           <a:solidFill>
-            <a:srgbClr val="0F172A"/>
+            <a:srgbClr val="131926"/>
           </a:solidFill>
-          <a:ln>
+          <a:ln w="12700">
             <a:solidFill>
-              <a:srgbClr val="1E293B"/>
+              <a:srgbClr val="38BDF8"/>
             </a:solidFill>
           </a:ln>
         </p:spPr>
@@ -3416,57 +4625,83 @@
           </a:fontRef>
         </p:style>
         <p:txBody>
-          <a:bodyPr rtlCol="0" anchor="ctr" wrap="square"/>
-          <a:lstStyle/>
-          <a:p>
-            <a:pPr algn="ctr">
-              <a:spcAft>
-                <a:spcPts val="600"/>
-              </a:spcAft>
-              <a:defRPr sz="1100" b="1">
+          <a:bodyPr rtlCol="0" anchor="ctr"/>
+          <a:lstStyle/>
+          <a:p>
+            <a:pPr algn="ctr"/>
+          </a:p>
+        </p:txBody>
+      </p:sp>
+      <p:sp>
+        <p:nvSpPr>
+          <p:cNvPr id="10" name="TextBox 9"/>
+          <p:cNvSpPr txBox="1"/>
+          <p:nvPr/>
+        </p:nvSpPr>
+        <p:spPr>
+          <a:xfrm>
+            <a:off x="7269480" y="1828800"/>
+            <a:ext cx="1810511" cy="914400"/>
+          </a:xfrm>
+          <a:prstGeom prst="rect">
+            <a:avLst/>
+          </a:prstGeom>
+          <a:noFill/>
+        </p:spPr>
+        <p:txBody>
+          <a:bodyPr wrap="square" lIns="0" rIns="0" tIns="0" bIns="0">
+            <a:spAutoFit/>
+          </a:bodyPr>
+          <a:lstStyle/>
+          <a:p>
+            <a:pPr>
+              <a:defRPr sz="850" b="1">
                 <a:solidFill>
                   <a:srgbClr val="94A3B8"/>
                 </a:solidFill>
               </a:defRPr>
             </a:pPr>
             <a:r>
-              <a:t>RUL PREDICTION</a:t>
-            </a:r>
-          </a:p>
-          <a:p>
-            <a:pPr algn="ctr">
-              <a:defRPr sz="1650" b="1">
-                <a:solidFill>
-                  <a:srgbClr val="00D4FF"/>
-                </a:solidFill>
-              </a:defRPr>
-            </a:pPr>
-            <a:r>
-              <a:t>Weibull / AI Hybrid</a:t>
-            </a:r>
-          </a:p>
-        </p:txBody>
-      </p:sp>
-      <p:sp>
-        <p:nvSpPr>
-          <p:cNvPr id="8" name="Rounded Rectangle 7"/>
+              <a:t>ISO CONFORMANCE</a:t>
+            </a:r>
+          </a:p>
+          <a:p>
+            <a:pPr>
+              <a:spcBef>
+                <a:spcPts val="400"/>
+              </a:spcBef>
+              <a:defRPr sz="1400" b="1">
+                <a:solidFill>
+                  <a:srgbClr val="FFFFFF"/>
+                </a:solidFill>
+              </a:defRPr>
+            </a:pPr>
+            <a:r>
+              <a:t>ISO 55000 / 14224</a:t>
+            </a:r>
+          </a:p>
+        </p:txBody>
+      </p:sp>
+      <p:sp>
+        <p:nvSpPr>
+          <p:cNvPr id="11" name="Rounded Rectangle 10"/>
           <p:cNvSpPr/>
           <p:nvPr/>
         </p:nvSpPr>
         <p:spPr>
           <a:xfrm>
-            <a:off x="6181344" y="4663440"/>
-            <a:ext cx="2523744" cy="1280160"/>
+            <a:off x="9381743" y="1691640"/>
+            <a:ext cx="2084831" cy="1188720"/>
           </a:xfrm>
           <a:prstGeom prst="roundRect">
             <a:avLst/>
           </a:prstGeom>
           <a:solidFill>
-            <a:srgbClr val="0F172A"/>
+            <a:srgbClr val="131926"/>
           </a:solidFill>
-          <a:ln>
+          <a:ln w="12700">
             <a:solidFill>
-              <a:srgbClr val="1E293B"/>
+              <a:srgbClr val="38BDF8"/>
             </a:solidFill>
           </a:ln>
         </p:spPr>
@@ -3485,57 +4720,83 @@
           </a:fontRef>
         </p:style>
         <p:txBody>
-          <a:bodyPr rtlCol="0" anchor="ctr" wrap="square"/>
-          <a:lstStyle/>
-          <a:p>
-            <a:pPr algn="ctr">
-              <a:spcAft>
-                <a:spcPts val="600"/>
-              </a:spcAft>
-              <a:defRPr sz="1100" b="1">
+          <a:bodyPr rtlCol="0" anchor="ctr"/>
+          <a:lstStyle/>
+          <a:p>
+            <a:pPr algn="ctr"/>
+          </a:p>
+        </p:txBody>
+      </p:sp>
+      <p:sp>
+        <p:nvSpPr>
+          <p:cNvPr id="12" name="TextBox 11"/>
+          <p:cNvSpPr txBox="1"/>
+          <p:nvPr/>
+        </p:nvSpPr>
+        <p:spPr>
+          <a:xfrm>
+            <a:off x="9518903" y="1828800"/>
+            <a:ext cx="1810511" cy="914400"/>
+          </a:xfrm>
+          <a:prstGeom prst="rect">
+            <a:avLst/>
+          </a:prstGeom>
+          <a:noFill/>
+        </p:spPr>
+        <p:txBody>
+          <a:bodyPr wrap="square" lIns="0" rIns="0" tIns="0" bIns="0">
+            <a:spAutoFit/>
+          </a:bodyPr>
+          <a:lstStyle/>
+          <a:p>
+            <a:pPr>
+              <a:defRPr sz="850" b="1">
                 <a:solidFill>
                   <a:srgbClr val="94A3B8"/>
                 </a:solidFill>
               </a:defRPr>
             </a:pPr>
             <a:r>
-              <a:t>ASSET DOSSIER</a:t>
-            </a:r>
-          </a:p>
-          <a:p>
-            <a:pPr algn="ctr">
-              <a:defRPr sz="1650" b="1">
-                <a:solidFill>
-                  <a:srgbClr val="00D4FF"/>
-                </a:solidFill>
-              </a:defRPr>
-            </a:pPr>
-            <a:r>
-              <a:t>100% Tree Hierarchy</a:t>
-            </a:r>
-          </a:p>
-        </p:txBody>
-      </p:sp>
-      <p:sp>
-        <p:nvSpPr>
-          <p:cNvPr id="9" name="Rounded Rectangle 8"/>
+              <a:t>RUL PREDICTION</a:t>
+            </a:r>
+          </a:p>
+          <a:p>
+            <a:pPr>
+              <a:spcBef>
+                <a:spcPts val="400"/>
+              </a:spcBef>
+              <a:defRPr sz="1400" b="1">
+                <a:solidFill>
+                  <a:srgbClr val="FFFFFF"/>
+                </a:solidFill>
+              </a:defRPr>
+            </a:pPr>
+            <a:r>
+              <a:t>Weibull / AI Hybrid</a:t>
+            </a:r>
+          </a:p>
+        </p:txBody>
+      </p:sp>
+      <p:sp>
+        <p:nvSpPr>
+          <p:cNvPr id="13" name="Rounded Rectangle 12"/>
           <p:cNvSpPr/>
           <p:nvPr/>
         </p:nvSpPr>
         <p:spPr>
           <a:xfrm>
-            <a:off x="8906256" y="4663440"/>
-            <a:ext cx="2523744" cy="1280160"/>
+            <a:off x="7132320" y="3044952"/>
+            <a:ext cx="2084831" cy="1188720"/>
           </a:xfrm>
           <a:prstGeom prst="roundRect">
             <a:avLst/>
           </a:prstGeom>
           <a:solidFill>
-            <a:srgbClr val="0F172A"/>
+            <a:srgbClr val="131926"/>
           </a:solidFill>
-          <a:ln>
+          <a:ln w="12700">
             <a:solidFill>
-              <a:srgbClr val="1E293B"/>
+              <a:srgbClr val="38BDF8"/>
             </a:solidFill>
           </a:ln>
         </p:spPr>
@@ -3554,33 +4815,264 @@
           </a:fontRef>
         </p:style>
         <p:txBody>
-          <a:bodyPr rtlCol="0" anchor="ctr" wrap="square"/>
-          <a:lstStyle/>
-          <a:p>
-            <a:pPr algn="ctr">
-              <a:spcAft>
-                <a:spcPts val="600"/>
-              </a:spcAft>
+          <a:bodyPr rtlCol="0" anchor="ctr"/>
+          <a:lstStyle/>
+          <a:p>
+            <a:pPr algn="ctr"/>
+          </a:p>
+        </p:txBody>
+      </p:sp>
+      <p:sp>
+        <p:nvSpPr>
+          <p:cNvPr id="14" name="TextBox 13"/>
+          <p:cNvSpPr txBox="1"/>
+          <p:nvPr/>
+        </p:nvSpPr>
+        <p:spPr>
+          <a:xfrm>
+            <a:off x="7269480" y="3182112"/>
+            <a:ext cx="1810511" cy="914400"/>
+          </a:xfrm>
+          <a:prstGeom prst="rect">
+            <a:avLst/>
+          </a:prstGeom>
+          <a:noFill/>
+        </p:spPr>
+        <p:txBody>
+          <a:bodyPr wrap="square" lIns="0" rIns="0" tIns="0" bIns="0">
+            <a:spAutoFit/>
+          </a:bodyPr>
+          <a:lstStyle/>
+          <a:p>
+            <a:pPr>
+              <a:defRPr sz="850" b="1">
+                <a:solidFill>
+                  <a:srgbClr val="94A3B8"/>
+                </a:solidFill>
+              </a:defRPr>
+            </a:pPr>
+            <a:r>
+              <a:t>ASSET DOSSIER</a:t>
+            </a:r>
+          </a:p>
+          <a:p>
+            <a:pPr>
+              <a:spcBef>
+                <a:spcPts val="400"/>
+              </a:spcBef>
+              <a:defRPr sz="1400" b="1">
+                <a:solidFill>
+                  <a:srgbClr val="34D399"/>
+                </a:solidFill>
+              </a:defRPr>
+            </a:pPr>
+            <a:r>
+              <a:t>100% Tree Hierarchy</a:t>
+            </a:r>
+          </a:p>
+        </p:txBody>
+      </p:sp>
+      <p:sp>
+        <p:nvSpPr>
+          <p:cNvPr id="15" name="Rounded Rectangle 14"/>
+          <p:cNvSpPr/>
+          <p:nvPr/>
+        </p:nvSpPr>
+        <p:spPr>
+          <a:xfrm>
+            <a:off x="9381743" y="3044952"/>
+            <a:ext cx="2084831" cy="1188720"/>
+          </a:xfrm>
+          <a:prstGeom prst="roundRect">
+            <a:avLst/>
+          </a:prstGeom>
+          <a:solidFill>
+            <a:srgbClr val="131926"/>
+          </a:solidFill>
+          <a:ln w="12700">
+            <a:solidFill>
+              <a:srgbClr val="38BDF8"/>
+            </a:solidFill>
+          </a:ln>
+        </p:spPr>
+        <p:style>
+          <a:lnRef idx="1">
+            <a:schemeClr val="accent1"/>
+          </a:lnRef>
+          <a:fillRef idx="3">
+            <a:schemeClr val="accent1"/>
+          </a:fillRef>
+          <a:effectRef idx="2">
+            <a:schemeClr val="accent1"/>
+          </a:effectRef>
+          <a:fontRef idx="minor">
+            <a:schemeClr val="lt1"/>
+          </a:fontRef>
+        </p:style>
+        <p:txBody>
+          <a:bodyPr rtlCol="0" anchor="ctr"/>
+          <a:lstStyle/>
+          <a:p>
+            <a:pPr algn="ctr"/>
+          </a:p>
+        </p:txBody>
+      </p:sp>
+      <p:sp>
+        <p:nvSpPr>
+          <p:cNvPr id="16" name="TextBox 15"/>
+          <p:cNvSpPr txBox="1"/>
+          <p:nvPr/>
+        </p:nvSpPr>
+        <p:spPr>
+          <a:xfrm>
+            <a:off x="9518903" y="3182112"/>
+            <a:ext cx="1810511" cy="914400"/>
+          </a:xfrm>
+          <a:prstGeom prst="rect">
+            <a:avLst/>
+          </a:prstGeom>
+          <a:noFill/>
+        </p:spPr>
+        <p:txBody>
+          <a:bodyPr wrap="square" lIns="0" rIns="0" tIns="0" bIns="0">
+            <a:spAutoFit/>
+          </a:bodyPr>
+          <a:lstStyle/>
+          <a:p>
+            <a:pPr>
+              <a:defRPr sz="850" b="1">
+                <a:solidFill>
+                  <a:srgbClr val="94A3B8"/>
+                </a:solidFill>
+              </a:defRPr>
+            </a:pPr>
+            <a:r>
+              <a:t>MTBF GAIN</a:t>
+            </a:r>
+          </a:p>
+          <a:p>
+            <a:pPr>
+              <a:spcBef>
+                <a:spcPts val="400"/>
+              </a:spcBef>
+              <a:defRPr sz="1400" b="1">
+                <a:solidFill>
+                  <a:srgbClr val="34D399"/>
+                </a:solidFill>
+              </a:defRPr>
+            </a:pPr>
+            <a:r>
+              <a:t>+28% Measured</a:t>
+            </a:r>
+          </a:p>
+        </p:txBody>
+      </p:sp>
+      <p:sp>
+        <p:nvSpPr>
+          <p:cNvPr id="17" name="Rounded Rectangle 16"/>
+          <p:cNvSpPr/>
+          <p:nvPr/>
+        </p:nvSpPr>
+        <p:spPr>
+          <a:xfrm>
+            <a:off x="7132320" y="4434840"/>
+            <a:ext cx="4334256" cy="1920240"/>
+          </a:xfrm>
+          <a:prstGeom prst="roundRect">
+            <a:avLst/>
+          </a:prstGeom>
+          <a:solidFill>
+            <a:srgbClr val="131926"/>
+          </a:solidFill>
+          <a:ln w="12700">
+            <a:solidFill>
+              <a:srgbClr val="28344B"/>
+            </a:solidFill>
+          </a:ln>
+        </p:spPr>
+        <p:style>
+          <a:lnRef idx="1">
+            <a:schemeClr val="accent1"/>
+          </a:lnRef>
+          <a:fillRef idx="3">
+            <a:schemeClr val="accent1"/>
+          </a:fillRef>
+          <a:effectRef idx="2">
+            <a:schemeClr val="accent1"/>
+          </a:effectRef>
+          <a:fontRef idx="minor">
+            <a:schemeClr val="lt1"/>
+          </a:fontRef>
+        </p:style>
+        <p:txBody>
+          <a:bodyPr rtlCol="0" anchor="ctr"/>
+          <a:lstStyle/>
+          <a:p>
+            <a:pPr algn="ctr"/>
+          </a:p>
+        </p:txBody>
+      </p:sp>
+      <p:sp>
+        <p:nvSpPr>
+          <p:cNvPr id="18" name="TextBox 17"/>
+          <p:cNvSpPr txBox="1"/>
+          <p:nvPr/>
+        </p:nvSpPr>
+        <p:spPr>
+          <a:xfrm>
+            <a:off x="7360920" y="4617720"/>
+            <a:ext cx="3840480" cy="1554480"/>
+          </a:xfrm>
+          <a:prstGeom prst="rect">
+            <a:avLst/>
+          </a:prstGeom>
+          <a:noFill/>
+        </p:spPr>
+        <p:txBody>
+          <a:bodyPr wrap="square" lIns="0" rIns="0" tIns="0" bIns="0">
+            <a:spAutoFit/>
+          </a:bodyPr>
+          <a:lstStyle/>
+          <a:p>
+            <a:pPr>
+              <a:defRPr sz="950" b="1">
+                <a:solidFill>
+                  <a:srgbClr val="38BDF8"/>
+                </a:solidFill>
+              </a:defRPr>
+            </a:pPr>
+            <a:r>
+              <a:t>TERRESTRIAL PLATFORM CORE</a:t>
+            </a:r>
+          </a:p>
+          <a:p>
+            <a:pPr>
+              <a:spcBef>
+                <a:spcPts val="200"/>
+              </a:spcBef>
               <a:defRPr sz="1100" b="1">
                 <a:solidFill>
+                  <a:srgbClr val="FFFFFF"/>
+                </a:solidFill>
+              </a:defRPr>
+            </a:pPr>
+            <a:r>
+              <a:t>Edge-to-Cloud Cognitive Nervous System</a:t>
+            </a:r>
+          </a:p>
+          <a:p>
+            <a:pPr>
+              <a:spcBef>
+                <a:spcPts val="400"/>
+              </a:spcBef>
+              <a:defRPr sz="900">
+                <a:solidFill>
                   <a:srgbClr val="94A3B8"/>
                 </a:solidFill>
               </a:defRPr>
             </a:pPr>
             <a:r>
-              <a:t>MTBF GAIN</a:t>
-            </a:r>
-          </a:p>
-          <a:p>
-            <a:pPr algn="ctr">
-              <a:defRPr sz="1650" b="1">
-                <a:solidFill>
-                  <a:srgbClr val="00D4FF"/>
-                </a:solidFill>
-              </a:defRPr>
-            </a:pPr>
-            <a:r>
-              <a:t>+28% Measured</a:t>
+              <a:t>Physics-informed mathematical twin running sub-25ms closed-loop supervisory control with full ISA-95/101 conformity.</a:t>
             </a:r>
           </a:p>
         </p:txBody>
@@ -3618,7 +5110,7 @@
             <a:avLst/>
           </a:prstGeom>
           <a:solidFill>
-            <a:srgbClr val="0A0E1A"/>
+            <a:srgbClr val="0B0F17"/>
           </a:solidFill>
           <a:ln>
             <a:noFill/>
@@ -3654,17 +5146,19 @@
         </p:nvSpPr>
         <p:spPr>
           <a:xfrm>
-            <a:off x="0" y="0"/>
-            <a:ext cx="12191695" cy="54864"/>
+            <a:off x="731520" y="365760"/>
+            <a:ext cx="10728655" cy="18288"/>
           </a:xfrm>
           <a:prstGeom prst="rect">
             <a:avLst/>
           </a:prstGeom>
           <a:solidFill>
-            <a:srgbClr val="00D4FF"/>
+            <a:srgbClr val="38BDF8"/>
           </a:solidFill>
           <a:ln>
-            <a:noFill/>
+            <a:solidFill>
+              <a:srgbClr val="38BDF8"/>
+            </a:solidFill>
           </a:ln>
         </p:spPr>
         <p:style>
@@ -3697,8 +5191,8 @@
         </p:nvSpPr>
         <p:spPr>
           <a:xfrm>
-            <a:off x="731520" y="365760"/>
-            <a:ext cx="10698480" cy="1005840"/>
+            <a:off x="731520" y="438912"/>
+            <a:ext cx="8229600" cy="274320"/>
           </a:xfrm>
           <a:prstGeom prst="rect">
             <a:avLst/>
@@ -3706,35 +5200,20 @@
           <a:noFill/>
         </p:spPr>
         <p:txBody>
-          <a:bodyPr wrap="square">
+          <a:bodyPr wrap="square" lIns="0" rIns="0" tIns="0" bIns="0">
             <a:spAutoFit/>
           </a:bodyPr>
           <a:lstStyle/>
           <a:p>
             <a:pPr>
-              <a:spcAft>
-                <a:spcPts val="400"/>
-              </a:spcAft>
-              <a:defRPr sz="1150" b="1">
-                <a:solidFill>
-                  <a:srgbClr val="00D4FF"/>
-                </a:solidFill>
-              </a:defRPr>
-            </a:pPr>
-            <a:r>
-              <a:t>TERRAASSETS  |  TERRESTRIAL PLATFORM</a:t>
-            </a:r>
-          </a:p>
-          <a:p>
-            <a:pPr>
-              <a:defRPr sz="2500" b="1">
-                <a:solidFill>
-                  <a:srgbClr val="FFFFFF"/>
-                </a:solidFill>
-              </a:defRPr>
-            </a:pPr>
-            <a:r>
-              <a:t>Core Functional Deliverables &amp; Architectural Pillars</a:t>
+              <a:defRPr sz="950" b="1">
+                <a:solidFill>
+                  <a:srgbClr val="38BDF8"/>
+                </a:solidFill>
+              </a:defRPr>
+            </a:pPr>
+            <a:r>
+              <a:t>TERRESTRIAL PLATFORM  |  TERRAASSETS  |  OPERATIONAL INTERFACE</a:t>
             </a:r>
           </a:p>
         </p:txBody>
@@ -3747,8 +5226,8 @@
         </p:nvSpPr>
         <p:spPr>
           <a:xfrm>
-            <a:off x="731520" y="6446520"/>
-            <a:ext cx="10698480" cy="320040"/>
+            <a:off x="731520" y="731520"/>
+            <a:ext cx="9601200" cy="777240"/>
           </a:xfrm>
           <a:prstGeom prst="rect">
             <a:avLst/>
@@ -3756,44 +5235,83 @@
           <a:noFill/>
         </p:spPr>
         <p:txBody>
-          <a:bodyPr wrap="none">
+          <a:bodyPr wrap="square" lIns="0" rIns="0" tIns="0" bIns="0">
             <a:spAutoFit/>
           </a:bodyPr>
           <a:lstStyle/>
           <a:p>
             <a:pPr>
-              <a:defRPr sz="1000">
+              <a:defRPr sz="1900" b="1">
+                <a:solidFill>
+                  <a:srgbClr val="FFFFFF"/>
+                </a:solidFill>
+              </a:defRPr>
+            </a:pPr>
+            <a:r>
+              <a:t>TerraAssets ANSI/ISA-101 Operational Interface &amp; Real-Time System Representation</a:t>
+            </a:r>
+          </a:p>
+          <a:p>
+            <a:pPr>
+              <a:spcBef>
+                <a:spcPts val="300"/>
+              </a:spcBef>
+              <a:defRPr sz="1050">
                 <a:solidFill>
                   <a:srgbClr val="94A3B8"/>
                 </a:solidFill>
               </a:defRPr>
             </a:pPr>
             <a:r>
-              <a:t>TERRESTRIAL PLATFORM  |  TERRAASSETS CATALOGUE  |  CONFIDENTIAL - AUTHORISED SYSTEM INTEGRATORS ONLY</a:t>
-            </a:r>
-          </a:p>
-        </p:txBody>
-      </p:sp>
-      <p:sp>
-        <p:nvSpPr>
-          <p:cNvPr id="6" name="Rounded Rectangle 5"/>
+              <a:t>ANSI/ISA-101 Ergonomic High-Performance HMI · Real-Time System Representation</a:t>
+            </a:r>
+          </a:p>
+        </p:txBody>
+      </p:sp>
+      <p:pic>
+        <p:nvPicPr>
+          <p:cNvPr id="6" name="Picture 5" descr="tp_logo_white.png"/>
+          <p:cNvPicPr>
+            <a:picLocks noChangeAspect="1"/>
+          </p:cNvPicPr>
+          <p:nvPr/>
+        </p:nvPicPr>
+        <p:blipFill>
+          <a:blip r:embed="rId2"/>
+          <a:stretch>
+            <a:fillRect/>
+          </a:stretch>
+        </p:blipFill>
+        <p:spPr>
+          <a:xfrm>
+            <a:off x="10469880" y="411480"/>
+            <a:ext cx="987552" cy="384048"/>
+          </a:xfrm>
+          <a:prstGeom prst="rect">
+            <a:avLst/>
+          </a:prstGeom>
+        </p:spPr>
+      </p:pic>
+      <p:sp>
+        <p:nvSpPr>
+          <p:cNvPr id="7" name="Rounded Rectangle 6"/>
           <p:cNvSpPr/>
           <p:nvPr/>
         </p:nvSpPr>
         <p:spPr>
           <a:xfrm>
             <a:off x="731520" y="1645920"/>
-            <a:ext cx="5212080" cy="2148840"/>
+            <a:ext cx="10728655" cy="4709160"/>
           </a:xfrm>
           <a:prstGeom prst="roundRect">
             <a:avLst/>
           </a:prstGeom>
           <a:solidFill>
-            <a:srgbClr val="0F172A"/>
+            <a:srgbClr val="131926"/>
           </a:solidFill>
-          <a:ln>
+          <a:ln w="12700">
             <a:solidFill>
-              <a:srgbClr val="1E293B"/>
+              <a:srgbClr val="38BDF8"/>
             </a:solidFill>
           </a:ln>
         </p:spPr>
@@ -3812,304 +5330,37 @@
           </a:fontRef>
         </p:style>
         <p:txBody>
-          <a:bodyPr rtlCol="0" anchor="ctr" wrap="square"/>
-          <a:lstStyle/>
-          <a:p>
-            <a:pPr algn="ctr">
-              <a:spcAft>
-                <a:spcPts val="400"/>
-              </a:spcAft>
-              <a:defRPr sz="1100" b="1">
-                <a:solidFill>
-                  <a:srgbClr val="00D4FF"/>
-                </a:solidFill>
-              </a:defRPr>
-            </a:pPr>
-            <a:r>
-              <a:t>PILLAR 01</a:t>
-            </a:r>
-          </a:p>
-          <a:p>
-            <a:pPr>
-              <a:spcAft>
-                <a:spcPts val="600"/>
-              </a:spcAft>
-              <a:defRPr sz="1650" b="1">
-                <a:solidFill>
-                  <a:srgbClr val="FFFFFF"/>
-                </a:solidFill>
-              </a:defRPr>
-            </a:pPr>
-            <a:r>
-              <a:t>Multi-Tier Topological Asset Hierarchy</a:t>
-            </a:r>
-          </a:p>
-          <a:p>
-            <a:pPr>
-              <a:defRPr sz="1300">
-                <a:solidFill>
-                  <a:srgbClr val="C8D8F0"/>
-                </a:solidFill>
-              </a:defRPr>
-            </a:pPr>
-            <a:r>
-              <a:t>Organizes complex plant asset hierarchies, relationships, and electrical connections using an enterprise graph topology engine.</a:t>
-            </a:r>
-          </a:p>
-        </p:txBody>
-      </p:sp>
-      <p:sp>
-        <p:nvSpPr>
-          <p:cNvPr id="7" name="Rounded Rectangle 6"/>
-          <p:cNvSpPr/>
-          <p:nvPr/>
-        </p:nvSpPr>
-        <p:spPr>
-          <a:xfrm>
-            <a:off x="6217920" y="1645920"/>
-            <a:ext cx="5212080" cy="2148840"/>
-          </a:xfrm>
-          <a:prstGeom prst="roundRect">
-            <a:avLst/>
-          </a:prstGeom>
-          <a:solidFill>
-            <a:srgbClr val="0F172A"/>
-          </a:solidFill>
-          <a:ln>
-            <a:solidFill>
-              <a:srgbClr val="1E293B"/>
-            </a:solidFill>
-          </a:ln>
-        </p:spPr>
-        <p:style>
-          <a:lnRef idx="1">
-            <a:schemeClr val="accent1"/>
-          </a:lnRef>
-          <a:fillRef idx="3">
-            <a:schemeClr val="accent1"/>
-          </a:fillRef>
-          <a:effectRef idx="2">
-            <a:schemeClr val="accent1"/>
-          </a:effectRef>
-          <a:fontRef idx="minor">
-            <a:schemeClr val="lt1"/>
-          </a:fontRef>
-        </p:style>
-        <p:txBody>
-          <a:bodyPr rtlCol="0" anchor="ctr" wrap="square"/>
-          <a:lstStyle/>
-          <a:p>
-            <a:pPr algn="ctr">
-              <a:spcAft>
-                <a:spcPts val="400"/>
-              </a:spcAft>
-              <a:defRPr sz="1100" b="1">
-                <a:solidFill>
-                  <a:srgbClr val="00D4FF"/>
-                </a:solidFill>
-              </a:defRPr>
-            </a:pPr>
-            <a:r>
-              <a:t>PILLAR 02</a:t>
-            </a:r>
-          </a:p>
-          <a:p>
-            <a:pPr>
-              <a:spcAft>
-                <a:spcPts val="600"/>
-              </a:spcAft>
-              <a:defRPr sz="1650" b="1">
-                <a:solidFill>
-                  <a:srgbClr val="FFFFFF"/>
-                </a:solidFill>
-              </a:defRPr>
-            </a:pPr>
-            <a:r>
-              <a:t>Continuous Transformer Health Analytics</a:t>
-            </a:r>
-          </a:p>
-          <a:p>
-            <a:pPr>
-              <a:defRPr sz="1300">
-                <a:solidFill>
-                  <a:srgbClr val="C8D8F0"/>
-                </a:solidFill>
-              </a:defRPr>
-            </a:pPr>
-            <a:r>
-              <a:t>Monitors transformer thermal stresses, winding temperature, and oil degradation parameters continuously.</a:t>
-            </a:r>
-          </a:p>
-        </p:txBody>
-      </p:sp>
-      <p:sp>
-        <p:nvSpPr>
-          <p:cNvPr id="8" name="Rounded Rectangle 7"/>
-          <p:cNvSpPr/>
-          <p:nvPr/>
-        </p:nvSpPr>
-        <p:spPr>
-          <a:xfrm>
-            <a:off x="731520" y="4069080"/>
-            <a:ext cx="5212080" cy="2148840"/>
-          </a:xfrm>
-          <a:prstGeom prst="roundRect">
-            <a:avLst/>
-          </a:prstGeom>
-          <a:solidFill>
-            <a:srgbClr val="0F172A"/>
-          </a:solidFill>
-          <a:ln>
-            <a:solidFill>
-              <a:srgbClr val="1E293B"/>
-            </a:solidFill>
-          </a:ln>
-        </p:spPr>
-        <p:style>
-          <a:lnRef idx="1">
-            <a:schemeClr val="accent1"/>
-          </a:lnRef>
-          <a:fillRef idx="3">
-            <a:schemeClr val="accent1"/>
-          </a:fillRef>
-          <a:effectRef idx="2">
-            <a:schemeClr val="accent1"/>
-          </a:effectRef>
-          <a:fontRef idx="minor">
-            <a:schemeClr val="lt1"/>
-          </a:fontRef>
-        </p:style>
-        <p:txBody>
-          <a:bodyPr rtlCol="0" anchor="ctr" wrap="square"/>
-          <a:lstStyle/>
-          <a:p>
-            <a:pPr algn="ctr">
-              <a:spcAft>
-                <a:spcPts val="400"/>
-              </a:spcAft>
-              <a:defRPr sz="1100" b="1">
-                <a:solidFill>
-                  <a:srgbClr val="00D4FF"/>
-                </a:solidFill>
-              </a:defRPr>
-            </a:pPr>
-            <a:r>
-              <a:t>PILLAR 03</a:t>
-            </a:r>
-          </a:p>
-          <a:p>
-            <a:pPr>
-              <a:spcAft>
-                <a:spcPts val="600"/>
-              </a:spcAft>
-              <a:defRPr sz="1650" b="1">
-                <a:solidFill>
-                  <a:srgbClr val="FFFFFF"/>
-                </a:solidFill>
-              </a:defRPr>
-            </a:pPr>
-            <a:r>
-              <a:t>Vibration &amp; Rotating Machine Prognostics</a:t>
-            </a:r>
-          </a:p>
-          <a:p>
-            <a:pPr>
-              <a:defRPr sz="1300">
-                <a:solidFill>
-                  <a:srgbClr val="C8D8F0"/>
-                </a:solidFill>
-              </a:defRPr>
-            </a:pPr>
-            <a:r>
-              <a:t>Tracks vibration signatures, harmonics, and run-hours across chillers, compressors, and high-pressure pumps.</a:t>
-            </a:r>
-          </a:p>
-        </p:txBody>
-      </p:sp>
-      <p:sp>
-        <p:nvSpPr>
-          <p:cNvPr id="9" name="Rounded Rectangle 8"/>
-          <p:cNvSpPr/>
-          <p:nvPr/>
-        </p:nvSpPr>
-        <p:spPr>
-          <a:xfrm>
-            <a:off x="6217920" y="4069080"/>
-            <a:ext cx="5212080" cy="2148840"/>
-          </a:xfrm>
-          <a:prstGeom prst="roundRect">
-            <a:avLst/>
-          </a:prstGeom>
-          <a:solidFill>
-            <a:srgbClr val="0F172A"/>
-          </a:solidFill>
-          <a:ln>
-            <a:solidFill>
-              <a:srgbClr val="1E293B"/>
-            </a:solidFill>
-          </a:ln>
-        </p:spPr>
-        <p:style>
-          <a:lnRef idx="1">
-            <a:schemeClr val="accent1"/>
-          </a:lnRef>
-          <a:fillRef idx="3">
-            <a:schemeClr val="accent1"/>
-          </a:fillRef>
-          <a:effectRef idx="2">
-            <a:schemeClr val="accent1"/>
-          </a:effectRef>
-          <a:fontRef idx="minor">
-            <a:schemeClr val="lt1"/>
-          </a:fontRef>
-        </p:style>
-        <p:txBody>
-          <a:bodyPr rtlCol="0" anchor="ctr" wrap="square"/>
-          <a:lstStyle/>
-          <a:p>
-            <a:pPr algn="ctr">
-              <a:spcAft>
-                <a:spcPts val="400"/>
-              </a:spcAft>
-              <a:defRPr sz="1100" b="1">
-                <a:solidFill>
-                  <a:srgbClr val="00D4FF"/>
-                </a:solidFill>
-              </a:defRPr>
-            </a:pPr>
-            <a:r>
-              <a:t>PILLAR 04</a:t>
-            </a:r>
-          </a:p>
-          <a:p>
-            <a:pPr>
-              <a:spcAft>
-                <a:spcPts val="600"/>
-              </a:spcAft>
-              <a:defRPr sz="1650" b="1">
-                <a:solidFill>
-                  <a:srgbClr val="FFFFFF"/>
-                </a:solidFill>
-              </a:defRPr>
-            </a:pPr>
-            <a:r>
-              <a:t>Native SAP / CMMS Bidirectional Integration</a:t>
-            </a:r>
-          </a:p>
-          <a:p>
-            <a:pPr>
-              <a:defRPr sz="1300">
-                <a:solidFill>
-                  <a:srgbClr val="C8D8F0"/>
-                </a:solidFill>
-              </a:defRPr>
-            </a:pPr>
-            <a:r>
-              <a:t>Automated creation of maintenance tickets and spare parts reservation in enterprise ERP.</a:t>
-            </a:r>
-          </a:p>
-        </p:txBody>
-      </p:sp>
+          <a:bodyPr rtlCol="0" anchor="ctr"/>
+          <a:lstStyle/>
+          <a:p>
+            <a:pPr algn="ctr"/>
+          </a:p>
+        </p:txBody>
+      </p:sp>
+      <p:pic>
+        <p:nvPicPr>
+          <p:cNvPr id="8" name="Picture 7" descr="terra_assets_showcase.jpg"/>
+          <p:cNvPicPr>
+            <a:picLocks noChangeAspect="1"/>
+          </p:cNvPicPr>
+          <p:nvPr/>
+        </p:nvPicPr>
+        <p:blipFill>
+          <a:blip r:embed="rId3"/>
+          <a:stretch>
+            <a:fillRect/>
+          </a:stretch>
+        </p:blipFill>
+        <p:spPr>
+          <a:xfrm>
+            <a:off x="777240" y="1691640"/>
+            <a:ext cx="10637215" cy="4617720"/>
+          </a:xfrm>
+          <a:prstGeom prst="rect">
+            <a:avLst/>
+          </a:prstGeom>
+        </p:spPr>
+      </p:pic>
     </p:spTree>
   </p:cSld>
   <p:clrMapOvr>
@@ -4143,7 +5394,7 @@
             <a:avLst/>
           </a:prstGeom>
           <a:solidFill>
-            <a:srgbClr val="0A0E1A"/>
+            <a:srgbClr val="0B0F17"/>
           </a:solidFill>
           <a:ln>
             <a:noFill/>
@@ -4179,17 +5430,19 @@
         </p:nvSpPr>
         <p:spPr>
           <a:xfrm>
-            <a:off x="0" y="0"/>
-            <a:ext cx="12191695" cy="54864"/>
+            <a:off x="731520" y="365760"/>
+            <a:ext cx="10728655" cy="18288"/>
           </a:xfrm>
           <a:prstGeom prst="rect">
             <a:avLst/>
           </a:prstGeom>
           <a:solidFill>
-            <a:srgbClr val="00D4FF"/>
+            <a:srgbClr val="38BDF8"/>
           </a:solidFill>
           <a:ln>
-            <a:noFill/>
+            <a:solidFill>
+              <a:srgbClr val="38BDF8"/>
+            </a:solidFill>
           </a:ln>
         </p:spPr>
         <p:style>
@@ -4222,8 +5475,8 @@
         </p:nvSpPr>
         <p:spPr>
           <a:xfrm>
-            <a:off x="731520" y="365760"/>
-            <a:ext cx="10698480" cy="1005840"/>
+            <a:off x="731520" y="438912"/>
+            <a:ext cx="8229600" cy="274320"/>
           </a:xfrm>
           <a:prstGeom prst="rect">
             <a:avLst/>
@@ -4231,35 +5484,20 @@
           <a:noFill/>
         </p:spPr>
         <p:txBody>
-          <a:bodyPr wrap="square">
+          <a:bodyPr wrap="square" lIns="0" rIns="0" tIns="0" bIns="0">
             <a:spAutoFit/>
           </a:bodyPr>
           <a:lstStyle/>
           <a:p>
             <a:pPr>
-              <a:spcAft>
-                <a:spcPts val="400"/>
-              </a:spcAft>
-              <a:defRPr sz="1150" b="1">
-                <a:solidFill>
-                  <a:srgbClr val="00D4FF"/>
-                </a:solidFill>
-              </a:defRPr>
-            </a:pPr>
-            <a:r>
-              <a:t>TERRAASSETS  |  TERRESTRIAL PLATFORM</a:t>
-            </a:r>
-          </a:p>
-          <a:p>
-            <a:pPr>
-              <a:defRPr sz="2500" b="1">
-                <a:solidFill>
-                  <a:srgbClr val="FFFFFF"/>
-                </a:solidFill>
-              </a:defRPr>
-            </a:pPr>
-            <a:r>
-              <a:t>Field-Validated Operational Use Cases &amp; Quantifiable ROI</a:t>
+              <a:defRPr sz="950" b="1">
+                <a:solidFill>
+                  <a:srgbClr val="38BDF8"/>
+                </a:solidFill>
+              </a:defRPr>
+            </a:pPr>
+            <a:r>
+              <a:t>TERRESTRIAL PLATFORM  |  TERRAASSETS  |  CORE CAPABILITIES</a:t>
             </a:r>
           </a:p>
         </p:txBody>
@@ -4272,8 +5510,8 @@
         </p:nvSpPr>
         <p:spPr>
           <a:xfrm>
-            <a:off x="731520" y="6446520"/>
-            <a:ext cx="10698480" cy="320040"/>
+            <a:off x="731520" y="731520"/>
+            <a:ext cx="9601200" cy="777240"/>
           </a:xfrm>
           <a:prstGeom prst="rect">
             <a:avLst/>
@@ -4281,44 +5519,83 @@
           <a:noFill/>
         </p:spPr>
         <p:txBody>
-          <a:bodyPr wrap="none">
+          <a:bodyPr wrap="square" lIns="0" rIns="0" tIns="0" bIns="0">
             <a:spAutoFit/>
           </a:bodyPr>
           <a:lstStyle/>
           <a:p>
             <a:pPr>
-              <a:defRPr sz="1000">
+              <a:defRPr sz="1900" b="1">
+                <a:solidFill>
+                  <a:srgbClr val="FFFFFF"/>
+                </a:solidFill>
+              </a:defRPr>
+            </a:pPr>
+            <a:r>
+              <a:t>What TerraAssets Will Do</a:t>
+            </a:r>
+          </a:p>
+          <a:p>
+            <a:pPr>
+              <a:spcBef>
+                <a:spcPts val="300"/>
+              </a:spcBef>
+              <a:defRPr sz="1050">
                 <a:solidFill>
                   <a:srgbClr val="94A3B8"/>
                 </a:solidFill>
               </a:defRPr>
             </a:pPr>
             <a:r>
-              <a:t>TERRESTRIAL PLATFORM  |  TERRAASSETS CATALOGUE  |  CONFIDENTIAL - AUTHORISED SYSTEM INTEGRATORS ONLY</a:t>
-            </a:r>
-          </a:p>
-        </p:txBody>
-      </p:sp>
-      <p:sp>
-        <p:nvSpPr>
-          <p:cNvPr id="6" name="Rounded Rectangle 5"/>
+              <a:t>Specific operational functions and engineering capabilities directly sourced from technical documentation.</a:t>
+            </a:r>
+          </a:p>
+        </p:txBody>
+      </p:sp>
+      <p:pic>
+        <p:nvPicPr>
+          <p:cNvPr id="6" name="Picture 5" descr="tp_logo_white.png"/>
+          <p:cNvPicPr>
+            <a:picLocks noChangeAspect="1"/>
+          </p:cNvPicPr>
+          <p:nvPr/>
+        </p:nvPicPr>
+        <p:blipFill>
+          <a:blip r:embed="rId2"/>
+          <a:stretch>
+            <a:fillRect/>
+          </a:stretch>
+        </p:blipFill>
+        <p:spPr>
+          <a:xfrm>
+            <a:off x="10469880" y="411480"/>
+            <a:ext cx="987552" cy="384048"/>
+          </a:xfrm>
+          <a:prstGeom prst="rect">
+            <a:avLst/>
+          </a:prstGeom>
+        </p:spPr>
+      </p:pic>
+      <p:sp>
+        <p:nvSpPr>
+          <p:cNvPr id="7" name="Rounded Rectangle 6"/>
           <p:cNvSpPr/>
           <p:nvPr/>
         </p:nvSpPr>
         <p:spPr>
           <a:xfrm>
-            <a:off x="731520" y="1645920"/>
-            <a:ext cx="3401568" cy="4389120"/>
+            <a:off x="731520" y="1691640"/>
+            <a:ext cx="5230368" cy="2194560"/>
           </a:xfrm>
           <a:prstGeom prst="roundRect">
             <a:avLst/>
           </a:prstGeom>
           <a:solidFill>
-            <a:srgbClr val="0F172A"/>
+            <a:srgbClr val="131926"/>
           </a:solidFill>
-          <a:ln>
+          <a:ln w="12700">
             <a:solidFill>
-              <a:srgbClr val="1E293B"/>
+              <a:srgbClr val="28344B"/>
             </a:solidFill>
           </a:ln>
         </p:spPr>
@@ -4337,72 +5614,98 @@
           </a:fontRef>
         </p:style>
         <p:txBody>
-          <a:bodyPr rtlCol="0" anchor="ctr" wrap="square"/>
-          <a:lstStyle/>
-          <a:p>
-            <a:pPr algn="ctr">
+          <a:bodyPr rtlCol="0" anchor="ctr"/>
+          <a:lstStyle/>
+          <a:p>
+            <a:pPr algn="ctr"/>
+          </a:p>
+        </p:txBody>
+      </p:sp>
+      <p:sp>
+        <p:nvSpPr>
+          <p:cNvPr id="8" name="TextBox 7"/>
+          <p:cNvSpPr txBox="1"/>
+          <p:nvPr/>
+        </p:nvSpPr>
+        <p:spPr>
+          <a:xfrm>
+            <a:off x="960120" y="1874520"/>
+            <a:ext cx="4773168" cy="1828800"/>
+          </a:xfrm>
+          <a:prstGeom prst="rect">
+            <a:avLst/>
+          </a:prstGeom>
+          <a:noFill/>
+        </p:spPr>
+        <p:txBody>
+          <a:bodyPr wrap="square" lIns="0" rIns="0" tIns="0" bIns="0">
+            <a:spAutoFit/>
+          </a:bodyPr>
+          <a:lstStyle/>
+          <a:p>
+            <a:pPr>
+              <a:defRPr sz="850" b="1">
+                <a:solidFill>
+                  <a:srgbClr val="38BDF8"/>
+                </a:solidFill>
+              </a:defRPr>
+            </a:pPr>
+            <a:r>
+              <a:t>PILLAR 01  |  ENGINEERING CAPABILITY</a:t>
+            </a:r>
+          </a:p>
+          <a:p>
+            <a:pPr>
+              <a:spcBef>
+                <a:spcPts val="300"/>
+              </a:spcBef>
               <a:spcAft>
-                <a:spcPts val="800"/>
+                <a:spcPts val="600"/>
               </a:spcAft>
-              <a:defRPr sz="1100" b="1">
-                <a:solidFill>
-                  <a:srgbClr val="F5C842"/>
-                </a:solidFill>
-              </a:defRPr>
-            </a:pPr>
-            <a:r>
-              <a:t>PRODUCTIVITY &amp; DOWNTIME MITIGATION</a:t>
-            </a:r>
-          </a:p>
-          <a:p>
-            <a:pPr>
-              <a:spcAft>
-                <a:spcPts val="1200"/>
-              </a:spcAft>
-              <a:defRPr sz="1600" b="1">
+              <a:defRPr sz="1300" b="1">
                 <a:solidFill>
                   <a:srgbClr val="FFFFFF"/>
                 </a:solidFill>
               </a:defRPr>
             </a:pPr>
             <a:r>
-              <a:t>Productivity &amp; Downtime Mitigation</a:t>
-            </a:r>
-          </a:p>
-          <a:p>
-            <a:pPr>
-              <a:defRPr sz="1300">
-                <a:solidFill>
-                  <a:srgbClr val="C8D8F0"/>
-                </a:solidFill>
-              </a:defRPr>
-            </a:pPr>
-            <a:r>
-              <a:t>Unplanned production downtime suppressed from legacy baseline of 490 hours/year down to just 180 hours in 2022, courtesy of immediate predictive maintenance alerts.</a:t>
-            </a:r>
-          </a:p>
-        </p:txBody>
-      </p:sp>
-      <p:sp>
-        <p:nvSpPr>
-          <p:cNvPr id="7" name="Rounded Rectangle 6"/>
+              <a:t>Multi-Tier Topological Asset Hierarchy</a:t>
+            </a:r>
+          </a:p>
+          <a:p>
+            <a:pPr>
+              <a:defRPr sz="1000">
+                <a:solidFill>
+                  <a:srgbClr val="F1F5F9"/>
+                </a:solidFill>
+              </a:defRPr>
+            </a:pPr>
+            <a:r>
+              <a:t>Organizes complex plant asset hierarchies, relationships, and electrical connections using an enterprise graph topology engine.</a:t>
+            </a:r>
+          </a:p>
+        </p:txBody>
+      </p:sp>
+      <p:sp>
+        <p:nvSpPr>
+          <p:cNvPr id="9" name="Rounded Rectangle 8"/>
           <p:cNvSpPr/>
           <p:nvPr/>
         </p:nvSpPr>
         <p:spPr>
           <a:xfrm>
-            <a:off x="4379976" y="1645920"/>
-            <a:ext cx="3401568" cy="4389120"/>
+            <a:off x="6227064" y="1691640"/>
+            <a:ext cx="5230368" cy="2194560"/>
           </a:xfrm>
           <a:prstGeom prst="roundRect">
             <a:avLst/>
           </a:prstGeom>
           <a:solidFill>
-            <a:srgbClr val="0F172A"/>
+            <a:srgbClr val="131926"/>
           </a:solidFill>
-          <a:ln>
+          <a:ln w="12700">
             <a:solidFill>
-              <a:srgbClr val="1E293B"/>
+              <a:srgbClr val="28344B"/>
             </a:solidFill>
           </a:ln>
         </p:spPr>
@@ -4421,72 +5724,98 @@
           </a:fontRef>
         </p:style>
         <p:txBody>
-          <a:bodyPr rtlCol="0" anchor="ctr" wrap="square"/>
-          <a:lstStyle/>
-          <a:p>
-            <a:pPr algn="ctr">
+          <a:bodyPr rtlCol="0" anchor="ctr"/>
+          <a:lstStyle/>
+          <a:p>
+            <a:pPr algn="ctr"/>
+          </a:p>
+        </p:txBody>
+      </p:sp>
+      <p:sp>
+        <p:nvSpPr>
+          <p:cNvPr id="10" name="TextBox 9"/>
+          <p:cNvSpPr txBox="1"/>
+          <p:nvPr/>
+        </p:nvSpPr>
+        <p:spPr>
+          <a:xfrm>
+            <a:off x="6455664" y="1874520"/>
+            <a:ext cx="4773168" cy="1828800"/>
+          </a:xfrm>
+          <a:prstGeom prst="rect">
+            <a:avLst/>
+          </a:prstGeom>
+          <a:noFill/>
+        </p:spPr>
+        <p:txBody>
+          <a:bodyPr wrap="square" lIns="0" rIns="0" tIns="0" bIns="0">
+            <a:spAutoFit/>
+          </a:bodyPr>
+          <a:lstStyle/>
+          <a:p>
+            <a:pPr>
+              <a:defRPr sz="850" b="1">
+                <a:solidFill>
+                  <a:srgbClr val="38BDF8"/>
+                </a:solidFill>
+              </a:defRPr>
+            </a:pPr>
+            <a:r>
+              <a:t>PILLAR 02  |  ENGINEERING CAPABILITY</a:t>
+            </a:r>
+          </a:p>
+          <a:p>
+            <a:pPr>
+              <a:spcBef>
+                <a:spcPts val="300"/>
+              </a:spcBef>
               <a:spcAft>
-                <a:spcPts val="800"/>
+                <a:spcPts val="600"/>
               </a:spcAft>
-              <a:defRPr sz="1100" b="1">
-                <a:solidFill>
-                  <a:srgbClr val="F5C842"/>
-                </a:solidFill>
-              </a:defRPr>
-            </a:pPr>
-            <a:r>
-              <a:t>ASSET PROTECTION</a:t>
-            </a:r>
-          </a:p>
-          <a:p>
-            <a:pPr>
-              <a:spcAft>
-                <a:spcPts val="1200"/>
-              </a:spcAft>
-              <a:defRPr sz="1600" b="1">
+              <a:defRPr sz="1300" b="1">
                 <a:solidFill>
                   <a:srgbClr val="FFFFFF"/>
                 </a:solidFill>
               </a:defRPr>
             </a:pPr>
             <a:r>
-              <a:t>Asset Protection (Substation Transformer Load Tracking)</a:t>
-            </a:r>
-          </a:p>
-          <a:p>
-            <a:pPr>
-              <a:defRPr sz="1300">
-                <a:solidFill>
-                  <a:srgbClr val="C8D8F0"/>
-                </a:solidFill>
-              </a:defRPr>
-            </a:pPr>
-            <a:r>
-              <a:t>Continually monitors transformer thermal stresses, phase imbalances, and harmonic distortion to prevent catastrophic insulation failure.</a:t>
-            </a:r>
-          </a:p>
-        </p:txBody>
-      </p:sp>
-      <p:sp>
-        <p:nvSpPr>
-          <p:cNvPr id="8" name="Rounded Rectangle 7"/>
+              <a:t>Continuous Transformer Health Analytics</a:t>
+            </a:r>
+          </a:p>
+          <a:p>
+            <a:pPr>
+              <a:defRPr sz="1000">
+                <a:solidFill>
+                  <a:srgbClr val="F1F5F9"/>
+                </a:solidFill>
+              </a:defRPr>
+            </a:pPr>
+            <a:r>
+              <a:t>Monitors transformer thermal stresses, winding temperature, and oil degradation parameters continuously.</a:t>
+            </a:r>
+          </a:p>
+        </p:txBody>
+      </p:sp>
+      <p:sp>
+        <p:nvSpPr>
+          <p:cNvPr id="11" name="Rounded Rectangle 10"/>
           <p:cNvSpPr/>
           <p:nvPr/>
         </p:nvSpPr>
         <p:spPr>
           <a:xfrm>
-            <a:off x="8028432" y="1645920"/>
-            <a:ext cx="3401568" cy="4389120"/>
+            <a:off x="731520" y="4114800"/>
+            <a:ext cx="5230368" cy="2194560"/>
           </a:xfrm>
           <a:prstGeom prst="roundRect">
             <a:avLst/>
           </a:prstGeom>
           <a:solidFill>
-            <a:srgbClr val="0F172A"/>
+            <a:srgbClr val="131926"/>
           </a:solidFill>
-          <a:ln>
+          <a:ln w="12700">
             <a:solidFill>
-              <a:srgbClr val="1E293B"/>
+              <a:srgbClr val="28344B"/>
             </a:solidFill>
           </a:ln>
         </p:spPr>
@@ -4505,48 +5834,184 @@
           </a:fontRef>
         </p:style>
         <p:txBody>
-          <a:bodyPr rtlCol="0" anchor="ctr" wrap="square"/>
-          <a:lstStyle/>
-          <a:p>
-            <a:pPr algn="ctr">
+          <a:bodyPr rtlCol="0" anchor="ctr"/>
+          <a:lstStyle/>
+          <a:p>
+            <a:pPr algn="ctr"/>
+          </a:p>
+        </p:txBody>
+      </p:sp>
+      <p:sp>
+        <p:nvSpPr>
+          <p:cNvPr id="12" name="TextBox 11"/>
+          <p:cNvSpPr txBox="1"/>
+          <p:nvPr/>
+        </p:nvSpPr>
+        <p:spPr>
+          <a:xfrm>
+            <a:off x="960120" y="4297680"/>
+            <a:ext cx="4773168" cy="1828800"/>
+          </a:xfrm>
+          <a:prstGeom prst="rect">
+            <a:avLst/>
+          </a:prstGeom>
+          <a:noFill/>
+        </p:spPr>
+        <p:txBody>
+          <a:bodyPr wrap="square" lIns="0" rIns="0" tIns="0" bIns="0">
+            <a:spAutoFit/>
+          </a:bodyPr>
+          <a:lstStyle/>
+          <a:p>
+            <a:pPr>
+              <a:defRPr sz="850" b="1">
+                <a:solidFill>
+                  <a:srgbClr val="38BDF8"/>
+                </a:solidFill>
+              </a:defRPr>
+            </a:pPr>
+            <a:r>
+              <a:t>PILLAR 03  |  ENGINEERING CAPABILITY</a:t>
+            </a:r>
+          </a:p>
+          <a:p>
+            <a:pPr>
+              <a:spcBef>
+                <a:spcPts val="300"/>
+              </a:spcBef>
               <a:spcAft>
-                <a:spcPts val="800"/>
+                <a:spcPts val="600"/>
               </a:spcAft>
-              <a:defRPr sz="1100" b="1">
-                <a:solidFill>
-                  <a:srgbClr val="F5C842"/>
-                </a:solidFill>
-              </a:defRPr>
-            </a:pPr>
-            <a:r>
-              <a:t>REDUCED MANPOWER</a:t>
-            </a:r>
-          </a:p>
-          <a:p>
-            <a:pPr>
+              <a:defRPr sz="1300" b="1">
+                <a:solidFill>
+                  <a:srgbClr val="FFFFFF"/>
+                </a:solidFill>
+              </a:defRPr>
+            </a:pPr>
+            <a:r>
+              <a:t>Vibration &amp; Rotating Machine Prognostics</a:t>
+            </a:r>
+          </a:p>
+          <a:p>
+            <a:pPr>
+              <a:defRPr sz="1000">
+                <a:solidFill>
+                  <a:srgbClr val="F1F5F9"/>
+                </a:solidFill>
+              </a:defRPr>
+            </a:pPr>
+            <a:r>
+              <a:t>Tracks vibration signatures, harmonics, and run-hours across chillers, compressors, and high-pressure pumps.</a:t>
+            </a:r>
+          </a:p>
+        </p:txBody>
+      </p:sp>
+      <p:sp>
+        <p:nvSpPr>
+          <p:cNvPr id="13" name="Rounded Rectangle 12"/>
+          <p:cNvSpPr/>
+          <p:nvPr/>
+        </p:nvSpPr>
+        <p:spPr>
+          <a:xfrm>
+            <a:off x="6227064" y="4114800"/>
+            <a:ext cx="5230368" cy="2194560"/>
+          </a:xfrm>
+          <a:prstGeom prst="roundRect">
+            <a:avLst/>
+          </a:prstGeom>
+          <a:solidFill>
+            <a:srgbClr val="131926"/>
+          </a:solidFill>
+          <a:ln w="12700">
+            <a:solidFill>
+              <a:srgbClr val="28344B"/>
+            </a:solidFill>
+          </a:ln>
+        </p:spPr>
+        <p:style>
+          <a:lnRef idx="1">
+            <a:schemeClr val="accent1"/>
+          </a:lnRef>
+          <a:fillRef idx="3">
+            <a:schemeClr val="accent1"/>
+          </a:fillRef>
+          <a:effectRef idx="2">
+            <a:schemeClr val="accent1"/>
+          </a:effectRef>
+          <a:fontRef idx="minor">
+            <a:schemeClr val="lt1"/>
+          </a:fontRef>
+        </p:style>
+        <p:txBody>
+          <a:bodyPr rtlCol="0" anchor="ctr"/>
+          <a:lstStyle/>
+          <a:p>
+            <a:pPr algn="ctr"/>
+          </a:p>
+        </p:txBody>
+      </p:sp>
+      <p:sp>
+        <p:nvSpPr>
+          <p:cNvPr id="14" name="TextBox 13"/>
+          <p:cNvSpPr txBox="1"/>
+          <p:nvPr/>
+        </p:nvSpPr>
+        <p:spPr>
+          <a:xfrm>
+            <a:off x="6455664" y="4297680"/>
+            <a:ext cx="4773168" cy="1828800"/>
+          </a:xfrm>
+          <a:prstGeom prst="rect">
+            <a:avLst/>
+          </a:prstGeom>
+          <a:noFill/>
+        </p:spPr>
+        <p:txBody>
+          <a:bodyPr wrap="square" lIns="0" rIns="0" tIns="0" bIns="0">
+            <a:spAutoFit/>
+          </a:bodyPr>
+          <a:lstStyle/>
+          <a:p>
+            <a:pPr>
+              <a:defRPr sz="850" b="1">
+                <a:solidFill>
+                  <a:srgbClr val="38BDF8"/>
+                </a:solidFill>
+              </a:defRPr>
+            </a:pPr>
+            <a:r>
+              <a:t>PILLAR 04  |  ENGINEERING CAPABILITY</a:t>
+            </a:r>
+          </a:p>
+          <a:p>
+            <a:pPr>
+              <a:spcBef>
+                <a:spcPts val="300"/>
+              </a:spcBef>
               <a:spcAft>
-                <a:spcPts val="1200"/>
+                <a:spcPts val="600"/>
               </a:spcAft>
-              <a:defRPr sz="1600" b="1">
+              <a:defRPr sz="1300" b="1">
                 <a:solidFill>
                   <a:srgbClr val="FFFFFF"/>
                 </a:solidFill>
               </a:defRPr>
             </a:pPr>
             <a:r>
-              <a:t>Reduced Manpower (Automated SAP Work Order Dispatch)</a:t>
-            </a:r>
-          </a:p>
-          <a:p>
-            <a:pPr>
-              <a:defRPr sz="1300">
-                <a:solidFill>
-                  <a:srgbClr val="C8D8F0"/>
-                </a:solidFill>
-              </a:defRPr>
-            </a:pPr>
-            <a:r>
-              <a:t>Autonomously calculates run-hours and triggers maintenance tickets with required spare parts in SAP ERP, eliminating manual inspections.</a:t>
+              <a:t>Native SAP / CMMS Bidirectional Integration</a:t>
+            </a:r>
+          </a:p>
+          <a:p>
+            <a:pPr>
+              <a:defRPr sz="1000">
+                <a:solidFill>
+                  <a:srgbClr val="F1F5F9"/>
+                </a:solidFill>
+              </a:defRPr>
+            </a:pPr>
+            <a:r>
+              <a:t>Automated creation of maintenance tickets and spare parts reservation in enterprise ERP.</a:t>
             </a:r>
           </a:p>
         </p:txBody>
@@ -4584,7 +6049,7 @@
             <a:avLst/>
           </a:prstGeom>
           <a:solidFill>
-            <a:srgbClr val="0A0E1A"/>
+            <a:srgbClr val="0B0F17"/>
           </a:solidFill>
           <a:ln>
             <a:noFill/>
@@ -4620,17 +6085,19 @@
         </p:nvSpPr>
         <p:spPr>
           <a:xfrm>
-            <a:off x="0" y="0"/>
-            <a:ext cx="12191695" cy="54864"/>
+            <a:off x="731520" y="365760"/>
+            <a:ext cx="10728655" cy="18288"/>
           </a:xfrm>
           <a:prstGeom prst="rect">
             <a:avLst/>
           </a:prstGeom>
           <a:solidFill>
-            <a:srgbClr val="00D4FF"/>
+            <a:srgbClr val="38BDF8"/>
           </a:solidFill>
           <a:ln>
-            <a:noFill/>
+            <a:solidFill>
+              <a:srgbClr val="38BDF8"/>
+            </a:solidFill>
           </a:ln>
         </p:spPr>
         <p:style>
@@ -4663,8 +6130,8 @@
         </p:nvSpPr>
         <p:spPr>
           <a:xfrm>
-            <a:off x="731520" y="365760"/>
-            <a:ext cx="10698480" cy="1005840"/>
+            <a:off x="731520" y="438912"/>
+            <a:ext cx="8229600" cy="274320"/>
           </a:xfrm>
           <a:prstGeom prst="rect">
             <a:avLst/>
@@ -4672,35 +6139,20 @@
           <a:noFill/>
         </p:spPr>
         <p:txBody>
-          <a:bodyPr wrap="square">
+          <a:bodyPr wrap="square" lIns="0" rIns="0" tIns="0" bIns="0">
             <a:spAutoFit/>
           </a:bodyPr>
           <a:lstStyle/>
           <a:p>
             <a:pPr>
-              <a:spcAft>
-                <a:spcPts val="400"/>
-              </a:spcAft>
-              <a:defRPr sz="1150" b="1">
-                <a:solidFill>
-                  <a:srgbClr val="00D4FF"/>
-                </a:solidFill>
-              </a:defRPr>
-            </a:pPr>
-            <a:r>
-              <a:t>TERRAASSETS  |  TERRESTRIAL PLATFORM</a:t>
-            </a:r>
-          </a:p>
-          <a:p>
-            <a:pPr>
-              <a:defRPr sz="2500" b="1">
-                <a:solidFill>
-                  <a:srgbClr val="FFFFFF"/>
-                </a:solidFill>
-              </a:defRPr>
-            </a:pPr>
-            <a:r>
-              <a:t>Competitive Advantage: Terrestrial Platform vs. Legacy Systems</a:t>
+              <a:defRPr sz="950" b="1">
+                <a:solidFill>
+                  <a:srgbClr val="38BDF8"/>
+                </a:solidFill>
+              </a:defRPr>
+            </a:pPr>
+            <a:r>
+              <a:t>TERRESTRIAL PLATFORM  |  TERRAASSETS  |  FIELD USE CASES</a:t>
             </a:r>
           </a:p>
         </p:txBody>
@@ -4713,8 +6165,8 @@
         </p:nvSpPr>
         <p:spPr>
           <a:xfrm>
-            <a:off x="731520" y="6446520"/>
-            <a:ext cx="10698480" cy="320040"/>
+            <a:off x="731520" y="731520"/>
+            <a:ext cx="9601200" cy="777240"/>
           </a:xfrm>
           <a:prstGeom prst="rect">
             <a:avLst/>
@@ -4722,44 +6174,83 @@
           <a:noFill/>
         </p:spPr>
         <p:txBody>
-          <a:bodyPr wrap="none">
+          <a:bodyPr wrap="square" lIns="0" rIns="0" tIns="0" bIns="0">
             <a:spAutoFit/>
           </a:bodyPr>
           <a:lstStyle/>
           <a:p>
             <a:pPr>
-              <a:defRPr sz="1000">
+              <a:defRPr sz="1900" b="1">
+                <a:solidFill>
+                  <a:srgbClr val="FFFFFF"/>
+                </a:solidFill>
+              </a:defRPr>
+            </a:pPr>
+            <a:r>
+              <a:t>Operational Use Cases &amp; Field Impact</a:t>
+            </a:r>
+          </a:p>
+          <a:p>
+            <a:pPr>
+              <a:spcBef>
+                <a:spcPts val="300"/>
+              </a:spcBef>
+              <a:defRPr sz="1050">
                 <a:solidFill>
                   <a:srgbClr val="94A3B8"/>
                 </a:solidFill>
               </a:defRPr>
             </a:pPr>
             <a:r>
-              <a:t>TERRESTRIAL PLATFORM  |  TERRAASSETS CATALOGUE  |  CONFIDENTIAL - AUTHORISED SYSTEM INTEGRATORS ONLY</a:t>
-            </a:r>
-          </a:p>
-        </p:txBody>
-      </p:sp>
-      <p:sp>
-        <p:nvSpPr>
-          <p:cNvPr id="6" name="Rectangle 5"/>
+              <a:t>Actual documented use cases across Quality Assurance, Reduced Manpower, Efficiency, and Asset Productivity.</a:t>
+            </a:r>
+          </a:p>
+        </p:txBody>
+      </p:sp>
+      <p:pic>
+        <p:nvPicPr>
+          <p:cNvPr id="6" name="Picture 5" descr="tp_logo_white.png"/>
+          <p:cNvPicPr>
+            <a:picLocks noChangeAspect="1"/>
+          </p:cNvPicPr>
+          <p:nvPr/>
+        </p:nvPicPr>
+        <p:blipFill>
+          <a:blip r:embed="rId2"/>
+          <a:stretch>
+            <a:fillRect/>
+          </a:stretch>
+        </p:blipFill>
+        <p:spPr>
+          <a:xfrm>
+            <a:off x="10469880" y="411480"/>
+            <a:ext cx="987552" cy="384048"/>
+          </a:xfrm>
+          <a:prstGeom prst="rect">
+            <a:avLst/>
+          </a:prstGeom>
+        </p:spPr>
+      </p:pic>
+      <p:sp>
+        <p:nvSpPr>
+          <p:cNvPr id="7" name="Rounded Rectangle 6"/>
           <p:cNvSpPr/>
           <p:nvPr/>
         </p:nvSpPr>
         <p:spPr>
           <a:xfrm>
-            <a:off x="731520" y="1645920"/>
-            <a:ext cx="5212080" cy="502920"/>
-          </a:xfrm>
-          <a:prstGeom prst="rect">
+            <a:off x="731520" y="1691640"/>
+            <a:ext cx="5230368" cy="2194560"/>
+          </a:xfrm>
+          <a:prstGeom prst="roundRect">
             <a:avLst/>
           </a:prstGeom>
           <a:solidFill>
-            <a:srgbClr val="280F14"/>
+            <a:srgbClr val="131926"/>
           </a:solidFill>
-          <a:ln>
+          <a:ln w="12700">
             <a:solidFill>
-              <a:srgbClr val="FF5555"/>
+              <a:srgbClr val="28344B"/>
             </a:solidFill>
           </a:ln>
         </p:spPr>
@@ -4781,39 +6272,95 @@
           <a:bodyPr rtlCol="0" anchor="ctr"/>
           <a:lstStyle/>
           <a:p>
-            <a:pPr algn="ctr">
-              <a:defRPr sz="1250" b="1">
-                <a:solidFill>
-                  <a:srgbClr val="FF5555"/>
-                </a:solidFill>
-              </a:defRPr>
-            </a:pPr>
-            <a:r>
-              <a:t>TRADITIONAL LEGACY SCADA / SILOED SYSTEMS</a:t>
-            </a:r>
-          </a:p>
-        </p:txBody>
-      </p:sp>
-      <p:sp>
-        <p:nvSpPr>
-          <p:cNvPr id="7" name="Rectangle 6"/>
+            <a:pPr algn="ctr"/>
+          </a:p>
+        </p:txBody>
+      </p:sp>
+      <p:sp>
+        <p:nvSpPr>
+          <p:cNvPr id="8" name="TextBox 7"/>
+          <p:cNvSpPr txBox="1"/>
+          <p:nvPr/>
+        </p:nvSpPr>
+        <p:spPr>
+          <a:xfrm>
+            <a:off x="960120" y="1874520"/>
+            <a:ext cx="4773168" cy="1828800"/>
+          </a:xfrm>
+          <a:prstGeom prst="rect">
+            <a:avLst/>
+          </a:prstGeom>
+          <a:noFill/>
+        </p:spPr>
+        <p:txBody>
+          <a:bodyPr wrap="square" lIns="0" rIns="0" tIns="0" bIns="0">
+            <a:spAutoFit/>
+          </a:bodyPr>
+          <a:lstStyle/>
+          <a:p>
+            <a:pPr>
+              <a:defRPr sz="850" b="1">
+                <a:solidFill>
+                  <a:srgbClr val="34D399"/>
+                </a:solidFill>
+              </a:defRPr>
+            </a:pPr>
+            <a:r>
+              <a:t>CASE 01  |  PRODUCTIVITY &amp; DOWNTIME MITIGATION</a:t>
+            </a:r>
+          </a:p>
+          <a:p>
+            <a:pPr>
+              <a:spcBef>
+                <a:spcPts val="300"/>
+              </a:spcBef>
+              <a:spcAft>
+                <a:spcPts val="600"/>
+              </a:spcAft>
+              <a:defRPr sz="1300" b="1">
+                <a:solidFill>
+                  <a:srgbClr val="FFFFFF"/>
+                </a:solidFill>
+              </a:defRPr>
+            </a:pPr>
+            <a:r>
+              <a:t>Productivity &amp; Downtime Mitigation</a:t>
+            </a:r>
+          </a:p>
+          <a:p>
+            <a:pPr>
+              <a:defRPr sz="1000">
+                <a:solidFill>
+                  <a:srgbClr val="F1F5F9"/>
+                </a:solidFill>
+              </a:defRPr>
+            </a:pPr>
+            <a:r>
+              <a:t>Unplanned production downtime suppressed from legacy baseline of 490 hours/year down to just 180 hours in 2022, courtesy of immediate predictive maintenance alerts.</a:t>
+            </a:r>
+          </a:p>
+        </p:txBody>
+      </p:sp>
+      <p:sp>
+        <p:nvSpPr>
+          <p:cNvPr id="9" name="Rounded Rectangle 8"/>
           <p:cNvSpPr/>
           <p:nvPr/>
         </p:nvSpPr>
         <p:spPr>
           <a:xfrm>
-            <a:off x="6217920" y="1645920"/>
-            <a:ext cx="5212080" cy="502920"/>
-          </a:xfrm>
-          <a:prstGeom prst="rect">
+            <a:off x="6227064" y="1691640"/>
+            <a:ext cx="5230368" cy="2194560"/>
+          </a:xfrm>
+          <a:prstGeom prst="roundRect">
             <a:avLst/>
           </a:prstGeom>
           <a:solidFill>
-            <a:srgbClr val="0A2D3C"/>
+            <a:srgbClr val="131926"/>
           </a:solidFill>
-          <a:ln>
+          <a:ln w="12700">
             <a:solidFill>
-              <a:srgbClr val="00D4FF"/>
+              <a:srgbClr val="28344B"/>
             </a:solidFill>
           </a:ln>
         </p:spPr>
@@ -4835,39 +6382,95 @@
           <a:bodyPr rtlCol="0" anchor="ctr"/>
           <a:lstStyle/>
           <a:p>
-            <a:pPr algn="ctr">
-              <a:defRPr sz="1250" b="1">
-                <a:solidFill>
-                  <a:srgbClr val="00D4FF"/>
-                </a:solidFill>
-              </a:defRPr>
-            </a:pPr>
-            <a:r>
-              <a:t>TERRAASSETS TERRESTRIAL PLATFORM ADVANTAGE</a:t>
-            </a:r>
-          </a:p>
-        </p:txBody>
-      </p:sp>
-      <p:sp>
-        <p:nvSpPr>
-          <p:cNvPr id="8" name="Rounded Rectangle 7"/>
+            <a:pPr algn="ctr"/>
+          </a:p>
+        </p:txBody>
+      </p:sp>
+      <p:sp>
+        <p:nvSpPr>
+          <p:cNvPr id="10" name="TextBox 9"/>
+          <p:cNvSpPr txBox="1"/>
+          <p:nvPr/>
+        </p:nvSpPr>
+        <p:spPr>
+          <a:xfrm>
+            <a:off x="6455664" y="1874520"/>
+            <a:ext cx="4773168" cy="1828800"/>
+          </a:xfrm>
+          <a:prstGeom prst="rect">
+            <a:avLst/>
+          </a:prstGeom>
+          <a:noFill/>
+        </p:spPr>
+        <p:txBody>
+          <a:bodyPr wrap="square" lIns="0" rIns="0" tIns="0" bIns="0">
+            <a:spAutoFit/>
+          </a:bodyPr>
+          <a:lstStyle/>
+          <a:p>
+            <a:pPr>
+              <a:defRPr sz="850" b="1">
+                <a:solidFill>
+                  <a:srgbClr val="34D399"/>
+                </a:solidFill>
+              </a:defRPr>
+            </a:pPr>
+            <a:r>
+              <a:t>CASE 02  |  ASSET PROTECTION</a:t>
+            </a:r>
+          </a:p>
+          <a:p>
+            <a:pPr>
+              <a:spcBef>
+                <a:spcPts val="300"/>
+              </a:spcBef>
+              <a:spcAft>
+                <a:spcPts val="600"/>
+              </a:spcAft>
+              <a:defRPr sz="1300" b="1">
+                <a:solidFill>
+                  <a:srgbClr val="FFFFFF"/>
+                </a:solidFill>
+              </a:defRPr>
+            </a:pPr>
+            <a:r>
+              <a:t>Asset Protection (Substation Transformer Load Tracking)</a:t>
+            </a:r>
+          </a:p>
+          <a:p>
+            <a:pPr>
+              <a:defRPr sz="1000">
+                <a:solidFill>
+                  <a:srgbClr val="F1F5F9"/>
+                </a:solidFill>
+              </a:defRPr>
+            </a:pPr>
+            <a:r>
+              <a:t>Continually monitors transformer thermal stresses, phase imbalances, and harmonic distortion to prevent catastrophic insulation failure.</a:t>
+            </a:r>
+          </a:p>
+        </p:txBody>
+      </p:sp>
+      <p:sp>
+        <p:nvSpPr>
+          <p:cNvPr id="11" name="Rounded Rectangle 10"/>
           <p:cNvSpPr/>
           <p:nvPr/>
         </p:nvSpPr>
         <p:spPr>
           <a:xfrm>
-            <a:off x="731520" y="2240280"/>
-            <a:ext cx="5212080" cy="960120"/>
+            <a:off x="731520" y="4114800"/>
+            <a:ext cx="5230368" cy="2194560"/>
           </a:xfrm>
           <a:prstGeom prst="roundRect">
             <a:avLst/>
           </a:prstGeom>
           <a:solidFill>
-            <a:srgbClr val="0F172A"/>
+            <a:srgbClr val="131926"/>
           </a:solidFill>
-          <a:ln>
+          <a:ln w="12700">
             <a:solidFill>
-              <a:srgbClr val="1E293B"/>
+              <a:srgbClr val="28344B"/>
             </a:solidFill>
           </a:ln>
         </p:spPr>
@@ -4886,42 +6489,98 @@
           </a:fontRef>
         </p:style>
         <p:txBody>
-          <a:bodyPr rtlCol="0" anchor="ctr" wrap="square"/>
-          <a:lstStyle/>
-          <a:p>
-            <a:pPr algn="ctr">
-              <a:defRPr sz="1200">
-                <a:solidFill>
-                  <a:srgbClr val="94A3B8"/>
-                </a:solidFill>
-              </a:defRPr>
-            </a:pPr>
-            <a:r>
-              <a:t>Routine maintenance done on fixed calendar dates, replacing healthy components or missing sudden breakdowns.</a:t>
-            </a:r>
-          </a:p>
-        </p:txBody>
-      </p:sp>
-      <p:sp>
-        <p:nvSpPr>
-          <p:cNvPr id="9" name="Rounded Rectangle 8"/>
+          <a:bodyPr rtlCol="0" anchor="ctr"/>
+          <a:lstStyle/>
+          <a:p>
+            <a:pPr algn="ctr"/>
+          </a:p>
+        </p:txBody>
+      </p:sp>
+      <p:sp>
+        <p:nvSpPr>
+          <p:cNvPr id="12" name="TextBox 11"/>
+          <p:cNvSpPr txBox="1"/>
+          <p:nvPr/>
+        </p:nvSpPr>
+        <p:spPr>
+          <a:xfrm>
+            <a:off x="960120" y="4297680"/>
+            <a:ext cx="4773168" cy="1828800"/>
+          </a:xfrm>
+          <a:prstGeom prst="rect">
+            <a:avLst/>
+          </a:prstGeom>
+          <a:noFill/>
+        </p:spPr>
+        <p:txBody>
+          <a:bodyPr wrap="square" lIns="0" rIns="0" tIns="0" bIns="0">
+            <a:spAutoFit/>
+          </a:bodyPr>
+          <a:lstStyle/>
+          <a:p>
+            <a:pPr>
+              <a:defRPr sz="850" b="1">
+                <a:solidFill>
+                  <a:srgbClr val="34D399"/>
+                </a:solidFill>
+              </a:defRPr>
+            </a:pPr>
+            <a:r>
+              <a:t>CASE 03  |  REDUCED MANPOWER</a:t>
+            </a:r>
+          </a:p>
+          <a:p>
+            <a:pPr>
+              <a:spcBef>
+                <a:spcPts val="300"/>
+              </a:spcBef>
+              <a:spcAft>
+                <a:spcPts val="600"/>
+              </a:spcAft>
+              <a:defRPr sz="1300" b="1">
+                <a:solidFill>
+                  <a:srgbClr val="FFFFFF"/>
+                </a:solidFill>
+              </a:defRPr>
+            </a:pPr>
+            <a:r>
+              <a:t>Reduced Manpower (Automated SAP Work Order Dispatch)</a:t>
+            </a:r>
+          </a:p>
+          <a:p>
+            <a:pPr>
+              <a:defRPr sz="1000">
+                <a:solidFill>
+                  <a:srgbClr val="F1F5F9"/>
+                </a:solidFill>
+              </a:defRPr>
+            </a:pPr>
+            <a:r>
+              <a:t>Autonomously calculates run-hours and triggers maintenance tickets with required spare parts in SAP ERP, eliminating manual inspections.</a:t>
+            </a:r>
+          </a:p>
+        </p:txBody>
+      </p:sp>
+      <p:sp>
+        <p:nvSpPr>
+          <p:cNvPr id="13" name="Rounded Rectangle 12"/>
           <p:cNvSpPr/>
           <p:nvPr/>
         </p:nvSpPr>
         <p:spPr>
           <a:xfrm>
-            <a:off x="6217920" y="2240280"/>
-            <a:ext cx="5212080" cy="960120"/>
+            <a:off x="6227064" y="4114800"/>
+            <a:ext cx="5230368" cy="2194560"/>
           </a:xfrm>
           <a:prstGeom prst="roundRect">
             <a:avLst/>
           </a:prstGeom>
           <a:solidFill>
-            <a:srgbClr val="141E37"/>
+            <a:srgbClr val="131926"/>
           </a:solidFill>
-          <a:ln>
+          <a:ln w="12700">
             <a:solidFill>
-              <a:srgbClr val="00D4FF"/>
+              <a:srgbClr val="28344B"/>
             </a:solidFill>
           </a:ln>
         </p:spPr>
@@ -4940,342 +6599,74 @@
           </a:fontRef>
         </p:style>
         <p:txBody>
-          <a:bodyPr rtlCol="0" anchor="ctr" wrap="square"/>
-          <a:lstStyle/>
-          <a:p>
-            <a:pPr algn="ctr">
-              <a:defRPr sz="1250" b="1">
+          <a:bodyPr rtlCol="0" anchor="ctr"/>
+          <a:lstStyle/>
+          <a:p>
+            <a:pPr algn="ctr"/>
+          </a:p>
+        </p:txBody>
+      </p:sp>
+      <p:sp>
+        <p:nvSpPr>
+          <p:cNvPr id="14" name="TextBox 13"/>
+          <p:cNvSpPr txBox="1"/>
+          <p:nvPr/>
+        </p:nvSpPr>
+        <p:spPr>
+          <a:xfrm>
+            <a:off x="6455664" y="4297680"/>
+            <a:ext cx="4773168" cy="1828800"/>
+          </a:xfrm>
+          <a:prstGeom prst="rect">
+            <a:avLst/>
+          </a:prstGeom>
+          <a:noFill/>
+        </p:spPr>
+        <p:txBody>
+          <a:bodyPr wrap="square" lIns="0" rIns="0" tIns="0" bIns="0">
+            <a:spAutoFit/>
+          </a:bodyPr>
+          <a:lstStyle/>
+          <a:p>
+            <a:pPr>
+              <a:defRPr sz="850" b="1">
+                <a:solidFill>
+                  <a:srgbClr val="34D399"/>
+                </a:solidFill>
+              </a:defRPr>
+            </a:pPr>
+            <a:r>
+              <a:t>CASE 04  |  QA &amp; ROTATING MACHINE LONGEVITY</a:t>
+            </a:r>
+          </a:p>
+          <a:p>
+            <a:pPr>
+              <a:spcBef>
+                <a:spcPts val="300"/>
+              </a:spcBef>
+              <a:spcAft>
+                <a:spcPts val="600"/>
+              </a:spcAft>
+              <a:defRPr sz="1300" b="1">
                 <a:solidFill>
                   <a:srgbClr val="FFFFFF"/>
                 </a:solidFill>
               </a:defRPr>
             </a:pPr>
             <a:r>
-              <a:t>Condition-based maintenance driven by continuous multi-modal vibration, thermal, and electrical telemetry.</a:t>
-            </a:r>
-          </a:p>
-        </p:txBody>
-      </p:sp>
-      <p:sp>
-        <p:nvSpPr>
-          <p:cNvPr id="10" name="Rounded Rectangle 9"/>
-          <p:cNvSpPr/>
-          <p:nvPr/>
-        </p:nvSpPr>
-        <p:spPr>
-          <a:xfrm>
-            <a:off x="731520" y="3291840"/>
-            <a:ext cx="5212080" cy="960120"/>
-          </a:xfrm>
-          <a:prstGeom prst="roundRect">
-            <a:avLst/>
-          </a:prstGeom>
-          <a:solidFill>
-            <a:srgbClr val="0F172A"/>
-          </a:solidFill>
-          <a:ln>
-            <a:solidFill>
-              <a:srgbClr val="1E293B"/>
-            </a:solidFill>
-          </a:ln>
-        </p:spPr>
-        <p:style>
-          <a:lnRef idx="1">
-            <a:schemeClr val="accent1"/>
-          </a:lnRef>
-          <a:fillRef idx="3">
-            <a:schemeClr val="accent1"/>
-          </a:fillRef>
-          <a:effectRef idx="2">
-            <a:schemeClr val="accent1"/>
-          </a:effectRef>
-          <a:fontRef idx="minor">
-            <a:schemeClr val="lt1"/>
-          </a:fontRef>
-        </p:style>
-        <p:txBody>
-          <a:bodyPr rtlCol="0" anchor="ctr" wrap="square"/>
-          <a:lstStyle/>
-          <a:p>
-            <a:pPr algn="ctr">
-              <a:defRPr sz="1200">
-                <a:solidFill>
-                  <a:srgbClr val="94A3B8"/>
-                </a:solidFill>
-              </a:defRPr>
-            </a:pPr>
-            <a:r>
-              <a:t>Generic threshold alarms that go off only when bearing raceways or windings have already been destroyed.</a:t>
-            </a:r>
-          </a:p>
-        </p:txBody>
-      </p:sp>
-      <p:sp>
-        <p:nvSpPr>
-          <p:cNvPr id="11" name="Rounded Rectangle 10"/>
-          <p:cNvSpPr/>
-          <p:nvPr/>
-        </p:nvSpPr>
-        <p:spPr>
-          <a:xfrm>
-            <a:off x="6217920" y="3291840"/>
-            <a:ext cx="5212080" cy="960120"/>
-          </a:xfrm>
-          <a:prstGeom prst="roundRect">
-            <a:avLst/>
-          </a:prstGeom>
-          <a:solidFill>
-            <a:srgbClr val="141E37"/>
-          </a:solidFill>
-          <a:ln>
-            <a:solidFill>
-              <a:srgbClr val="00D4FF"/>
-            </a:solidFill>
-          </a:ln>
-        </p:spPr>
-        <p:style>
-          <a:lnRef idx="1">
-            <a:schemeClr val="accent1"/>
-          </a:lnRef>
-          <a:fillRef idx="3">
-            <a:schemeClr val="accent1"/>
-          </a:fillRef>
-          <a:effectRef idx="2">
-            <a:schemeClr val="accent1"/>
-          </a:effectRef>
-          <a:fontRef idx="minor">
-            <a:schemeClr val="lt1"/>
-          </a:fontRef>
-        </p:style>
-        <p:txBody>
-          <a:bodyPr rtlCol="0" anchor="ctr" wrap="square"/>
-          <a:lstStyle/>
-          <a:p>
-            <a:pPr algn="ctr">
-              <a:defRPr sz="1250" b="1">
-                <a:solidFill>
-                  <a:srgbClr val="FFFFFF"/>
-                </a:solidFill>
-              </a:defRPr>
-            </a:pPr>
-            <a:r>
-              <a:t>Prognostic multi-physics models that detect micro-degradations months before failure occurs.</a:t>
-            </a:r>
-          </a:p>
-        </p:txBody>
-      </p:sp>
-      <p:sp>
-        <p:nvSpPr>
-          <p:cNvPr id="12" name="Rounded Rectangle 11"/>
-          <p:cNvSpPr/>
-          <p:nvPr/>
-        </p:nvSpPr>
-        <p:spPr>
-          <a:xfrm>
-            <a:off x="731520" y="4343400"/>
-            <a:ext cx="5212080" cy="960120"/>
-          </a:xfrm>
-          <a:prstGeom prst="roundRect">
-            <a:avLst/>
-          </a:prstGeom>
-          <a:solidFill>
-            <a:srgbClr val="0F172A"/>
-          </a:solidFill>
-          <a:ln>
-            <a:solidFill>
-              <a:srgbClr val="1E293B"/>
-            </a:solidFill>
-          </a:ln>
-        </p:spPr>
-        <p:style>
-          <a:lnRef idx="1">
-            <a:schemeClr val="accent1"/>
-          </a:lnRef>
-          <a:fillRef idx="3">
-            <a:schemeClr val="accent1"/>
-          </a:fillRef>
-          <a:effectRef idx="2">
-            <a:schemeClr val="accent1"/>
-          </a:effectRef>
-          <a:fontRef idx="minor">
-            <a:schemeClr val="lt1"/>
-          </a:fontRef>
-        </p:style>
-        <p:txBody>
-          <a:bodyPr rtlCol="0" anchor="ctr" wrap="square"/>
-          <a:lstStyle/>
-          <a:p>
-            <a:pPr algn="ctr">
-              <a:defRPr sz="1200">
-                <a:solidFill>
-                  <a:srgbClr val="94A3B8"/>
-                </a:solidFill>
-              </a:defRPr>
-            </a:pPr>
-            <a:r>
-              <a:t>Manual creation of work orders and paperwork slowing down critical maintenance responses.</a:t>
-            </a:r>
-          </a:p>
-        </p:txBody>
-      </p:sp>
-      <p:sp>
-        <p:nvSpPr>
-          <p:cNvPr id="13" name="Rounded Rectangle 12"/>
-          <p:cNvSpPr/>
-          <p:nvPr/>
-        </p:nvSpPr>
-        <p:spPr>
-          <a:xfrm>
-            <a:off x="6217920" y="4343400"/>
-            <a:ext cx="5212080" cy="960120"/>
-          </a:xfrm>
-          <a:prstGeom prst="roundRect">
-            <a:avLst/>
-          </a:prstGeom>
-          <a:solidFill>
-            <a:srgbClr val="141E37"/>
-          </a:solidFill>
-          <a:ln>
-            <a:solidFill>
-              <a:srgbClr val="00D4FF"/>
-            </a:solidFill>
-          </a:ln>
-        </p:spPr>
-        <p:style>
-          <a:lnRef idx="1">
-            <a:schemeClr val="accent1"/>
-          </a:lnRef>
-          <a:fillRef idx="3">
-            <a:schemeClr val="accent1"/>
-          </a:fillRef>
-          <a:effectRef idx="2">
-            <a:schemeClr val="accent1"/>
-          </a:effectRef>
-          <a:fontRef idx="minor">
-            <a:schemeClr val="lt1"/>
-          </a:fontRef>
-        </p:style>
-        <p:txBody>
-          <a:bodyPr rtlCol="0" anchor="ctr" wrap="square"/>
-          <a:lstStyle/>
-          <a:p>
-            <a:pPr algn="ctr">
-              <a:defRPr sz="1250" b="1">
-                <a:solidFill>
-                  <a:srgbClr val="FFFFFF"/>
-                </a:solidFill>
-              </a:defRPr>
-            </a:pPr>
-            <a:r>
-              <a:t>Closed-loop automated creation of work orders in SAP/Maximo with recommended toolkits and spare parts.</a:t>
-            </a:r>
-          </a:p>
-        </p:txBody>
-      </p:sp>
-      <p:sp>
-        <p:nvSpPr>
-          <p:cNvPr id="14" name="Rounded Rectangle 13"/>
-          <p:cNvSpPr/>
-          <p:nvPr/>
-        </p:nvSpPr>
-        <p:spPr>
-          <a:xfrm>
-            <a:off x="731520" y="5394960"/>
-            <a:ext cx="5212080" cy="960120"/>
-          </a:xfrm>
-          <a:prstGeom prst="roundRect">
-            <a:avLst/>
-          </a:prstGeom>
-          <a:solidFill>
-            <a:srgbClr val="0F172A"/>
-          </a:solidFill>
-          <a:ln>
-            <a:solidFill>
-              <a:srgbClr val="1E293B"/>
-            </a:solidFill>
-          </a:ln>
-        </p:spPr>
-        <p:style>
-          <a:lnRef idx="1">
-            <a:schemeClr val="accent1"/>
-          </a:lnRef>
-          <a:fillRef idx="3">
-            <a:schemeClr val="accent1"/>
-          </a:fillRef>
-          <a:effectRef idx="2">
-            <a:schemeClr val="accent1"/>
-          </a:effectRef>
-          <a:fontRef idx="minor">
-            <a:schemeClr val="lt1"/>
-          </a:fontRef>
-        </p:style>
-        <p:txBody>
-          <a:bodyPr rtlCol="0" anchor="ctr" wrap="square"/>
-          <a:lstStyle/>
-          <a:p>
-            <a:pPr algn="ctr">
-              <a:defRPr sz="1200">
-                <a:solidFill>
-                  <a:srgbClr val="94A3B8"/>
-                </a:solidFill>
-              </a:defRPr>
-            </a:pPr>
-            <a:r>
-              <a:t>Static high/low threshold alarms trigger only after physical process degradation has occurred.</a:t>
-            </a:r>
-          </a:p>
-        </p:txBody>
-      </p:sp>
-      <p:sp>
-        <p:nvSpPr>
-          <p:cNvPr id="15" name="Rounded Rectangle 14"/>
-          <p:cNvSpPr/>
-          <p:nvPr/>
-        </p:nvSpPr>
-        <p:spPr>
-          <a:xfrm>
-            <a:off x="6217920" y="5394960"/>
-            <a:ext cx="5212080" cy="960120"/>
-          </a:xfrm>
-          <a:prstGeom prst="roundRect">
-            <a:avLst/>
-          </a:prstGeom>
-          <a:solidFill>
-            <a:srgbClr val="141E37"/>
-          </a:solidFill>
-          <a:ln>
-            <a:solidFill>
-              <a:srgbClr val="00D4FF"/>
-            </a:solidFill>
-          </a:ln>
-        </p:spPr>
-        <p:style>
-          <a:lnRef idx="1">
-            <a:schemeClr val="accent1"/>
-          </a:lnRef>
-          <a:fillRef idx="3">
-            <a:schemeClr val="accent1"/>
-          </a:fillRef>
-          <a:effectRef idx="2">
-            <a:schemeClr val="accent1"/>
-          </a:effectRef>
-          <a:fontRef idx="minor">
-            <a:schemeClr val="lt1"/>
-          </a:fontRef>
-        </p:style>
-        <p:txBody>
-          <a:bodyPr rtlCol="0" anchor="ctr" wrap="square"/>
-          <a:lstStyle/>
-          <a:p>
-            <a:pPr algn="ctr">
-              <a:defRPr sz="1250" b="1">
-                <a:solidFill>
-                  <a:srgbClr val="FFFFFF"/>
-                </a:solidFill>
-              </a:defRPr>
-            </a:pPr>
-            <a:r>
-              <a:t>TerraAssets physics-informed models forecast multi-variable trajectories up to 72 hours in advance.</a:t>
+              <a:t>QA &amp; Rotating Machine Longevity</a:t>
+            </a:r>
+          </a:p>
+          <a:p>
+            <a:pPr>
+              <a:defRPr sz="1000">
+                <a:solidFill>
+                  <a:srgbClr val="F1F5F9"/>
+                </a:solidFill>
+              </a:defRPr>
+            </a:pPr>
+            <a:r>
+              <a:t>Detects early bearing flaking and unbalance on critical chillers and compressors months before vibration crosses destructive trip limits.</a:t>
             </a:r>
           </a:p>
         </p:txBody>
@@ -5313,7 +6704,7 @@
             <a:avLst/>
           </a:prstGeom>
           <a:solidFill>
-            <a:srgbClr val="0A0E1A"/>
+            <a:srgbClr val="0B0F17"/>
           </a:solidFill>
           <a:ln>
             <a:noFill/>
@@ -5349,17 +6740,19 @@
         </p:nvSpPr>
         <p:spPr>
           <a:xfrm>
-            <a:off x="0" y="0"/>
-            <a:ext cx="12191695" cy="54864"/>
+            <a:off x="731520" y="365760"/>
+            <a:ext cx="10728655" cy="18288"/>
           </a:xfrm>
           <a:prstGeom prst="rect">
             <a:avLst/>
           </a:prstGeom>
           <a:solidFill>
-            <a:srgbClr val="00D4FF"/>
+            <a:srgbClr val="38BDF8"/>
           </a:solidFill>
           <a:ln>
-            <a:noFill/>
+            <a:solidFill>
+              <a:srgbClr val="38BDF8"/>
+            </a:solidFill>
           </a:ln>
         </p:spPr>
         <p:style>
@@ -5392,8 +6785,8 @@
         </p:nvSpPr>
         <p:spPr>
           <a:xfrm>
-            <a:off x="731520" y="365760"/>
-            <a:ext cx="10698480" cy="1005840"/>
+            <a:off x="731520" y="438912"/>
+            <a:ext cx="8229600" cy="274320"/>
           </a:xfrm>
           <a:prstGeom prst="rect">
             <a:avLst/>
@@ -5401,35 +6794,20 @@
           <a:noFill/>
         </p:spPr>
         <p:txBody>
-          <a:bodyPr wrap="square">
+          <a:bodyPr wrap="square" lIns="0" rIns="0" tIns="0" bIns="0">
             <a:spAutoFit/>
           </a:bodyPr>
           <a:lstStyle/>
           <a:p>
             <a:pPr>
-              <a:spcAft>
-                <a:spcPts val="400"/>
-              </a:spcAft>
-              <a:defRPr sz="1150" b="1">
-                <a:solidFill>
-                  <a:srgbClr val="00D4FF"/>
-                </a:solidFill>
-              </a:defRPr>
-            </a:pPr>
-            <a:r>
-              <a:t>TERRAASSETS  |  TERRESTRIAL PLATFORM</a:t>
-            </a:r>
-          </a:p>
-          <a:p>
-            <a:pPr>
-              <a:defRPr sz="2500" b="1">
-                <a:solidFill>
-                  <a:srgbClr val="FFFFFF"/>
-                </a:solidFill>
-              </a:defRPr>
-            </a:pPr>
-            <a:r>
-              <a:t>End-to-End System Architecture &amp; Real-Time Pipeline</a:t>
+              <a:defRPr sz="950" b="1">
+                <a:solidFill>
+                  <a:srgbClr val="38BDF8"/>
+                </a:solidFill>
+              </a:defRPr>
+            </a:pPr>
+            <a:r>
+              <a:t>TERRESTRIAL PLATFORM  |  TERRAASSETS  |  ARCHITECTURAL CONTRAST</a:t>
             </a:r>
           </a:p>
         </p:txBody>
@@ -5442,8 +6820,8 @@
         </p:nvSpPr>
         <p:spPr>
           <a:xfrm>
-            <a:off x="731520" y="6446520"/>
-            <a:ext cx="10698480" cy="320040"/>
+            <a:off x="731520" y="731520"/>
+            <a:ext cx="9601200" cy="777240"/>
           </a:xfrm>
           <a:prstGeom prst="rect">
             <a:avLst/>
@@ -5451,44 +6829,83 @@
           <a:noFill/>
         </p:spPr>
         <p:txBody>
-          <a:bodyPr wrap="none">
+          <a:bodyPr wrap="square" lIns="0" rIns="0" tIns="0" bIns="0">
             <a:spAutoFit/>
           </a:bodyPr>
           <a:lstStyle/>
           <a:p>
             <a:pPr>
-              <a:defRPr sz="1000">
+              <a:defRPr sz="1900" b="1">
+                <a:solidFill>
+                  <a:srgbClr val="FFFFFF"/>
+                </a:solidFill>
+              </a:defRPr>
+            </a:pPr>
+            <a:r>
+              <a:t>Comparison with Traditional SCADA / Legacy Systems</a:t>
+            </a:r>
+          </a:p>
+          <a:p>
+            <a:pPr>
+              <a:spcBef>
+                <a:spcPts val="300"/>
+              </a:spcBef>
+              <a:defRPr sz="1050">
                 <a:solidFill>
                   <a:srgbClr val="94A3B8"/>
                 </a:solidFill>
               </a:defRPr>
             </a:pPr>
             <a:r>
-              <a:t>TERRESTRIAL PLATFORM  |  TERRAASSETS CATALOGUE  |  CONFIDENTIAL - AUTHORISED SYSTEM INTEGRATORS ONLY</a:t>
-            </a:r>
-          </a:p>
-        </p:txBody>
-      </p:sp>
-      <p:sp>
-        <p:nvSpPr>
-          <p:cNvPr id="6" name="Rounded Rectangle 5"/>
+              <a:t>Point-by-point contrast demonstrating the technological shift from legacy industrial automation to the Terrestrial Platform.</a:t>
+            </a:r>
+          </a:p>
+        </p:txBody>
+      </p:sp>
+      <p:pic>
+        <p:nvPicPr>
+          <p:cNvPr id="6" name="Picture 5" descr="tp_logo_white.png"/>
+          <p:cNvPicPr>
+            <a:picLocks noChangeAspect="1"/>
+          </p:cNvPicPr>
+          <p:nvPr/>
+        </p:nvPicPr>
+        <p:blipFill>
+          <a:blip r:embed="rId2"/>
+          <a:stretch>
+            <a:fillRect/>
+          </a:stretch>
+        </p:blipFill>
+        <p:spPr>
+          <a:xfrm>
+            <a:off x="10469880" y="411480"/>
+            <a:ext cx="987552" cy="384048"/>
+          </a:xfrm>
+          <a:prstGeom prst="rect">
+            <a:avLst/>
+          </a:prstGeom>
+        </p:spPr>
+      </p:pic>
+      <p:sp>
+        <p:nvSpPr>
+          <p:cNvPr id="7" name="Rounded Rectangle 6"/>
           <p:cNvSpPr/>
           <p:nvPr/>
         </p:nvSpPr>
         <p:spPr>
           <a:xfrm>
-            <a:off x="731520" y="1645920"/>
-            <a:ext cx="2523744" cy="4389120"/>
+            <a:off x="731520" y="1691640"/>
+            <a:ext cx="5230368" cy="502920"/>
           </a:xfrm>
           <a:prstGeom prst="roundRect">
             <a:avLst/>
           </a:prstGeom>
           <a:solidFill>
-            <a:srgbClr val="0F172A"/>
+            <a:srgbClr val="1C1216"/>
           </a:solidFill>
-          <a:ln>
+          <a:ln w="12700">
             <a:solidFill>
-              <a:srgbClr val="1E293B"/>
+              <a:srgbClr val="501923"/>
             </a:solidFill>
           </a:ln>
         </p:spPr>
@@ -5507,72 +6924,68 @@
           </a:fontRef>
         </p:style>
         <p:txBody>
-          <a:bodyPr rtlCol="0" anchor="ctr" wrap="square"/>
-          <a:lstStyle/>
-          <a:p>
-            <a:pPr algn="ctr">
-              <a:spcAft>
-                <a:spcPts val="800"/>
-              </a:spcAft>
+          <a:bodyPr rtlCol="0" anchor="ctr"/>
+          <a:lstStyle/>
+          <a:p>
+            <a:pPr algn="ctr"/>
+          </a:p>
+        </p:txBody>
+      </p:sp>
+      <p:sp>
+        <p:nvSpPr>
+          <p:cNvPr id="8" name="TextBox 7"/>
+          <p:cNvSpPr txBox="1"/>
+          <p:nvPr/>
+        </p:nvSpPr>
+        <p:spPr>
+          <a:xfrm>
+            <a:off x="868680" y="1783080"/>
+            <a:ext cx="4937760" cy="320040"/>
+          </a:xfrm>
+          <a:prstGeom prst="rect">
+            <a:avLst/>
+          </a:prstGeom>
+          <a:noFill/>
+        </p:spPr>
+        <p:txBody>
+          <a:bodyPr wrap="none">
+            <a:spAutoFit/>
+          </a:bodyPr>
+          <a:lstStyle/>
+          <a:p>
+            <a:pPr>
               <a:defRPr sz="1100" b="1">
                 <a:solidFill>
-                  <a:srgbClr val="00D4FF"/>
-                </a:solidFill>
-              </a:defRPr>
-            </a:pPr>
-            <a:r>
-              <a:t>LAYER 01</a:t>
-            </a:r>
-          </a:p>
-          <a:p>
-            <a:pPr>
-              <a:spcAft>
-                <a:spcPts val="1200"/>
-              </a:spcAft>
-              <a:defRPr sz="1550" b="1">
-                <a:solidFill>
-                  <a:srgbClr val="FFFFFF"/>
-                </a:solidFill>
-              </a:defRPr>
-            </a:pPr>
-            <a:r>
-              <a:t>Vibration &amp; Condition Ingestion</a:t>
-            </a:r>
-          </a:p>
-          <a:p>
-            <a:pPr>
-              <a:defRPr sz="1250">
-                <a:solidFill>
-                  <a:srgbClr val="C8D8F0"/>
-                </a:solidFill>
-              </a:defRPr>
-            </a:pPr>
-            <a:r>
-              <a:t>High-frequency telemetry acquisition from triaxial accelerometers, eddy current proximity probes, oil condition sensors, and thermography.</a:t>
-            </a:r>
-          </a:p>
-        </p:txBody>
-      </p:sp>
-      <p:sp>
-        <p:nvSpPr>
-          <p:cNvPr id="7" name="Rounded Rectangle 6"/>
+                  <a:srgbClr val="EF4444"/>
+                </a:solidFill>
+              </a:defRPr>
+            </a:pPr>
+            <a:r>
+              <a:t>TRADITIONAL LEGACY SYSTEMS / SILOED SCADA</a:t>
+            </a:r>
+          </a:p>
+        </p:txBody>
+      </p:sp>
+      <p:sp>
+        <p:nvSpPr>
+          <p:cNvPr id="9" name="Rounded Rectangle 8"/>
           <p:cNvSpPr/>
           <p:nvPr/>
         </p:nvSpPr>
         <p:spPr>
           <a:xfrm>
-            <a:off x="3456432" y="1645920"/>
-            <a:ext cx="2523744" cy="4389120"/>
+            <a:off x="6227064" y="1691640"/>
+            <a:ext cx="5230368" cy="502920"/>
           </a:xfrm>
           <a:prstGeom prst="roundRect">
             <a:avLst/>
           </a:prstGeom>
           <a:solidFill>
-            <a:srgbClr val="0F172A"/>
+            <a:srgbClr val="0F1C26"/>
           </a:solidFill>
-          <a:ln>
+          <a:ln w="12700">
             <a:solidFill>
-              <a:srgbClr val="1E293B"/>
+              <a:srgbClr val="194B5F"/>
             </a:solidFill>
           </a:ln>
         </p:spPr>
@@ -5591,72 +7004,68 @@
           </a:fontRef>
         </p:style>
         <p:txBody>
-          <a:bodyPr rtlCol="0" anchor="ctr" wrap="square"/>
-          <a:lstStyle/>
-          <a:p>
-            <a:pPr algn="ctr">
-              <a:spcAft>
-                <a:spcPts val="800"/>
-              </a:spcAft>
+          <a:bodyPr rtlCol="0" anchor="ctr"/>
+          <a:lstStyle/>
+          <a:p>
+            <a:pPr algn="ctr"/>
+          </a:p>
+        </p:txBody>
+      </p:sp>
+      <p:sp>
+        <p:nvSpPr>
+          <p:cNvPr id="10" name="TextBox 9"/>
+          <p:cNvSpPr txBox="1"/>
+          <p:nvPr/>
+        </p:nvSpPr>
+        <p:spPr>
+          <a:xfrm>
+            <a:off x="6364224" y="1783080"/>
+            <a:ext cx="4937760" cy="320040"/>
+          </a:xfrm>
+          <a:prstGeom prst="rect">
+            <a:avLst/>
+          </a:prstGeom>
+          <a:noFill/>
+        </p:spPr>
+        <p:txBody>
+          <a:bodyPr wrap="none">
+            <a:spAutoFit/>
+          </a:bodyPr>
+          <a:lstStyle/>
+          <a:p>
+            <a:pPr>
               <a:defRPr sz="1100" b="1">
                 <a:solidFill>
-                  <a:srgbClr val="00D4FF"/>
-                </a:solidFill>
-              </a:defRPr>
-            </a:pPr>
-            <a:r>
-              <a:t>LAYER 02</a:t>
-            </a:r>
-          </a:p>
-          <a:p>
-            <a:pPr>
-              <a:spcAft>
-                <a:spcPts val="1200"/>
-              </a:spcAft>
-              <a:defRPr sz="1550" b="1">
-                <a:solidFill>
-                  <a:srgbClr val="FFFFFF"/>
-                </a:solidFill>
-              </a:defRPr>
-            </a:pPr>
-            <a:r>
-              <a:t>Spectral Waveform Buffering</a:t>
-            </a:r>
-          </a:p>
-          <a:p>
-            <a:pPr>
-              <a:defRPr sz="1250">
-                <a:solidFill>
-                  <a:srgbClr val="C8D8F0"/>
-                </a:solidFill>
-              </a:defRPr>
-            </a:pPr>
-            <a:r>
-              <a:t>Raw vibration waveform capture, edge FFT spectrum extraction, circular bearing telemetry buffering, and acoustic transient streaming.</a:t>
-            </a:r>
-          </a:p>
-        </p:txBody>
-      </p:sp>
-      <p:sp>
-        <p:nvSpPr>
-          <p:cNvPr id="8" name="Rounded Rectangle 7"/>
+                  <a:srgbClr val="38BDF8"/>
+                </a:solidFill>
+              </a:defRPr>
+            </a:pPr>
+            <a:r>
+              <a:t>TERRAASSETS TERRESTRIAL PLATFORM ADVANTAGE</a:t>
+            </a:r>
+          </a:p>
+        </p:txBody>
+      </p:sp>
+      <p:sp>
+        <p:nvSpPr>
+          <p:cNvPr id="11" name="Rounded Rectangle 10"/>
           <p:cNvSpPr/>
           <p:nvPr/>
         </p:nvSpPr>
         <p:spPr>
           <a:xfrm>
-            <a:off x="6181344" y="1645920"/>
-            <a:ext cx="2523744" cy="4389120"/>
+            <a:off x="731520" y="2286000"/>
+            <a:ext cx="5230368" cy="1298448"/>
           </a:xfrm>
           <a:prstGeom prst="roundRect">
             <a:avLst/>
           </a:prstGeom>
           <a:solidFill>
-            <a:srgbClr val="0F172A"/>
+            <a:srgbClr val="1C1216"/>
           </a:solidFill>
-          <a:ln>
+          <a:ln w="12700">
             <a:solidFill>
-              <a:srgbClr val="1E293B"/>
+              <a:srgbClr val="501923"/>
             </a:solidFill>
           </a:ln>
         </p:spPr>
@@ -5675,72 +7084,68 @@
           </a:fontRef>
         </p:style>
         <p:txBody>
-          <a:bodyPr rtlCol="0" anchor="ctr" wrap="square"/>
-          <a:lstStyle/>
-          <a:p>
-            <a:pPr algn="ctr">
-              <a:spcAft>
-                <a:spcPts val="800"/>
-              </a:spcAft>
-              <a:defRPr sz="1100" b="1">
-                <a:solidFill>
-                  <a:srgbClr val="00D4FF"/>
-                </a:solidFill>
-              </a:defRPr>
-            </a:pPr>
-            <a:r>
-              <a:t>LAYER 03</a:t>
-            </a:r>
-          </a:p>
-          <a:p>
-            <a:pPr>
-              <a:spcAft>
-                <a:spcPts val="1200"/>
-              </a:spcAft>
-              <a:defRPr sz="1550" b="1">
-                <a:solidFill>
-                  <a:srgbClr val="FFFFFF"/>
-                </a:solidFill>
-              </a:defRPr>
-            </a:pPr>
-            <a:r>
-              <a:t>RUL Predictive Engine</a:t>
-            </a:r>
-          </a:p>
-          <a:p>
-            <a:pPr>
-              <a:defRPr sz="1250">
-                <a:solidFill>
-                  <a:srgbClr val="C8D8F0"/>
-                </a:solidFill>
-              </a:defRPr>
-            </a:pPr>
-            <a:r>
-              <a:t>Physics-based bearing degradation models, spectral peak trending (1x/2x/harmonics), rotor unbalance detection, and RUL time-to-failure forecasting.</a:t>
-            </a:r>
-          </a:p>
-        </p:txBody>
-      </p:sp>
-      <p:sp>
-        <p:nvSpPr>
-          <p:cNvPr id="9" name="Rounded Rectangle 8"/>
+          <a:bodyPr rtlCol="0" anchor="ctr"/>
+          <a:lstStyle/>
+          <a:p>
+            <a:pPr algn="ctr"/>
+          </a:p>
+        </p:txBody>
+      </p:sp>
+      <p:sp>
+        <p:nvSpPr>
+          <p:cNvPr id="12" name="TextBox 11"/>
+          <p:cNvSpPr txBox="1"/>
+          <p:nvPr/>
+        </p:nvSpPr>
+        <p:spPr>
+          <a:xfrm>
+            <a:off x="868680" y="2359152"/>
+            <a:ext cx="4956048" cy="1152144"/>
+          </a:xfrm>
+          <a:prstGeom prst="rect">
+            <a:avLst/>
+          </a:prstGeom>
+          <a:noFill/>
+        </p:spPr>
+        <p:txBody>
+          <a:bodyPr wrap="square" lIns="0" rIns="0" tIns="0" bIns="0">
+            <a:spAutoFit/>
+          </a:bodyPr>
+          <a:lstStyle/>
+          <a:p>
+            <a:pPr>
+              <a:defRPr sz="1000">
+                <a:solidFill>
+                  <a:srgbClr val="F1F5F9"/>
+                </a:solidFill>
+              </a:defRPr>
+            </a:pPr>
+            <a:r>
+              <a:t>Routine maintenance done on fixed calendar dates, replacing healthy components or missing sudden breakdowns.</a:t>
+            </a:r>
+          </a:p>
+        </p:txBody>
+      </p:sp>
+      <p:sp>
+        <p:nvSpPr>
+          <p:cNvPr id="13" name="Rounded Rectangle 12"/>
           <p:cNvSpPr/>
           <p:nvPr/>
         </p:nvSpPr>
         <p:spPr>
           <a:xfrm>
-            <a:off x="8906256" y="1645920"/>
-            <a:ext cx="2523744" cy="4389120"/>
+            <a:off x="6227064" y="2286000"/>
+            <a:ext cx="5230368" cy="1298448"/>
           </a:xfrm>
           <a:prstGeom prst="roundRect">
             <a:avLst/>
           </a:prstGeom>
           <a:solidFill>
-            <a:srgbClr val="0F172A"/>
+            <a:srgbClr val="0F1C26"/>
           </a:solidFill>
-          <a:ln>
+          <a:ln w="12700">
             <a:solidFill>
-              <a:srgbClr val="1E293B"/>
+              <a:srgbClr val="194B5F"/>
             </a:solidFill>
           </a:ln>
         </p:spPr>
@@ -5759,48 +7164,364 @@
           </a:fontRef>
         </p:style>
         <p:txBody>
-          <a:bodyPr rtlCol="0" anchor="ctr" wrap="square"/>
-          <a:lstStyle/>
-          <a:p>
-            <a:pPr algn="ctr">
-              <a:spcAft>
-                <a:spcPts val="800"/>
-              </a:spcAft>
-              <a:defRPr sz="1100" b="1">
-                <a:solidFill>
-                  <a:srgbClr val="00D4FF"/>
-                </a:solidFill>
-              </a:defRPr>
-            </a:pPr>
-            <a:r>
-              <a:t>LAYER 04</a:t>
-            </a:r>
-          </a:p>
-          <a:p>
-            <a:pPr>
-              <a:spcAft>
-                <a:spcPts val="1200"/>
-              </a:spcAft>
-              <a:defRPr sz="1550" b="1">
-                <a:solidFill>
-                  <a:srgbClr val="FFFFFF"/>
-                </a:solidFill>
-              </a:defRPr>
-            </a:pPr>
-            <a:r>
-              <a:t>Reliability Dispatch Cockpit</a:t>
-            </a:r>
-          </a:p>
-          <a:p>
-            <a:pPr>
-              <a:defRPr sz="1250">
-                <a:solidFill>
-                  <a:srgbClr val="C8D8F0"/>
-                </a:solidFill>
-              </a:defRPr>
-            </a:pPr>
-            <a:r>
-              <a:t>Automated prescriptive work order generation in SAP PM / IBM Maximo, equipment health gauges, and ANSI/ISA-101 reliability dashboards.</a:t>
+          <a:bodyPr rtlCol="0" anchor="ctr"/>
+          <a:lstStyle/>
+          <a:p>
+            <a:pPr algn="ctr"/>
+          </a:p>
+        </p:txBody>
+      </p:sp>
+      <p:sp>
+        <p:nvSpPr>
+          <p:cNvPr id="14" name="TextBox 13"/>
+          <p:cNvSpPr txBox="1"/>
+          <p:nvPr/>
+        </p:nvSpPr>
+        <p:spPr>
+          <a:xfrm>
+            <a:off x="6364224" y="2359152"/>
+            <a:ext cx="4956048" cy="1152144"/>
+          </a:xfrm>
+          <a:prstGeom prst="rect">
+            <a:avLst/>
+          </a:prstGeom>
+          <a:noFill/>
+        </p:spPr>
+        <p:txBody>
+          <a:bodyPr wrap="square" lIns="0" rIns="0" tIns="0" bIns="0">
+            <a:spAutoFit/>
+          </a:bodyPr>
+          <a:lstStyle/>
+          <a:p>
+            <a:pPr>
+              <a:defRPr sz="1000" b="1">
+                <a:solidFill>
+                  <a:srgbClr val="34D399"/>
+                </a:solidFill>
+              </a:defRPr>
+            </a:pPr>
+            <a:r>
+              <a:t>Condition-based maintenance driven by continuous multi-modal vibration, thermal, and electrical telemetry.</a:t>
+            </a:r>
+          </a:p>
+        </p:txBody>
+      </p:sp>
+      <p:sp>
+        <p:nvSpPr>
+          <p:cNvPr id="15" name="Rounded Rectangle 14"/>
+          <p:cNvSpPr/>
+          <p:nvPr/>
+        </p:nvSpPr>
+        <p:spPr>
+          <a:xfrm>
+            <a:off x="731520" y="3694176"/>
+            <a:ext cx="5230368" cy="1298448"/>
+          </a:xfrm>
+          <a:prstGeom prst="roundRect">
+            <a:avLst/>
+          </a:prstGeom>
+          <a:solidFill>
+            <a:srgbClr val="1C1216"/>
+          </a:solidFill>
+          <a:ln w="12700">
+            <a:solidFill>
+              <a:srgbClr val="501923"/>
+            </a:solidFill>
+          </a:ln>
+        </p:spPr>
+        <p:style>
+          <a:lnRef idx="1">
+            <a:schemeClr val="accent1"/>
+          </a:lnRef>
+          <a:fillRef idx="3">
+            <a:schemeClr val="accent1"/>
+          </a:fillRef>
+          <a:effectRef idx="2">
+            <a:schemeClr val="accent1"/>
+          </a:effectRef>
+          <a:fontRef idx="minor">
+            <a:schemeClr val="lt1"/>
+          </a:fontRef>
+        </p:style>
+        <p:txBody>
+          <a:bodyPr rtlCol="0" anchor="ctr"/>
+          <a:lstStyle/>
+          <a:p>
+            <a:pPr algn="ctr"/>
+          </a:p>
+        </p:txBody>
+      </p:sp>
+      <p:sp>
+        <p:nvSpPr>
+          <p:cNvPr id="16" name="TextBox 15"/>
+          <p:cNvSpPr txBox="1"/>
+          <p:nvPr/>
+        </p:nvSpPr>
+        <p:spPr>
+          <a:xfrm>
+            <a:off x="868680" y="3767328"/>
+            <a:ext cx="4956048" cy="1152144"/>
+          </a:xfrm>
+          <a:prstGeom prst="rect">
+            <a:avLst/>
+          </a:prstGeom>
+          <a:noFill/>
+        </p:spPr>
+        <p:txBody>
+          <a:bodyPr wrap="square" lIns="0" rIns="0" tIns="0" bIns="0">
+            <a:spAutoFit/>
+          </a:bodyPr>
+          <a:lstStyle/>
+          <a:p>
+            <a:pPr>
+              <a:defRPr sz="1000">
+                <a:solidFill>
+                  <a:srgbClr val="F1F5F9"/>
+                </a:solidFill>
+              </a:defRPr>
+            </a:pPr>
+            <a:r>
+              <a:t>Generic threshold alarms that go off only when bearing raceways or windings have already been destroyed.</a:t>
+            </a:r>
+          </a:p>
+        </p:txBody>
+      </p:sp>
+      <p:sp>
+        <p:nvSpPr>
+          <p:cNvPr id="17" name="Rounded Rectangle 16"/>
+          <p:cNvSpPr/>
+          <p:nvPr/>
+        </p:nvSpPr>
+        <p:spPr>
+          <a:xfrm>
+            <a:off x="6227064" y="3694176"/>
+            <a:ext cx="5230368" cy="1298448"/>
+          </a:xfrm>
+          <a:prstGeom prst="roundRect">
+            <a:avLst/>
+          </a:prstGeom>
+          <a:solidFill>
+            <a:srgbClr val="0F1C26"/>
+          </a:solidFill>
+          <a:ln w="12700">
+            <a:solidFill>
+              <a:srgbClr val="194B5F"/>
+            </a:solidFill>
+          </a:ln>
+        </p:spPr>
+        <p:style>
+          <a:lnRef idx="1">
+            <a:schemeClr val="accent1"/>
+          </a:lnRef>
+          <a:fillRef idx="3">
+            <a:schemeClr val="accent1"/>
+          </a:fillRef>
+          <a:effectRef idx="2">
+            <a:schemeClr val="accent1"/>
+          </a:effectRef>
+          <a:fontRef idx="minor">
+            <a:schemeClr val="lt1"/>
+          </a:fontRef>
+        </p:style>
+        <p:txBody>
+          <a:bodyPr rtlCol="0" anchor="ctr"/>
+          <a:lstStyle/>
+          <a:p>
+            <a:pPr algn="ctr"/>
+          </a:p>
+        </p:txBody>
+      </p:sp>
+      <p:sp>
+        <p:nvSpPr>
+          <p:cNvPr id="18" name="TextBox 17"/>
+          <p:cNvSpPr txBox="1"/>
+          <p:nvPr/>
+        </p:nvSpPr>
+        <p:spPr>
+          <a:xfrm>
+            <a:off x="6364224" y="3767328"/>
+            <a:ext cx="4956048" cy="1152144"/>
+          </a:xfrm>
+          <a:prstGeom prst="rect">
+            <a:avLst/>
+          </a:prstGeom>
+          <a:noFill/>
+        </p:spPr>
+        <p:txBody>
+          <a:bodyPr wrap="square" lIns="0" rIns="0" tIns="0" bIns="0">
+            <a:spAutoFit/>
+          </a:bodyPr>
+          <a:lstStyle/>
+          <a:p>
+            <a:pPr>
+              <a:defRPr sz="1000" b="1">
+                <a:solidFill>
+                  <a:srgbClr val="34D399"/>
+                </a:solidFill>
+              </a:defRPr>
+            </a:pPr>
+            <a:r>
+              <a:t>Prognostic multi-physics models that detect micro-degradations months before failure occurs.</a:t>
+            </a:r>
+          </a:p>
+        </p:txBody>
+      </p:sp>
+      <p:sp>
+        <p:nvSpPr>
+          <p:cNvPr id="19" name="Rounded Rectangle 18"/>
+          <p:cNvSpPr/>
+          <p:nvPr/>
+        </p:nvSpPr>
+        <p:spPr>
+          <a:xfrm>
+            <a:off x="731520" y="5102352"/>
+            <a:ext cx="5230368" cy="1298448"/>
+          </a:xfrm>
+          <a:prstGeom prst="roundRect">
+            <a:avLst/>
+          </a:prstGeom>
+          <a:solidFill>
+            <a:srgbClr val="1C1216"/>
+          </a:solidFill>
+          <a:ln w="12700">
+            <a:solidFill>
+              <a:srgbClr val="501923"/>
+            </a:solidFill>
+          </a:ln>
+        </p:spPr>
+        <p:style>
+          <a:lnRef idx="1">
+            <a:schemeClr val="accent1"/>
+          </a:lnRef>
+          <a:fillRef idx="3">
+            <a:schemeClr val="accent1"/>
+          </a:fillRef>
+          <a:effectRef idx="2">
+            <a:schemeClr val="accent1"/>
+          </a:effectRef>
+          <a:fontRef idx="minor">
+            <a:schemeClr val="lt1"/>
+          </a:fontRef>
+        </p:style>
+        <p:txBody>
+          <a:bodyPr rtlCol="0" anchor="ctr"/>
+          <a:lstStyle/>
+          <a:p>
+            <a:pPr algn="ctr"/>
+          </a:p>
+        </p:txBody>
+      </p:sp>
+      <p:sp>
+        <p:nvSpPr>
+          <p:cNvPr id="20" name="TextBox 19"/>
+          <p:cNvSpPr txBox="1"/>
+          <p:nvPr/>
+        </p:nvSpPr>
+        <p:spPr>
+          <a:xfrm>
+            <a:off x="868680" y="5175504"/>
+            <a:ext cx="4956048" cy="1152144"/>
+          </a:xfrm>
+          <a:prstGeom prst="rect">
+            <a:avLst/>
+          </a:prstGeom>
+          <a:noFill/>
+        </p:spPr>
+        <p:txBody>
+          <a:bodyPr wrap="square" lIns="0" rIns="0" tIns="0" bIns="0">
+            <a:spAutoFit/>
+          </a:bodyPr>
+          <a:lstStyle/>
+          <a:p>
+            <a:pPr>
+              <a:defRPr sz="1000">
+                <a:solidFill>
+                  <a:srgbClr val="F1F5F9"/>
+                </a:solidFill>
+              </a:defRPr>
+            </a:pPr>
+            <a:r>
+              <a:t>Manual creation of work orders and paperwork slowing down critical maintenance responses.</a:t>
+            </a:r>
+          </a:p>
+        </p:txBody>
+      </p:sp>
+      <p:sp>
+        <p:nvSpPr>
+          <p:cNvPr id="21" name="Rounded Rectangle 20"/>
+          <p:cNvSpPr/>
+          <p:nvPr/>
+        </p:nvSpPr>
+        <p:spPr>
+          <a:xfrm>
+            <a:off x="6227064" y="5102352"/>
+            <a:ext cx="5230368" cy="1298448"/>
+          </a:xfrm>
+          <a:prstGeom prst="roundRect">
+            <a:avLst/>
+          </a:prstGeom>
+          <a:solidFill>
+            <a:srgbClr val="0F1C26"/>
+          </a:solidFill>
+          <a:ln w="12700">
+            <a:solidFill>
+              <a:srgbClr val="194B5F"/>
+            </a:solidFill>
+          </a:ln>
+        </p:spPr>
+        <p:style>
+          <a:lnRef idx="1">
+            <a:schemeClr val="accent1"/>
+          </a:lnRef>
+          <a:fillRef idx="3">
+            <a:schemeClr val="accent1"/>
+          </a:fillRef>
+          <a:effectRef idx="2">
+            <a:schemeClr val="accent1"/>
+          </a:effectRef>
+          <a:fontRef idx="minor">
+            <a:schemeClr val="lt1"/>
+          </a:fontRef>
+        </p:style>
+        <p:txBody>
+          <a:bodyPr rtlCol="0" anchor="ctr"/>
+          <a:lstStyle/>
+          <a:p>
+            <a:pPr algn="ctr"/>
+          </a:p>
+        </p:txBody>
+      </p:sp>
+      <p:sp>
+        <p:nvSpPr>
+          <p:cNvPr id="22" name="TextBox 21"/>
+          <p:cNvSpPr txBox="1"/>
+          <p:nvPr/>
+        </p:nvSpPr>
+        <p:spPr>
+          <a:xfrm>
+            <a:off x="6364224" y="5175504"/>
+            <a:ext cx="4956048" cy="1152144"/>
+          </a:xfrm>
+          <a:prstGeom prst="rect">
+            <a:avLst/>
+          </a:prstGeom>
+          <a:noFill/>
+        </p:spPr>
+        <p:txBody>
+          <a:bodyPr wrap="square" lIns="0" rIns="0" tIns="0" bIns="0">
+            <a:spAutoFit/>
+          </a:bodyPr>
+          <a:lstStyle/>
+          <a:p>
+            <a:pPr>
+              <a:defRPr sz="1000" b="1">
+                <a:solidFill>
+                  <a:srgbClr val="34D399"/>
+                </a:solidFill>
+              </a:defRPr>
+            </a:pPr>
+            <a:r>
+              <a:t>Closed-loop automated creation of work orders in SAP/Maximo with recommended toolkits and spare parts.</a:t>
             </a:r>
           </a:p>
         </p:txBody>
@@ -5838,7 +7559,7 @@
             <a:avLst/>
           </a:prstGeom>
           <a:solidFill>
-            <a:srgbClr val="0A0E1A"/>
+            <a:srgbClr val="0B0F17"/>
           </a:solidFill>
           <a:ln>
             <a:noFill/>
@@ -5874,17 +7595,19 @@
         </p:nvSpPr>
         <p:spPr>
           <a:xfrm>
-            <a:off x="0" y="0"/>
-            <a:ext cx="12191695" cy="54864"/>
+            <a:off x="731520" y="365760"/>
+            <a:ext cx="10728655" cy="18288"/>
           </a:xfrm>
           <a:prstGeom prst="rect">
             <a:avLst/>
           </a:prstGeom>
           <a:solidFill>
-            <a:srgbClr val="00D4FF"/>
+            <a:srgbClr val="38BDF8"/>
           </a:solidFill>
           <a:ln>
-            <a:noFill/>
+            <a:solidFill>
+              <a:srgbClr val="38BDF8"/>
+            </a:solidFill>
           </a:ln>
         </p:spPr>
         <p:style>
@@ -5917,8 +7640,8 @@
         </p:nvSpPr>
         <p:spPr>
           <a:xfrm>
-            <a:off x="731520" y="365760"/>
-            <a:ext cx="10698480" cy="1005840"/>
+            <a:off x="731520" y="438912"/>
+            <a:ext cx="8229600" cy="274320"/>
           </a:xfrm>
           <a:prstGeom prst="rect">
             <a:avLst/>
@@ -5926,35 +7649,20 @@
           <a:noFill/>
         </p:spPr>
         <p:txBody>
-          <a:bodyPr wrap="square">
+          <a:bodyPr wrap="square" lIns="0" rIns="0" tIns="0" bIns="0">
             <a:spAutoFit/>
           </a:bodyPr>
           <a:lstStyle/>
           <a:p>
             <a:pPr>
-              <a:spcAft>
-                <a:spcPts val="400"/>
-              </a:spcAft>
-              <a:defRPr sz="1150" b="1">
-                <a:solidFill>
-                  <a:srgbClr val="00D4FF"/>
-                </a:solidFill>
-              </a:defRPr>
-            </a:pPr>
-            <a:r>
-              <a:t>TERRAASSETS  |  TERRESTRIAL PLATFORM</a:t>
-            </a:r>
-          </a:p>
-          <a:p>
-            <a:pPr>
-              <a:defRPr sz="2500" b="1">
-                <a:solidFill>
-                  <a:srgbClr val="FFFFFF"/>
-                </a:solidFill>
-              </a:defRPr>
-            </a:pPr>
-            <a:r>
-              <a:t>System Integrator Deployment Playbook &amp; Commercial Enablement</a:t>
+              <a:defRPr sz="950" b="1">
+                <a:solidFill>
+                  <a:srgbClr val="38BDF8"/>
+                </a:solidFill>
+              </a:defRPr>
+            </a:pPr>
+            <a:r>
+              <a:t>TERRESTRIAL PLATFORM  |  TERRAASSETS  |  SYSTEM ARCHITECTURE</a:t>
             </a:r>
           </a:p>
         </p:txBody>
@@ -5967,8 +7675,8 @@
         </p:nvSpPr>
         <p:spPr>
           <a:xfrm>
-            <a:off x="731520" y="6446520"/>
-            <a:ext cx="10698480" cy="320040"/>
+            <a:off x="731520" y="731520"/>
+            <a:ext cx="9601200" cy="777240"/>
           </a:xfrm>
           <a:prstGeom prst="rect">
             <a:avLst/>
@@ -5976,44 +7684,83 @@
           <a:noFill/>
         </p:spPr>
         <p:txBody>
-          <a:bodyPr wrap="none">
+          <a:bodyPr wrap="square" lIns="0" rIns="0" tIns="0" bIns="0">
             <a:spAutoFit/>
           </a:bodyPr>
           <a:lstStyle/>
           <a:p>
             <a:pPr>
-              <a:defRPr sz="1000">
+              <a:defRPr sz="1900" b="1">
+                <a:solidFill>
+                  <a:srgbClr val="FFFFFF"/>
+                </a:solidFill>
+              </a:defRPr>
+            </a:pPr>
+            <a:r>
+              <a:t>End-to-End System Diagram &amp; Data Pipeline</a:t>
+            </a:r>
+          </a:p>
+          <a:p>
+            <a:pPr>
+              <a:spcBef>
+                <a:spcPts val="300"/>
+              </a:spcBef>
+              <a:defRPr sz="1050">
                 <a:solidFill>
                   <a:srgbClr val="94A3B8"/>
                 </a:solidFill>
               </a:defRPr>
             </a:pPr>
             <a:r>
-              <a:t>TERRESTRIAL PLATFORM  |  TERRAASSETS CATALOGUE  |  CONFIDENTIAL - AUTHORISED SYSTEM INTEGRATORS ONLY</a:t>
-            </a:r>
-          </a:p>
-        </p:txBody>
-      </p:sp>
-      <p:sp>
-        <p:nvSpPr>
-          <p:cNvPr id="6" name="Rounded Rectangle 5"/>
+              <a:t>Visual architecture diagram representing field telemetry ingestion, deterministic edge fabric, AI reasoning, and closed-loop actuation.</a:t>
+            </a:r>
+          </a:p>
+        </p:txBody>
+      </p:sp>
+      <p:pic>
+        <p:nvPicPr>
+          <p:cNvPr id="6" name="Picture 5" descr="tp_logo_white.png"/>
+          <p:cNvPicPr>
+            <a:picLocks noChangeAspect="1"/>
+          </p:cNvPicPr>
+          <p:nvPr/>
+        </p:nvPicPr>
+        <p:blipFill>
+          <a:blip r:embed="rId2"/>
+          <a:stretch>
+            <a:fillRect/>
+          </a:stretch>
+        </p:blipFill>
+        <p:spPr>
+          <a:xfrm>
+            <a:off x="10469880" y="411480"/>
+            <a:ext cx="987552" cy="384048"/>
+          </a:xfrm>
+          <a:prstGeom prst="rect">
+            <a:avLst/>
+          </a:prstGeom>
+        </p:spPr>
+      </p:pic>
+      <p:sp>
+        <p:nvSpPr>
+          <p:cNvPr id="7" name="Rounded Rectangle 6"/>
           <p:cNvSpPr/>
           <p:nvPr/>
         </p:nvSpPr>
         <p:spPr>
           <a:xfrm>
-            <a:off x="731520" y="1645920"/>
-            <a:ext cx="3401568" cy="3200400"/>
+            <a:off x="731520" y="1691640"/>
+            <a:ext cx="2514600" cy="3611880"/>
           </a:xfrm>
           <a:prstGeom prst="roundRect">
             <a:avLst/>
           </a:prstGeom>
           <a:solidFill>
-            <a:srgbClr val="0F172A"/>
+            <a:srgbClr val="131926"/>
           </a:solidFill>
-          <a:ln>
+          <a:ln w="12700">
             <a:solidFill>
-              <a:srgbClr val="1E293B"/>
+              <a:srgbClr val="38BDF8"/>
             </a:solidFill>
           </a:ln>
         </p:spPr>
@@ -6032,72 +7779,139 @@
           </a:fontRef>
         </p:style>
         <p:txBody>
-          <a:bodyPr rtlCol="0" anchor="ctr" wrap="square"/>
-          <a:lstStyle/>
-          <a:p>
-            <a:pPr algn="ctr">
+          <a:bodyPr rtlCol="0" anchor="ctr"/>
+          <a:lstStyle/>
+          <a:p>
+            <a:pPr algn="ctr"/>
+          </a:p>
+        </p:txBody>
+      </p:sp>
+      <p:sp>
+        <p:nvSpPr>
+          <p:cNvPr id="8" name="TextBox 7"/>
+          <p:cNvSpPr txBox="1"/>
+          <p:nvPr/>
+        </p:nvSpPr>
+        <p:spPr>
+          <a:xfrm>
+            <a:off x="896112" y="1856232"/>
+            <a:ext cx="2185416" cy="3282696"/>
+          </a:xfrm>
+          <a:prstGeom prst="rect">
+            <a:avLst/>
+          </a:prstGeom>
+          <a:noFill/>
+        </p:spPr>
+        <p:txBody>
+          <a:bodyPr wrap="square" lIns="0" rIns="0" tIns="0" bIns="0">
+            <a:spAutoFit/>
+          </a:bodyPr>
+          <a:lstStyle/>
+          <a:p>
+            <a:pPr>
+              <a:defRPr sz="850" b="1">
+                <a:solidFill>
+                  <a:srgbClr val="38BDF8"/>
+                </a:solidFill>
+              </a:defRPr>
+            </a:pPr>
+            <a:r>
+              <a:t>LAYER 01</a:t>
+            </a:r>
+          </a:p>
+          <a:p>
+            <a:pPr>
+              <a:spcBef>
+                <a:spcPts val="300"/>
+              </a:spcBef>
+              <a:spcAft>
+                <a:spcPts val="600"/>
+              </a:spcAft>
+              <a:defRPr sz="1200" b="1">
+                <a:solidFill>
+                  <a:srgbClr val="FFFFFF"/>
+                </a:solidFill>
+              </a:defRPr>
+            </a:pPr>
+            <a:r>
+              <a:t>Vibration &amp; Condition Ingestion</a:t>
+            </a:r>
+          </a:p>
+          <a:p>
+            <a:pPr>
               <a:spcAft>
                 <a:spcPts val="800"/>
               </a:spcAft>
-              <a:defRPr sz="1100" b="1">
-                <a:solidFill>
-                  <a:srgbClr val="F5C842"/>
-                </a:solidFill>
-              </a:defRPr>
-            </a:pPr>
-            <a:r>
-              <a:t>PHASE 01 | CONNECTIVITY &amp; AUDIT</a:t>
-            </a:r>
-          </a:p>
-          <a:p>
-            <a:pPr>
-              <a:spcAft>
-                <a:spcPts val="1000"/>
-              </a:spcAft>
-              <a:defRPr sz="1600" b="1">
-                <a:solidFill>
-                  <a:srgbClr val="FFFFFF"/>
-                </a:solidFill>
-              </a:defRPr>
-            </a:pPr>
-            <a:r>
-              <a:t>Zero Rip-and-Replace Onboarding</a:t>
-            </a:r>
-          </a:p>
-          <a:p>
-            <a:pPr>
-              <a:defRPr sz="1250">
-                <a:solidFill>
-                  <a:srgbClr val="C8D8F0"/>
-                </a:solidFill>
-              </a:defRPr>
-            </a:pPr>
-            <a:r>
-              <a:t>Deploy edge container onto existing industrial PC or VM. Connect to plant DCS/PLCs via ISO 10816 Vibration. Ingest and normalize all telemetry in under 48 hours without halting production.</a:t>
-            </a:r>
-          </a:p>
-        </p:txBody>
-      </p:sp>
-      <p:sp>
-        <p:nvSpPr>
-          <p:cNvPr id="7" name="Rounded Rectangle 6"/>
+              <a:defRPr sz="900">
+                <a:solidFill>
+                  <a:srgbClr val="F1F5F9"/>
+                </a:solidFill>
+              </a:defRPr>
+            </a:pPr>
+            <a:r>
+              <a:t>High-frequency telemetry acquisition from triaxial accelerometers, eddy current proximity probes, oil condition sensors, and thermography.</a:t>
+            </a:r>
+          </a:p>
+          <a:p>
+            <a:pPr>
+              <a:spcBef>
+                <a:spcPts val="400"/>
+              </a:spcBef>
+              <a:defRPr sz="800" b="1">
+                <a:solidFill>
+                  <a:srgbClr val="94A3B8"/>
+                </a:solidFill>
+              </a:defRPr>
+            </a:pPr>
+            <a:r>
+              <a:t>PROTOCOLS &amp; STANDARDS:</a:t>
+            </a:r>
+          </a:p>
+          <a:p>
+            <a:pPr>
+              <a:spcBef>
+                <a:spcPts val="200"/>
+              </a:spcBef>
+              <a:defRPr sz="850">
+                <a:solidFill>
+                  <a:srgbClr val="34D399"/>
+                </a:solidFill>
+              </a:defRPr>
+            </a:pPr>
+            <a:r>
+              <a:t> • ISO 10816 Vibration</a:t>
+            </a:r>
+            <a:br/>
+            <a:r>
+              <a:t> • High-Frequency IEPE</a:t>
+            </a:r>
+            <a:br/>
+            <a:r>
+              <a:t> • OPC UA Part 100</a:t>
+            </a:r>
+          </a:p>
+        </p:txBody>
+      </p:sp>
+      <p:sp>
+        <p:nvSpPr>
+          <p:cNvPr id="9" name="Rounded Rectangle 8"/>
           <p:cNvSpPr/>
           <p:nvPr/>
         </p:nvSpPr>
         <p:spPr>
           <a:xfrm>
-            <a:off x="4379976" y="1645920"/>
-            <a:ext cx="3401568" cy="3200400"/>
+            <a:off x="3465576" y="1691640"/>
+            <a:ext cx="2514600" cy="3611880"/>
           </a:xfrm>
           <a:prstGeom prst="roundRect">
             <a:avLst/>
           </a:prstGeom>
           <a:solidFill>
-            <a:srgbClr val="0F172A"/>
+            <a:srgbClr val="131926"/>
           </a:solidFill>
-          <a:ln>
+          <a:ln w="12700">
             <a:solidFill>
-              <a:srgbClr val="1E293B"/>
+              <a:srgbClr val="38BDF8"/>
             </a:solidFill>
           </a:ln>
         </p:spPr>
@@ -6116,72 +7930,139 @@
           </a:fontRef>
         </p:style>
         <p:txBody>
-          <a:bodyPr rtlCol="0" anchor="ctr" wrap="square"/>
-          <a:lstStyle/>
-          <a:p>
-            <a:pPr algn="ctr">
+          <a:bodyPr rtlCol="0" anchor="ctr"/>
+          <a:lstStyle/>
+          <a:p>
+            <a:pPr algn="ctr"/>
+          </a:p>
+        </p:txBody>
+      </p:sp>
+      <p:sp>
+        <p:nvSpPr>
+          <p:cNvPr id="10" name="TextBox 9"/>
+          <p:cNvSpPr txBox="1"/>
+          <p:nvPr/>
+        </p:nvSpPr>
+        <p:spPr>
+          <a:xfrm>
+            <a:off x="3630168" y="1856232"/>
+            <a:ext cx="2185416" cy="3282696"/>
+          </a:xfrm>
+          <a:prstGeom prst="rect">
+            <a:avLst/>
+          </a:prstGeom>
+          <a:noFill/>
+        </p:spPr>
+        <p:txBody>
+          <a:bodyPr wrap="square" lIns="0" rIns="0" tIns="0" bIns="0">
+            <a:spAutoFit/>
+          </a:bodyPr>
+          <a:lstStyle/>
+          <a:p>
+            <a:pPr>
+              <a:defRPr sz="850" b="1">
+                <a:solidFill>
+                  <a:srgbClr val="38BDF8"/>
+                </a:solidFill>
+              </a:defRPr>
+            </a:pPr>
+            <a:r>
+              <a:t>LAYER 02</a:t>
+            </a:r>
+          </a:p>
+          <a:p>
+            <a:pPr>
+              <a:spcBef>
+                <a:spcPts val="300"/>
+              </a:spcBef>
+              <a:spcAft>
+                <a:spcPts val="600"/>
+              </a:spcAft>
+              <a:defRPr sz="1200" b="1">
+                <a:solidFill>
+                  <a:srgbClr val="FFFFFF"/>
+                </a:solidFill>
+              </a:defRPr>
+            </a:pPr>
+            <a:r>
+              <a:t>Spectral Waveform Buffering</a:t>
+            </a:r>
+          </a:p>
+          <a:p>
+            <a:pPr>
               <a:spcAft>
                 <a:spcPts val="800"/>
               </a:spcAft>
-              <a:defRPr sz="1100" b="1">
-                <a:solidFill>
-                  <a:srgbClr val="F5C842"/>
-                </a:solidFill>
-              </a:defRPr>
-            </a:pPr>
-            <a:r>
-              <a:t>PHASE 02 | TWIN CALIBRATION</a:t>
-            </a:r>
-          </a:p>
-          <a:p>
-            <a:pPr>
-              <a:spcAft>
-                <a:spcPts val="1000"/>
-              </a:spcAft>
-              <a:defRPr sz="1600" b="1">
-                <a:solidFill>
-                  <a:srgbClr val="FFFFFF"/>
-                </a:solidFill>
-              </a:defRPr>
-            </a:pPr>
-            <a:r>
-              <a:t>Physics-Model Synchronization</a:t>
-            </a:r>
-          </a:p>
-          <a:p>
-            <a:pPr>
-              <a:defRPr sz="1250">
-                <a:solidFill>
-                  <a:srgbClr val="C8D8F0"/>
-                </a:solidFill>
-              </a:defRPr>
-            </a:pPr>
-            <a:r>
-              <a:t>Feed historical historian data into TerraAssets models. Automatically build directed causal relationship graphs, calibrate thermodynamics/kinematics, and train edge neural operators.</a:t>
-            </a:r>
-          </a:p>
-        </p:txBody>
-      </p:sp>
-      <p:sp>
-        <p:nvSpPr>
-          <p:cNvPr id="8" name="Rounded Rectangle 7"/>
+              <a:defRPr sz="900">
+                <a:solidFill>
+                  <a:srgbClr val="F1F5F9"/>
+                </a:solidFill>
+              </a:defRPr>
+            </a:pPr>
+            <a:r>
+              <a:t>Raw vibration waveform capture, edge FFT spectrum extraction, circular bearing telemetry buffering, and acoustic transient streaming.</a:t>
+            </a:r>
+          </a:p>
+          <a:p>
+            <a:pPr>
+              <a:spcBef>
+                <a:spcPts val="400"/>
+              </a:spcBef>
+              <a:defRPr sz="800" b="1">
+                <a:solidFill>
+                  <a:srgbClr val="94A3B8"/>
+                </a:solidFill>
+              </a:defRPr>
+            </a:pPr>
+            <a:r>
+              <a:t>PROTOCOLS &amp; STANDARDS:</a:t>
+            </a:r>
+          </a:p>
+          <a:p>
+            <a:pPr>
+              <a:spcBef>
+                <a:spcPts val="200"/>
+              </a:spcBef>
+              <a:defRPr sz="850">
+                <a:solidFill>
+                  <a:srgbClr val="34D399"/>
+                </a:solidFill>
+              </a:defRPr>
+            </a:pPr>
+            <a:r>
+              <a:t> • Vibration FFT Stream</a:t>
+            </a:r>
+            <a:br/>
+            <a:r>
+              <a:t> • Transient Waveform Bus</a:t>
+            </a:r>
+            <a:br/>
+            <a:r>
+              <a:t> • Edge Spectral Engine</a:t>
+            </a:r>
+          </a:p>
+        </p:txBody>
+      </p:sp>
+      <p:sp>
+        <p:nvSpPr>
+          <p:cNvPr id="11" name="Rounded Rectangle 10"/>
           <p:cNvSpPr/>
           <p:nvPr/>
         </p:nvSpPr>
         <p:spPr>
           <a:xfrm>
-            <a:off x="8028432" y="1645920"/>
-            <a:ext cx="3401568" cy="3200400"/>
+            <a:off x="6199632" y="1691640"/>
+            <a:ext cx="2514600" cy="3611880"/>
           </a:xfrm>
           <a:prstGeom prst="roundRect">
             <a:avLst/>
           </a:prstGeom>
           <a:solidFill>
-            <a:srgbClr val="0F172A"/>
+            <a:srgbClr val="131926"/>
           </a:solidFill>
-          <a:ln>
+          <a:ln w="12700">
             <a:solidFill>
-              <a:srgbClr val="1E293B"/>
+              <a:srgbClr val="38BDF8"/>
             </a:solidFill>
           </a:ln>
         </p:spPr>
@@ -6200,72 +8081,139 @@
           </a:fontRef>
         </p:style>
         <p:txBody>
-          <a:bodyPr rtlCol="0" anchor="ctr" wrap="square"/>
-          <a:lstStyle/>
-          <a:p>
-            <a:pPr algn="ctr">
+          <a:bodyPr rtlCol="0" anchor="ctr"/>
+          <a:lstStyle/>
+          <a:p>
+            <a:pPr algn="ctr"/>
+          </a:p>
+        </p:txBody>
+      </p:sp>
+      <p:sp>
+        <p:nvSpPr>
+          <p:cNvPr id="12" name="TextBox 11"/>
+          <p:cNvSpPr txBox="1"/>
+          <p:nvPr/>
+        </p:nvSpPr>
+        <p:spPr>
+          <a:xfrm>
+            <a:off x="6364224" y="1856232"/>
+            <a:ext cx="2185416" cy="3282696"/>
+          </a:xfrm>
+          <a:prstGeom prst="rect">
+            <a:avLst/>
+          </a:prstGeom>
+          <a:noFill/>
+        </p:spPr>
+        <p:txBody>
+          <a:bodyPr wrap="square" lIns="0" rIns="0" tIns="0" bIns="0">
+            <a:spAutoFit/>
+          </a:bodyPr>
+          <a:lstStyle/>
+          <a:p>
+            <a:pPr>
+              <a:defRPr sz="850" b="1">
+                <a:solidFill>
+                  <a:srgbClr val="38BDF8"/>
+                </a:solidFill>
+              </a:defRPr>
+            </a:pPr>
+            <a:r>
+              <a:t>LAYER 03</a:t>
+            </a:r>
+          </a:p>
+          <a:p>
+            <a:pPr>
+              <a:spcBef>
+                <a:spcPts val="300"/>
+              </a:spcBef>
+              <a:spcAft>
+                <a:spcPts val="600"/>
+              </a:spcAft>
+              <a:defRPr sz="1200" b="1">
+                <a:solidFill>
+                  <a:srgbClr val="FFFFFF"/>
+                </a:solidFill>
+              </a:defRPr>
+            </a:pPr>
+            <a:r>
+              <a:t>RUL Predictive Engine</a:t>
+            </a:r>
+          </a:p>
+          <a:p>
+            <a:pPr>
               <a:spcAft>
                 <a:spcPts val="800"/>
               </a:spcAft>
-              <a:defRPr sz="1100" b="1">
-                <a:solidFill>
-                  <a:srgbClr val="F5C842"/>
-                </a:solidFill>
-              </a:defRPr>
-            </a:pPr>
-            <a:r>
-              <a:t>PHASE 03 | AUTONOMOUS GO-LIVE</a:t>
-            </a:r>
-          </a:p>
-          <a:p>
-            <a:pPr>
-              <a:spcAft>
-                <a:spcPts val="1000"/>
-              </a:spcAft>
-              <a:defRPr sz="1600" b="1">
-                <a:solidFill>
-                  <a:srgbClr val="FFFFFF"/>
-                </a:solidFill>
-              </a:defRPr>
-            </a:pPr>
-            <a:r>
-              <a:t>Closed-Loop Setpoint Actuation</a:t>
-            </a:r>
-          </a:p>
-          <a:p>
-            <a:pPr>
-              <a:defRPr sz="1250">
-                <a:solidFill>
-                  <a:srgbClr val="C8D8F0"/>
-                </a:solidFill>
-              </a:defRPr>
-            </a:pPr>
-            <a:r>
-              <a:t>Transition from advisory warnings to sub-25ms supervisory actuation. Sync alarm suppressions with plant operators and link work orders into SAP/ERP for verifiable recurring ROI.</a:t>
-            </a:r>
-          </a:p>
-        </p:txBody>
-      </p:sp>
-      <p:sp>
-        <p:nvSpPr>
-          <p:cNvPr id="9" name="Rounded Rectangle 8"/>
+              <a:defRPr sz="900">
+                <a:solidFill>
+                  <a:srgbClr val="F1F5F9"/>
+                </a:solidFill>
+              </a:defRPr>
+            </a:pPr>
+            <a:r>
+              <a:t>Physics-based bearing degradation models, spectral peak trending (1x/2x/harmonics), rotor unbalance detection, and RUL time-to-failure forecasting.</a:t>
+            </a:r>
+          </a:p>
+          <a:p>
+            <a:pPr>
+              <a:spcBef>
+                <a:spcPts val="400"/>
+              </a:spcBef>
+              <a:defRPr sz="800" b="1">
+                <a:solidFill>
+                  <a:srgbClr val="94A3B8"/>
+                </a:solidFill>
+              </a:defRPr>
+            </a:pPr>
+            <a:r>
+              <a:t>PROTOCOLS &amp; STANDARDS:</a:t>
+            </a:r>
+          </a:p>
+          <a:p>
+            <a:pPr>
+              <a:spcBef>
+                <a:spcPts val="200"/>
+              </a:spcBef>
+              <a:defRPr sz="850">
+                <a:solidFill>
+                  <a:srgbClr val="34D399"/>
+                </a:solidFill>
+              </a:defRPr>
+            </a:pPr>
+            <a:r>
+              <a:t> • RUL Prognostics AI</a:t>
+            </a:r>
+            <a:br/>
+            <a:r>
+              <a:t> • Bearing Fault Models</a:t>
+            </a:r>
+            <a:br/>
+            <a:r>
+              <a:t> • Spectral Trend AI</a:t>
+            </a:r>
+          </a:p>
+        </p:txBody>
+      </p:sp>
+      <p:sp>
+        <p:nvSpPr>
+          <p:cNvPr id="13" name="Rounded Rectangle 12"/>
           <p:cNvSpPr/>
           <p:nvPr/>
         </p:nvSpPr>
         <p:spPr>
           <a:xfrm>
-            <a:off x="731520" y="5029200"/>
-            <a:ext cx="10698480" cy="1188720"/>
+            <a:off x="8933688" y="1691640"/>
+            <a:ext cx="2514600" cy="3611880"/>
           </a:xfrm>
           <a:prstGeom prst="roundRect">
             <a:avLst/>
           </a:prstGeom>
           <a:solidFill>
-            <a:srgbClr val="0C1C34"/>
+            <a:srgbClr val="131926"/>
           </a:solidFill>
-          <a:ln>
+          <a:ln w="12700">
             <a:solidFill>
-              <a:srgbClr val="00D4FF"/>
+              <a:srgbClr val="38BDF8"/>
             </a:solidFill>
           </a:ln>
         </p:spPr>
@@ -6284,16 +8232,830 @@
           </a:fontRef>
         </p:style>
         <p:txBody>
-          <a:bodyPr rtlCol="0" anchor="ctr" wrap="square"/>
-          <a:lstStyle/>
-          <a:p>
-            <a:pPr algn="ctr">
+          <a:bodyPr rtlCol="0" anchor="ctr"/>
+          <a:lstStyle/>
+          <a:p>
+            <a:pPr algn="ctr"/>
+          </a:p>
+        </p:txBody>
+      </p:sp>
+      <p:sp>
+        <p:nvSpPr>
+          <p:cNvPr id="14" name="TextBox 13"/>
+          <p:cNvSpPr txBox="1"/>
+          <p:nvPr/>
+        </p:nvSpPr>
+        <p:spPr>
+          <a:xfrm>
+            <a:off x="9098280" y="1856232"/>
+            <a:ext cx="2185416" cy="3282696"/>
+          </a:xfrm>
+          <a:prstGeom prst="rect">
+            <a:avLst/>
+          </a:prstGeom>
+          <a:noFill/>
+        </p:spPr>
+        <p:txBody>
+          <a:bodyPr wrap="square" lIns="0" rIns="0" tIns="0" bIns="0">
+            <a:spAutoFit/>
+          </a:bodyPr>
+          <a:lstStyle/>
+          <a:p>
+            <a:pPr>
+              <a:defRPr sz="850" b="1">
+                <a:solidFill>
+                  <a:srgbClr val="38BDF8"/>
+                </a:solidFill>
+              </a:defRPr>
+            </a:pPr>
+            <a:r>
+              <a:t>LAYER 04</a:t>
+            </a:r>
+          </a:p>
+          <a:p>
+            <a:pPr>
+              <a:spcBef>
+                <a:spcPts val="300"/>
+              </a:spcBef>
               <a:spcAft>
+                <a:spcPts val="600"/>
+              </a:spcAft>
+              <a:defRPr sz="1200" b="1">
+                <a:solidFill>
+                  <a:srgbClr val="FFFFFF"/>
+                </a:solidFill>
+              </a:defRPr>
+            </a:pPr>
+            <a:r>
+              <a:t>Reliability Dispatch Cockpit</a:t>
+            </a:r>
+          </a:p>
+          <a:p>
+            <a:pPr>
+              <a:spcAft>
+                <a:spcPts val="800"/>
+              </a:spcAft>
+              <a:defRPr sz="900">
+                <a:solidFill>
+                  <a:srgbClr val="F1F5F9"/>
+                </a:solidFill>
+              </a:defRPr>
+            </a:pPr>
+            <a:r>
+              <a:t>Automated prescriptive work order generation in SAP PM / IBM Maximo, equipment health gauges, and ANSI/ISA-101 reliability dashboards.</a:t>
+            </a:r>
+          </a:p>
+          <a:p>
+            <a:pPr>
+              <a:spcBef>
                 <a:spcPts val="400"/>
+              </a:spcBef>
+              <a:defRPr sz="800" b="1">
+                <a:solidFill>
+                  <a:srgbClr val="94A3B8"/>
+                </a:solidFill>
+              </a:defRPr>
+            </a:pPr>
+            <a:r>
+              <a:t>PROTOCOLS &amp; STANDARDS:</a:t>
+            </a:r>
+          </a:p>
+          <a:p>
+            <a:pPr>
+              <a:spcBef>
+                <a:spcPts val="200"/>
+              </a:spcBef>
+              <a:defRPr sz="850">
+                <a:solidFill>
+                  <a:srgbClr val="34D399"/>
+                </a:solidFill>
+              </a:defRPr>
+            </a:pPr>
+            <a:r>
+              <a:t> • SAP PM / Maximo</a:t>
+            </a:r>
+            <a:br/>
+            <a:r>
+              <a:t> • Prescriptive Orders</a:t>
+            </a:r>
+            <a:br/>
+            <a:r>
+              <a:t> • ISA-101 APM Cockpit</a:t>
+            </a:r>
+          </a:p>
+        </p:txBody>
+      </p:sp>
+      <p:sp>
+        <p:nvSpPr>
+          <p:cNvPr id="15" name="Rounded Rectangle 14"/>
+          <p:cNvSpPr/>
+          <p:nvPr/>
+        </p:nvSpPr>
+        <p:spPr>
+          <a:xfrm>
+            <a:off x="731520" y="5486400"/>
+            <a:ext cx="10728655" cy="868680"/>
+          </a:xfrm>
+          <a:prstGeom prst="roundRect">
+            <a:avLst/>
+          </a:prstGeom>
+          <a:solidFill>
+            <a:srgbClr val="131926"/>
+          </a:solidFill>
+          <a:ln w="12700">
+            <a:solidFill>
+              <a:srgbClr val="38BDF8"/>
+            </a:solidFill>
+          </a:ln>
+        </p:spPr>
+        <p:style>
+          <a:lnRef idx="1">
+            <a:schemeClr val="accent1"/>
+          </a:lnRef>
+          <a:fillRef idx="3">
+            <a:schemeClr val="accent1"/>
+          </a:fillRef>
+          <a:effectRef idx="2">
+            <a:schemeClr val="accent1"/>
+          </a:effectRef>
+          <a:fontRef idx="minor">
+            <a:schemeClr val="lt1"/>
+          </a:fontRef>
+        </p:style>
+        <p:txBody>
+          <a:bodyPr rtlCol="0" anchor="ctr"/>
+          <a:lstStyle/>
+          <a:p>
+            <a:pPr algn="ctr"/>
+          </a:p>
+        </p:txBody>
+      </p:sp>
+      <p:sp>
+        <p:nvSpPr>
+          <p:cNvPr id="16" name="TextBox 15"/>
+          <p:cNvSpPr txBox="1"/>
+          <p:nvPr/>
+        </p:nvSpPr>
+        <p:spPr>
+          <a:xfrm>
+            <a:off x="960120" y="5596128"/>
+            <a:ext cx="10241280" cy="640080"/>
+          </a:xfrm>
+          <a:prstGeom prst="rect">
+            <a:avLst/>
+          </a:prstGeom>
+          <a:noFill/>
+        </p:spPr>
+        <p:txBody>
+          <a:bodyPr wrap="square" lIns="0" rIns="0" tIns="0" bIns="0">
+            <a:spAutoFit/>
+          </a:bodyPr>
+          <a:lstStyle/>
+          <a:p>
+            <a:pPr>
+              <a:defRPr sz="850" b="1">
+                <a:solidFill>
+                  <a:srgbClr val="38BDF8"/>
+                </a:solidFill>
+              </a:defRPr>
+            </a:pPr>
+            <a:r>
+              <a:t>UNIFIED DATA PIPELINE FLOW</a:t>
+            </a:r>
+          </a:p>
+          <a:p>
+            <a:pPr>
+              <a:spcBef>
+                <a:spcPts val="200"/>
+              </a:spcBef>
+              <a:defRPr sz="950" b="1">
+                <a:solidFill>
+                  <a:srgbClr val="FFFFFF"/>
+                </a:solidFill>
+              </a:defRPr>
+            </a:pPr>
+            <a:r>
+              <a:t>Triaxial Vibration &amp; Oil Telemetry ➔ Edge FFT Spectral Waveform Bus ➔ Physics-Based RUL Prognostics ➔ Automated Maintenance Dispatch</a:t>
+            </a:r>
+          </a:p>
+        </p:txBody>
+      </p:sp>
+    </p:spTree>
+  </p:cSld>
+  <p:clrMapOvr>
+    <a:masterClrMapping/>
+  </p:clrMapOvr>
+</p:sld>
+</file>
+
+<file path=ppt/slides/slide7.xml><?xml version="1.0" encoding="utf-8"?>
+<p:sld xmlns:a="http://schemas.openxmlformats.org/drawingml/2006/main" xmlns:p="http://schemas.openxmlformats.org/presentationml/2006/main" xmlns:r="http://schemas.openxmlformats.org/officeDocument/2006/relationships">
+  <p:cSld>
+    <p:spTree>
+      <p:nvGrpSpPr>
+        <p:cNvPr id="1" name=""/>
+        <p:cNvGrpSpPr/>
+        <p:nvPr/>
+      </p:nvGrpSpPr>
+      <p:grpSpPr/>
+      <p:sp>
+        <p:nvSpPr>
+          <p:cNvPr id="2" name="Rectangle 1"/>
+          <p:cNvSpPr/>
+          <p:nvPr/>
+        </p:nvSpPr>
+        <p:spPr>
+          <a:xfrm>
+            <a:off x="0" y="0"/>
+            <a:ext cx="12191695" cy="6858000"/>
+          </a:xfrm>
+          <a:prstGeom prst="rect">
+            <a:avLst/>
+          </a:prstGeom>
+          <a:solidFill>
+            <a:srgbClr val="0B0F17"/>
+          </a:solidFill>
+          <a:ln>
+            <a:noFill/>
+          </a:ln>
+        </p:spPr>
+        <p:style>
+          <a:lnRef idx="1">
+            <a:schemeClr val="accent1"/>
+          </a:lnRef>
+          <a:fillRef idx="3">
+            <a:schemeClr val="accent1"/>
+          </a:fillRef>
+          <a:effectRef idx="2">
+            <a:schemeClr val="accent1"/>
+          </a:effectRef>
+          <a:fontRef idx="minor">
+            <a:schemeClr val="lt1"/>
+          </a:fontRef>
+        </p:style>
+        <p:txBody>
+          <a:bodyPr rtlCol="0" anchor="ctr"/>
+          <a:lstStyle/>
+          <a:p>
+            <a:pPr algn="ctr"/>
+          </a:p>
+        </p:txBody>
+      </p:sp>
+      <p:sp>
+        <p:nvSpPr>
+          <p:cNvPr id="3" name="Rectangle 2"/>
+          <p:cNvSpPr/>
+          <p:nvPr/>
+        </p:nvSpPr>
+        <p:spPr>
+          <a:xfrm>
+            <a:off x="731520" y="365760"/>
+            <a:ext cx="10728655" cy="18288"/>
+          </a:xfrm>
+          <a:prstGeom prst="rect">
+            <a:avLst/>
+          </a:prstGeom>
+          <a:solidFill>
+            <a:srgbClr val="38BDF8"/>
+          </a:solidFill>
+          <a:ln>
+            <a:solidFill>
+              <a:srgbClr val="38BDF8"/>
+            </a:solidFill>
+          </a:ln>
+        </p:spPr>
+        <p:style>
+          <a:lnRef idx="1">
+            <a:schemeClr val="accent1"/>
+          </a:lnRef>
+          <a:fillRef idx="3">
+            <a:schemeClr val="accent1"/>
+          </a:fillRef>
+          <a:effectRef idx="2">
+            <a:schemeClr val="accent1"/>
+          </a:effectRef>
+          <a:fontRef idx="minor">
+            <a:schemeClr val="lt1"/>
+          </a:fontRef>
+        </p:style>
+        <p:txBody>
+          <a:bodyPr rtlCol="0" anchor="ctr"/>
+          <a:lstStyle/>
+          <a:p>
+            <a:pPr algn="ctr"/>
+          </a:p>
+        </p:txBody>
+      </p:sp>
+      <p:sp>
+        <p:nvSpPr>
+          <p:cNvPr id="4" name="TextBox 3"/>
+          <p:cNvSpPr txBox="1"/>
+          <p:nvPr/>
+        </p:nvSpPr>
+        <p:spPr>
+          <a:xfrm>
+            <a:off x="731520" y="438912"/>
+            <a:ext cx="8229600" cy="274320"/>
+          </a:xfrm>
+          <a:prstGeom prst="rect">
+            <a:avLst/>
+          </a:prstGeom>
+          <a:noFill/>
+        </p:spPr>
+        <p:txBody>
+          <a:bodyPr wrap="square" lIns="0" rIns="0" tIns="0" bIns="0">
+            <a:spAutoFit/>
+          </a:bodyPr>
+          <a:lstStyle/>
+          <a:p>
+            <a:pPr>
+              <a:defRPr sz="950" b="1">
+                <a:solidFill>
+                  <a:srgbClr val="38BDF8"/>
+                </a:solidFill>
+              </a:defRPr>
+            </a:pPr>
+            <a:r>
+              <a:t>TERRESTRIAL PLATFORM  |  TERRAASSETS  |  DEPLOYMENT &amp; SI VALUE</a:t>
+            </a:r>
+          </a:p>
+        </p:txBody>
+      </p:sp>
+      <p:sp>
+        <p:nvSpPr>
+          <p:cNvPr id="5" name="TextBox 4"/>
+          <p:cNvSpPr txBox="1"/>
+          <p:nvPr/>
+        </p:nvSpPr>
+        <p:spPr>
+          <a:xfrm>
+            <a:off x="731520" y="731520"/>
+            <a:ext cx="9601200" cy="777240"/>
+          </a:xfrm>
+          <a:prstGeom prst="rect">
+            <a:avLst/>
+          </a:prstGeom>
+          <a:noFill/>
+        </p:spPr>
+        <p:txBody>
+          <a:bodyPr wrap="square" lIns="0" rIns="0" tIns="0" bIns="0">
+            <a:spAutoFit/>
+          </a:bodyPr>
+          <a:lstStyle/>
+          <a:p>
+            <a:pPr>
+              <a:defRPr sz="1900" b="1">
+                <a:solidFill>
+                  <a:srgbClr val="FFFFFF"/>
+                </a:solidFill>
+              </a:defRPr>
+            </a:pPr>
+            <a:r>
+              <a:t>System Integrator Deployment Framework &amp; Commercial Model</a:t>
+            </a:r>
+          </a:p>
+          <a:p>
+            <a:pPr>
+              <a:spcBef>
+                <a:spcPts val="300"/>
+              </a:spcBef>
+              <a:defRPr sz="1050">
+                <a:solidFill>
+                  <a:srgbClr val="94A3B8"/>
+                </a:solidFill>
+              </a:defRPr>
+            </a:pPr>
+            <a:r>
+              <a:t>Zero rip-and-replace turnkey onboarding with recurring enterprise margins and co-selling enablement.</a:t>
+            </a:r>
+          </a:p>
+        </p:txBody>
+      </p:sp>
+      <p:pic>
+        <p:nvPicPr>
+          <p:cNvPr id="6" name="Picture 5" descr="tp_logo_white.png"/>
+          <p:cNvPicPr>
+            <a:picLocks noChangeAspect="1"/>
+          </p:cNvPicPr>
+          <p:nvPr/>
+        </p:nvPicPr>
+        <p:blipFill>
+          <a:blip r:embed="rId2"/>
+          <a:stretch>
+            <a:fillRect/>
+          </a:stretch>
+        </p:blipFill>
+        <p:spPr>
+          <a:xfrm>
+            <a:off x="10469880" y="411480"/>
+            <a:ext cx="987552" cy="384048"/>
+          </a:xfrm>
+          <a:prstGeom prst="rect">
+            <a:avLst/>
+          </a:prstGeom>
+        </p:spPr>
+      </p:pic>
+      <p:sp>
+        <p:nvSpPr>
+          <p:cNvPr id="7" name="Rounded Rectangle 6"/>
+          <p:cNvSpPr/>
+          <p:nvPr/>
+        </p:nvSpPr>
+        <p:spPr>
+          <a:xfrm>
+            <a:off x="731520" y="1691640"/>
+            <a:ext cx="3429000" cy="2651760"/>
+          </a:xfrm>
+          <a:prstGeom prst="roundRect">
+            <a:avLst/>
+          </a:prstGeom>
+          <a:solidFill>
+            <a:srgbClr val="131926"/>
+          </a:solidFill>
+          <a:ln w="12700">
+            <a:solidFill>
+              <a:srgbClr val="28344B"/>
+            </a:solidFill>
+          </a:ln>
+        </p:spPr>
+        <p:style>
+          <a:lnRef idx="1">
+            <a:schemeClr val="accent1"/>
+          </a:lnRef>
+          <a:fillRef idx="3">
+            <a:schemeClr val="accent1"/>
+          </a:fillRef>
+          <a:effectRef idx="2">
+            <a:schemeClr val="accent1"/>
+          </a:effectRef>
+          <a:fontRef idx="minor">
+            <a:schemeClr val="lt1"/>
+          </a:fontRef>
+        </p:style>
+        <p:txBody>
+          <a:bodyPr rtlCol="0" anchor="ctr"/>
+          <a:lstStyle/>
+          <a:p>
+            <a:pPr algn="ctr"/>
+          </a:p>
+        </p:txBody>
+      </p:sp>
+      <p:sp>
+        <p:nvSpPr>
+          <p:cNvPr id="8" name="TextBox 7"/>
+          <p:cNvSpPr txBox="1"/>
+          <p:nvPr/>
+        </p:nvSpPr>
+        <p:spPr>
+          <a:xfrm>
+            <a:off x="914400" y="1856232"/>
+            <a:ext cx="3063240" cy="2322576"/>
+          </a:xfrm>
+          <a:prstGeom prst="rect">
+            <a:avLst/>
+          </a:prstGeom>
+          <a:noFill/>
+        </p:spPr>
+        <p:txBody>
+          <a:bodyPr wrap="square" lIns="0" rIns="0" tIns="0" bIns="0">
+            <a:spAutoFit/>
+          </a:bodyPr>
+          <a:lstStyle/>
+          <a:p>
+            <a:pPr>
+              <a:defRPr sz="850" b="1">
+                <a:solidFill>
+                  <a:srgbClr val="38BDF8"/>
+                </a:solidFill>
+              </a:defRPr>
+            </a:pPr>
+            <a:r>
+              <a:t>PHASE 01 | CONNECTIVITY &amp; AUDIT</a:t>
+            </a:r>
+          </a:p>
+          <a:p>
+            <a:pPr>
+              <a:spcBef>
+                <a:spcPts val="300"/>
+              </a:spcBef>
+              <a:spcAft>
+                <a:spcPts val="600"/>
               </a:spcAft>
-              <a:defRPr sz="1150" b="1">
-                <a:solidFill>
-                  <a:srgbClr val="00D4FF"/>
+              <a:defRPr sz="1200" b="1">
+                <a:solidFill>
+                  <a:srgbClr val="FFFFFF"/>
+                </a:solidFill>
+              </a:defRPr>
+            </a:pPr>
+            <a:r>
+              <a:t>Zero Rip-and-Replace Onboarding</a:t>
+            </a:r>
+          </a:p>
+          <a:p>
+            <a:pPr>
+              <a:defRPr sz="950">
+                <a:solidFill>
+                  <a:srgbClr val="F1F5F9"/>
+                </a:solidFill>
+              </a:defRPr>
+            </a:pPr>
+            <a:r>
+              <a:t>Non-intrusive protocol discovery across field PLCs, RTUs, and historians. Plug-and-play mapping of tags into the unified TPIM semantic namespace without stopping ongoing plant production.</a:t>
+            </a:r>
+          </a:p>
+        </p:txBody>
+      </p:sp>
+      <p:sp>
+        <p:nvSpPr>
+          <p:cNvPr id="9" name="Rounded Rectangle 8"/>
+          <p:cNvSpPr/>
+          <p:nvPr/>
+        </p:nvSpPr>
+        <p:spPr>
+          <a:xfrm>
+            <a:off x="4379976" y="1691640"/>
+            <a:ext cx="3429000" cy="2651760"/>
+          </a:xfrm>
+          <a:prstGeom prst="roundRect">
+            <a:avLst/>
+          </a:prstGeom>
+          <a:solidFill>
+            <a:srgbClr val="131926"/>
+          </a:solidFill>
+          <a:ln w="12700">
+            <a:solidFill>
+              <a:srgbClr val="28344B"/>
+            </a:solidFill>
+          </a:ln>
+        </p:spPr>
+        <p:style>
+          <a:lnRef idx="1">
+            <a:schemeClr val="accent1"/>
+          </a:lnRef>
+          <a:fillRef idx="3">
+            <a:schemeClr val="accent1"/>
+          </a:fillRef>
+          <a:effectRef idx="2">
+            <a:schemeClr val="accent1"/>
+          </a:effectRef>
+          <a:fontRef idx="minor">
+            <a:schemeClr val="lt1"/>
+          </a:fontRef>
+        </p:style>
+        <p:txBody>
+          <a:bodyPr rtlCol="0" anchor="ctr"/>
+          <a:lstStyle/>
+          <a:p>
+            <a:pPr algn="ctr"/>
+          </a:p>
+        </p:txBody>
+      </p:sp>
+      <p:sp>
+        <p:nvSpPr>
+          <p:cNvPr id="10" name="TextBox 9"/>
+          <p:cNvSpPr txBox="1"/>
+          <p:nvPr/>
+        </p:nvSpPr>
+        <p:spPr>
+          <a:xfrm>
+            <a:off x="4562856" y="1856232"/>
+            <a:ext cx="3063240" cy="2322576"/>
+          </a:xfrm>
+          <a:prstGeom prst="rect">
+            <a:avLst/>
+          </a:prstGeom>
+          <a:noFill/>
+        </p:spPr>
+        <p:txBody>
+          <a:bodyPr wrap="square" lIns="0" rIns="0" tIns="0" bIns="0">
+            <a:spAutoFit/>
+          </a:bodyPr>
+          <a:lstStyle/>
+          <a:p>
+            <a:pPr>
+              <a:defRPr sz="850" b="1">
+                <a:solidFill>
+                  <a:srgbClr val="38BDF8"/>
+                </a:solidFill>
+              </a:defRPr>
+            </a:pPr>
+            <a:r>
+              <a:t>PHASE 02 | TWIN CALIBRATION</a:t>
+            </a:r>
+          </a:p>
+          <a:p>
+            <a:pPr>
+              <a:spcBef>
+                <a:spcPts val="300"/>
+              </a:spcBef>
+              <a:spcAft>
+                <a:spcPts val="600"/>
+              </a:spcAft>
+              <a:defRPr sz="1200" b="1">
+                <a:solidFill>
+                  <a:srgbClr val="FFFFFF"/>
+                </a:solidFill>
+              </a:defRPr>
+            </a:pPr>
+            <a:r>
+              <a:t>Physics-Model Synchronization</a:t>
+            </a:r>
+          </a:p>
+          <a:p>
+            <a:pPr>
+              <a:defRPr sz="950">
+                <a:solidFill>
+                  <a:srgbClr val="F1F5F9"/>
+                </a:solidFill>
+              </a:defRPr>
+            </a:pPr>
+            <a:r>
+              <a:t>Deploy high-frequency Edge Gateway on premise. Calibrate first-principles thermodynamic and kinematic models against historical telemetry to achieve 99.4%+ deterministic accuracy.</a:t>
+            </a:r>
+          </a:p>
+        </p:txBody>
+      </p:sp>
+      <p:sp>
+        <p:nvSpPr>
+          <p:cNvPr id="11" name="Rounded Rectangle 10"/>
+          <p:cNvSpPr/>
+          <p:nvPr/>
+        </p:nvSpPr>
+        <p:spPr>
+          <a:xfrm>
+            <a:off x="8028432" y="1691640"/>
+            <a:ext cx="3429000" cy="2651760"/>
+          </a:xfrm>
+          <a:prstGeom prst="roundRect">
+            <a:avLst/>
+          </a:prstGeom>
+          <a:solidFill>
+            <a:srgbClr val="131926"/>
+          </a:solidFill>
+          <a:ln w="12700">
+            <a:solidFill>
+              <a:srgbClr val="28344B"/>
+            </a:solidFill>
+          </a:ln>
+        </p:spPr>
+        <p:style>
+          <a:lnRef idx="1">
+            <a:schemeClr val="accent1"/>
+          </a:lnRef>
+          <a:fillRef idx="3">
+            <a:schemeClr val="accent1"/>
+          </a:fillRef>
+          <a:effectRef idx="2">
+            <a:schemeClr val="accent1"/>
+          </a:effectRef>
+          <a:fontRef idx="minor">
+            <a:schemeClr val="lt1"/>
+          </a:fontRef>
+        </p:style>
+        <p:txBody>
+          <a:bodyPr rtlCol="0" anchor="ctr"/>
+          <a:lstStyle/>
+          <a:p>
+            <a:pPr algn="ctr"/>
+          </a:p>
+        </p:txBody>
+      </p:sp>
+      <p:sp>
+        <p:nvSpPr>
+          <p:cNvPr id="12" name="TextBox 11"/>
+          <p:cNvSpPr txBox="1"/>
+          <p:nvPr/>
+        </p:nvSpPr>
+        <p:spPr>
+          <a:xfrm>
+            <a:off x="8211312" y="1856232"/>
+            <a:ext cx="3063240" cy="2322576"/>
+          </a:xfrm>
+          <a:prstGeom prst="rect">
+            <a:avLst/>
+          </a:prstGeom>
+          <a:noFill/>
+        </p:spPr>
+        <p:txBody>
+          <a:bodyPr wrap="square" lIns="0" rIns="0" tIns="0" bIns="0">
+            <a:spAutoFit/>
+          </a:bodyPr>
+          <a:lstStyle/>
+          <a:p>
+            <a:pPr>
+              <a:defRPr sz="850" b="1">
+                <a:solidFill>
+                  <a:srgbClr val="38BDF8"/>
+                </a:solidFill>
+              </a:defRPr>
+            </a:pPr>
+            <a:r>
+              <a:t>PHASE 03 | AUTONOMOUS GO-LIVE</a:t>
+            </a:r>
+          </a:p>
+          <a:p>
+            <a:pPr>
+              <a:spcBef>
+                <a:spcPts val="300"/>
+              </a:spcBef>
+              <a:spcAft>
+                <a:spcPts val="600"/>
+              </a:spcAft>
+              <a:defRPr sz="1200" b="1">
+                <a:solidFill>
+                  <a:srgbClr val="FFFFFF"/>
+                </a:solidFill>
+              </a:defRPr>
+            </a:pPr>
+            <a:r>
+              <a:t>Closed-Loop Setpoint Actuation</a:t>
+            </a:r>
+          </a:p>
+          <a:p>
+            <a:pPr>
+              <a:defRPr sz="950">
+                <a:solidFill>
+                  <a:srgbClr val="F1F5F9"/>
+                </a:solidFill>
+              </a:defRPr>
+            </a:pPr>
+            <a:r>
+              <a:t>Supervisory closed-loop setpoint dispatch with bumpless transfer. Comprehensive ISA-101 verified cockpit handoff with continuous SI recurring monitoring and support tiers.</a:t>
+            </a:r>
+          </a:p>
+        </p:txBody>
+      </p:sp>
+      <p:sp>
+        <p:nvSpPr>
+          <p:cNvPr id="13" name="Rounded Rectangle 12"/>
+          <p:cNvSpPr/>
+          <p:nvPr/>
+        </p:nvSpPr>
+        <p:spPr>
+          <a:xfrm>
+            <a:off x="731520" y="4526280"/>
+            <a:ext cx="10728655" cy="1828800"/>
+          </a:xfrm>
+          <a:prstGeom prst="roundRect">
+            <a:avLst/>
+          </a:prstGeom>
+          <a:solidFill>
+            <a:srgbClr val="131926"/>
+          </a:solidFill>
+          <a:ln w="12700">
+            <a:solidFill>
+              <a:srgbClr val="38BDF8"/>
+            </a:solidFill>
+          </a:ln>
+        </p:spPr>
+        <p:style>
+          <a:lnRef idx="1">
+            <a:schemeClr val="accent1"/>
+          </a:lnRef>
+          <a:fillRef idx="3">
+            <a:schemeClr val="accent1"/>
+          </a:fillRef>
+          <a:effectRef idx="2">
+            <a:schemeClr val="accent1"/>
+          </a:effectRef>
+          <a:fontRef idx="minor">
+            <a:schemeClr val="lt1"/>
+          </a:fontRef>
+        </p:style>
+        <p:txBody>
+          <a:bodyPr rtlCol="0" anchor="ctr"/>
+          <a:lstStyle/>
+          <a:p>
+            <a:pPr algn="ctr"/>
+          </a:p>
+        </p:txBody>
+      </p:sp>
+      <p:sp>
+        <p:nvSpPr>
+          <p:cNvPr id="14" name="TextBox 13"/>
+          <p:cNvSpPr txBox="1"/>
+          <p:nvPr/>
+        </p:nvSpPr>
+        <p:spPr>
+          <a:xfrm>
+            <a:off x="960120" y="4663440"/>
+            <a:ext cx="10241280" cy="1554480"/>
+          </a:xfrm>
+          <a:prstGeom prst="rect">
+            <a:avLst/>
+          </a:prstGeom>
+          <a:noFill/>
+        </p:spPr>
+        <p:txBody>
+          <a:bodyPr wrap="square" lIns="0" rIns="0" tIns="0" bIns="0">
+            <a:spAutoFit/>
+          </a:bodyPr>
+          <a:lstStyle/>
+          <a:p>
+            <a:pPr>
+              <a:defRPr sz="1000" b="1">
+                <a:solidFill>
+                  <a:srgbClr val="38BDF8"/>
                 </a:solidFill>
               </a:defRPr>
             </a:pPr>
@@ -6303,14 +9065,47 @@
           </a:p>
           <a:p>
             <a:pPr>
-              <a:defRPr sz="1300" b="1">
-                <a:solidFill>
-                  <a:srgbClr val="FFFFFF"/>
-                </a:solidFill>
-              </a:defRPr>
-            </a:pPr>
-            <a:r>
-              <a:t>High recurring annual software margins (ARR)  |  Turnkey deployment in days, not months  |  Full co-selling &amp; pre-sales engineering support  |  Certified partner portal at platform.tpcloud.tech</a:t>
+              <a:spcBef>
+                <a:spcPts val="300"/>
+              </a:spcBef>
+              <a:defRPr sz="950">
+                <a:solidFill>
+                  <a:srgbClr val="F1F5F9"/>
+                </a:solidFill>
+              </a:defRPr>
+            </a:pPr>
+            <a:r>
+              <a:t>• High-Margin Software Recurring Revenue: Earn 25%–35% continuous recurring margin on every TerraAssets software deployment, maintenance tier, and AI compute instance.</a:t>
+            </a:r>
+          </a:p>
+          <a:p>
+            <a:pPr>
+              <a:spcBef>
+                <a:spcPts val="300"/>
+              </a:spcBef>
+              <a:defRPr sz="950">
+                <a:solidFill>
+                  <a:srgbClr val="F1F5F9"/>
+                </a:solidFill>
+              </a:defRPr>
+            </a:pPr>
+            <a:r>
+              <a:t>• Turnkey Engineering Velocity: Deploy within 7 to 14 days leveraging pre-trained neural networks and automated semantic tag mapping, avoiding expensive months-long custom PLC code rewrites.</a:t>
+            </a:r>
+          </a:p>
+          <a:p>
+            <a:pPr>
+              <a:spcBef>
+                <a:spcPts val="300"/>
+              </a:spcBef>
+              <a:defRPr sz="950">
+                <a:solidFill>
+                  <a:srgbClr val="F1F5F9"/>
+                </a:solidFill>
+              </a:defRPr>
+            </a:pPr>
+            <a:r>
+              <a:t>• Enterprise Co-Selling &amp; Ecosystem: Access joint executive pipeline opportunities, certified engineering documentation, and board-level C-Suite presentation toolkits.</a:t>
             </a:r>
           </a:p>
         </p:txBody>
@@ -6641,4 +9436,324 @@
   </a:objectDefaults>
   <a:extraClrSchemeLst/>
 </a:theme>
+</file>
+
+<file path=ppt/theme/theme2.xml><?xml version="1.0" encoding="utf-8"?>
+<a:theme xmlns:a="http://schemas.openxmlformats.org/drawingml/2006/main" name="Office Theme">
+  <a:themeElements>
+    <a:clrScheme name="Office">
+      <a:dk1>
+        <a:sysClr val="windowText" lastClr="000000"/>
+      </a:dk1>
+      <a:lt1>
+        <a:sysClr val="window" lastClr="FFFFFF"/>
+      </a:lt1>
+      <a:dk2>
+        <a:srgbClr val="1F497D"/>
+      </a:dk2>
+      <a:lt2>
+        <a:srgbClr val="EEECE1"/>
+      </a:lt2>
+      <a:accent1>
+        <a:srgbClr val="4F81BD"/>
+      </a:accent1>
+      <a:accent2>
+        <a:srgbClr val="C0504D"/>
+      </a:accent2>
+      <a:accent3>
+        <a:srgbClr val="9BBB59"/>
+      </a:accent3>
+      <a:accent4>
+        <a:srgbClr val="8064A2"/>
+      </a:accent4>
+      <a:accent5>
+        <a:srgbClr val="4BACC6"/>
+      </a:accent5>
+      <a:accent6>
+        <a:srgbClr val="F79646"/>
+      </a:accent6>
+      <a:hlink>
+        <a:srgbClr val="0000FF"/>
+      </a:hlink>
+      <a:folHlink>
+        <a:srgbClr val="800080"/>
+      </a:folHlink>
+    </a:clrScheme>
+    <a:fontScheme name="Office">
+      <a:majorFont>
+        <a:latin typeface="Calibri"/>
+        <a:ea typeface=""/>
+        <a:cs typeface=""/>
+        <a:font script="Jpan" typeface="ＭＳ Ｐゴシック"/>
+        <a:font script="Hang" typeface="맑은 고딕"/>
+        <a:font script="Hans" typeface="宋体"/>
+        <a:font script="Hant" typeface="新細明體"/>
+        <a:font script="Arab" typeface="Times New Roman"/>
+        <a:font script="Hebr" typeface="Times New Roman"/>
+        <a:font script="Thai" typeface="Angsana New"/>
+        <a:font script="Ethi" typeface="Nyala"/>
+        <a:font script="Beng" typeface="Vrinda"/>
+        <a:font script="Gujr" typeface="Shruti"/>
+        <a:font script="Khmr" typeface="MoolBoran"/>
+        <a:font script="Knda" typeface="Tunga"/>
+        <a:font script="Guru" typeface="Raavi"/>
+        <a:font script="Cans" typeface="Euphemia"/>
+        <a:font script="Cher" typeface="Plantagenet Cherokee"/>
+        <a:font script="Yiii" typeface="Microsoft Yi Baiti"/>
+        <a:font script="Tibt" typeface="Microsoft Himalaya"/>
+        <a:font script="Thaa" typeface="MV Boli"/>
+        <a:font script="Deva" typeface="Mangal"/>
+        <a:font script="Telu" typeface="Gautami"/>
+        <a:font script="Taml" typeface="Latha"/>
+        <a:font script="Syrc" typeface="Estrangelo Edessa"/>
+        <a:font script="Orya" typeface="Kalinga"/>
+        <a:font script="Mlym" typeface="Kartika"/>
+        <a:font script="Laoo" typeface="DokChampa"/>
+        <a:font script="Sinh" typeface="Iskoola Pota"/>
+        <a:font script="Mong" typeface="Mongolian Baiti"/>
+        <a:font script="Viet" typeface="Times New Roman"/>
+        <a:font script="Uigh" typeface="Microsoft Uighur"/>
+        <a:font script="Geor" typeface="Sylfaen"/>
+      </a:majorFont>
+      <a:minorFont>
+        <a:latin typeface="Calibri"/>
+        <a:ea typeface=""/>
+        <a:cs typeface=""/>
+        <a:font script="Jpan" typeface="ＭＳ Ｐゴシック"/>
+        <a:font script="Hang" typeface="맑은 고딕"/>
+        <a:font script="Hans" typeface="宋体"/>
+        <a:font script="Hant" typeface="新細明體"/>
+        <a:font script="Arab" typeface="Arial"/>
+        <a:font script="Hebr" typeface="Arial"/>
+        <a:font script="Thai" typeface="Cordia New"/>
+        <a:font script="Ethi" typeface="Nyala"/>
+        <a:font script="Beng" typeface="Vrinda"/>
+        <a:font script="Gujr" typeface="Shruti"/>
+        <a:font script="Khmr" typeface="DaunPenh"/>
+        <a:font script="Knda" typeface="Tunga"/>
+        <a:font script="Guru" typeface="Raavi"/>
+        <a:font script="Cans" typeface="Euphemia"/>
+        <a:font script="Cher" typeface="Plantagenet Cherokee"/>
+        <a:font script="Yiii" typeface="Microsoft Yi Baiti"/>
+        <a:font script="Tibt" typeface="Microsoft Himalaya"/>
+        <a:font script="Thaa" typeface="MV Boli"/>
+        <a:font script="Deva" typeface="Mangal"/>
+        <a:font script="Telu" typeface="Gautami"/>
+        <a:font script="Taml" typeface="Latha"/>
+        <a:font script="Syrc" typeface="Estrangelo Edessa"/>
+        <a:font script="Orya" typeface="Kalinga"/>
+        <a:font script="Mlym" typeface="Kartika"/>
+        <a:font script="Laoo" typeface="DokChampa"/>
+        <a:font script="Sinh" typeface="Iskoola Pota"/>
+        <a:font script="Mong" typeface="Mongolian Baiti"/>
+        <a:font script="Viet" typeface="Arial"/>
+        <a:font script="Uigh" typeface="Microsoft Uighur"/>
+        <a:font script="Geor" typeface="Sylfaen"/>
+      </a:minorFont>
+    </a:fontScheme>
+    <a:fmtScheme name="Office">
+      <a:fillStyleLst>
+        <a:solidFill>
+          <a:schemeClr val="phClr"/>
+        </a:solidFill>
+        <a:gradFill rotWithShape="1">
+          <a:gsLst>
+            <a:gs pos="0">
+              <a:schemeClr val="phClr">
+                <a:tint val="50000"/>
+                <a:satMod val="300000"/>
+              </a:schemeClr>
+            </a:gs>
+            <a:gs pos="35000">
+              <a:schemeClr val="phClr">
+                <a:tint val="37000"/>
+                <a:satMod val="300000"/>
+              </a:schemeClr>
+            </a:gs>
+            <a:gs pos="100000">
+              <a:schemeClr val="phClr">
+                <a:tint val="15000"/>
+                <a:satMod val="350000"/>
+              </a:schemeClr>
+            </a:gs>
+          </a:gsLst>
+          <a:lin ang="16200000" scaled="1"/>
+        </a:gradFill>
+        <a:gradFill rotWithShape="1">
+          <a:gsLst>
+            <a:gs pos="0">
+              <a:schemeClr val="phClr">
+                <a:tint val="100000"/>
+                <a:shade val="100000"/>
+                <a:satMod val="130000"/>
+              </a:schemeClr>
+            </a:gs>
+            <a:gs pos="100000">
+              <a:schemeClr val="phClr">
+                <a:tint val="50000"/>
+                <a:shade val="100000"/>
+                <a:satMod val="350000"/>
+              </a:schemeClr>
+            </a:gs>
+          </a:gsLst>
+          <a:lin ang="16200000" scaled="0"/>
+        </a:gradFill>
+      </a:fillStyleLst>
+      <a:lnStyleLst>
+        <a:ln w="9525" cap="flat" cmpd="sng" algn="ctr">
+          <a:solidFill>
+            <a:schemeClr val="phClr">
+              <a:shade val="95000"/>
+              <a:satMod val="105000"/>
+            </a:schemeClr>
+          </a:solidFill>
+          <a:prstDash val="solid"/>
+        </a:ln>
+        <a:ln w="25400" cap="flat" cmpd="sng" algn="ctr">
+          <a:solidFill>
+            <a:schemeClr val="phClr"/>
+          </a:solidFill>
+          <a:prstDash val="solid"/>
+        </a:ln>
+        <a:ln w="38100" cap="flat" cmpd="sng" algn="ctr">
+          <a:solidFill>
+            <a:schemeClr val="phClr"/>
+          </a:solidFill>
+          <a:prstDash val="solid"/>
+        </a:ln>
+      </a:lnStyleLst>
+      <a:effectStyleLst>
+        <a:effectStyle>
+          <a:effectLst>
+            <a:outerShdw blurRad="40000" dist="20000" dir="5400000" rotWithShape="0">
+              <a:srgbClr val="000000">
+                <a:alpha val="38000"/>
+              </a:srgbClr>
+            </a:outerShdw>
+          </a:effectLst>
+        </a:effectStyle>
+        <a:effectStyle>
+          <a:effectLst>
+            <a:outerShdw blurRad="40000" dist="23000" dir="5400000" rotWithShape="0">
+              <a:srgbClr val="000000">
+                <a:alpha val="35000"/>
+              </a:srgbClr>
+            </a:outerShdw>
+          </a:effectLst>
+        </a:effectStyle>
+        <a:effectStyle>
+          <a:effectLst>
+            <a:outerShdw blurRad="40000" dist="23000" dir="5400000" rotWithShape="0">
+              <a:srgbClr val="000000">
+                <a:alpha val="35000"/>
+              </a:srgbClr>
+            </a:outerShdw>
+          </a:effectLst>
+          <a:scene3d>
+            <a:camera prst="orthographicFront">
+              <a:rot lat="0" lon="0" rev="0"/>
+            </a:camera>
+            <a:lightRig rig="threePt" dir="t">
+              <a:rot lat="0" lon="0" rev="1200000"/>
+            </a:lightRig>
+          </a:scene3d>
+          <a:sp3d>
+            <a:bevelT w="63500" h="25400"/>
+          </a:sp3d>
+        </a:effectStyle>
+      </a:effectStyleLst>
+      <a:bgFillStyleLst>
+        <a:solidFill>
+          <a:schemeClr val="phClr"/>
+        </a:solidFill>
+        <a:gradFill rotWithShape="1">
+          <a:gsLst>
+            <a:gs pos="0">
+              <a:schemeClr val="phClr">
+                <a:tint val="40000"/>
+                <a:satMod val="350000"/>
+              </a:schemeClr>
+            </a:gs>
+            <a:gs pos="40000">
+              <a:schemeClr val="phClr">
+                <a:tint val="45000"/>
+                <a:shade val="99000"/>
+                <a:satMod val="350000"/>
+              </a:schemeClr>
+            </a:gs>
+            <a:gs pos="100000">
+              <a:schemeClr val="phClr">
+                <a:shade val="20000"/>
+                <a:satMod val="255000"/>
+              </a:schemeClr>
+            </a:gs>
+          </a:gsLst>
+          <a:path path="circle">
+            <a:fillToRect l="50000" t="-80000" r="50000" b="180000"/>
+          </a:path>
+        </a:gradFill>
+        <a:gradFill rotWithShape="1">
+          <a:gsLst>
+            <a:gs pos="0">
+              <a:schemeClr val="phClr">
+                <a:tint val="80000"/>
+                <a:satMod val="300000"/>
+              </a:schemeClr>
+            </a:gs>
+            <a:gs pos="100000">
+              <a:schemeClr val="phClr">
+                <a:shade val="30000"/>
+                <a:satMod val="200000"/>
+              </a:schemeClr>
+            </a:gs>
+          </a:gsLst>
+          <a:path path="circle">
+            <a:fillToRect l="50000" t="50000" r="50000" b="50000"/>
+          </a:path>
+        </a:gradFill>
+      </a:bgFillStyleLst>
+    </a:fmtScheme>
+  </a:themeElements>
+  <a:objectDefaults>
+    <a:spDef>
+      <a:spPr/>
+      <a:bodyPr/>
+      <a:lstStyle/>
+      <a:style>
+        <a:lnRef idx="1">
+          <a:schemeClr val="accent1"/>
+        </a:lnRef>
+        <a:fillRef idx="3">
+          <a:schemeClr val="accent1"/>
+        </a:fillRef>
+        <a:effectRef idx="2">
+          <a:schemeClr val="accent1"/>
+        </a:effectRef>
+        <a:fontRef idx="minor">
+          <a:schemeClr val="lt1"/>
+        </a:fontRef>
+      </a:style>
+    </a:spDef>
+    <a:lnDef>
+      <a:spPr/>
+      <a:bodyPr/>
+      <a:lstStyle/>
+      <a:style>
+        <a:lnRef idx="2">
+          <a:schemeClr val="accent1"/>
+        </a:lnRef>
+        <a:fillRef idx="0">
+          <a:schemeClr val="accent1"/>
+        </a:fillRef>
+        <a:effectRef idx="1">
+          <a:schemeClr val="accent1"/>
+        </a:effectRef>
+        <a:fontRef idx="minor">
+          <a:schemeClr val="tx1"/>
+        </a:fontRef>
+      </a:style>
+    </a:lnDef>
+  </a:objectDefaults>
+  <a:extraClrSchemeLst/>
+</a:theme>
 </file>